--- a/submission_materials/1_Presentation_PPT/BAMKS_D_Final_Presentation.pptx
+++ b/submission_materials/1_Presentation_PPT/BAMKS_D_Final_Presentation.pptx
@@ -21,7 +21,6 @@
     <p:sldId id="269" r:id="rId20"/>
     <p:sldId id="270" r:id="rId21"/>
     <p:sldId id="271" r:id="rId22"/>
-    <p:sldId id="272" r:id="rId23"/>
   </p:sldIdLst>
   <p:sldSz cx="12191695" cy="6858000" type="screen4x3"/>
   <p:notesSz cx="6858000" cy="9144000"/>
@@ -3122,9 +3121,7 @@
             <a:srgbClr val="0F172A"/>
           </a:solidFill>
           <a:ln>
-            <a:solidFill>
-              <a:srgbClr val="0F172A"/>
-            </a:solidFill>
+            <a:noFill/>
           </a:ln>
         </p:spPr>
         <p:style>
@@ -3157,8 +3154,8 @@
         </p:nvSpPr>
         <p:spPr>
           <a:xfrm>
-            <a:off x="914400" y="731520"/>
-            <a:ext cx="10362895" cy="822960"/>
+            <a:off x="914400" y="1097280"/>
+            <a:ext cx="10362895" cy="4754880"/>
           </a:xfrm>
           <a:prstGeom prst="rect">
             <a:avLst/>
@@ -3166,55 +3163,6 @@
           <a:noFill/>
         </p:spPr>
         <p:txBody>
-          <a:bodyPr wrap="none">
-            <a:spAutoFit/>
-          </a:bodyPr>
-          <a:lstStyle/>
-          <a:p>
-            <a:pPr>
-              <a:defRPr sz="1300" b="1">
-                <a:solidFill>
-                  <a:srgbClr val="0284C7"/>
-                </a:solidFill>
-                <a:latin typeface="Arial"/>
-              </a:defRPr>
-            </a:pPr>
-            <a:r>
-              <a:t>VELLORE INSTITUTE OF TECHNOLOGY (VIT), CHENNAI</a:t>
-            </a:r>
-          </a:p>
-          <a:p>
-            <a:pPr>
-              <a:defRPr sz="1100">
-                <a:solidFill>
-                  <a:srgbClr val="94A3B8"/>
-                </a:solidFill>
-                <a:latin typeface="Arial"/>
-              </a:defRPr>
-            </a:pPr>
-            <a:r>
-              <a:t>School of Computer Science and Engineering | Final Review 3 Defense Presentation</a:t>
-            </a:r>
-          </a:p>
-        </p:txBody>
-      </p:sp>
-      <p:sp>
-        <p:nvSpPr>
-          <p:cNvPr id="4" name="TextBox 3"/>
-          <p:cNvSpPr txBox="1"/>
-          <p:nvPr/>
-        </p:nvSpPr>
-        <p:spPr>
-          <a:xfrm>
-            <a:off x="914400" y="1645920"/>
-            <a:ext cx="10362895" cy="2011680"/>
-          </a:xfrm>
-          <a:prstGeom prst="rect">
-            <a:avLst/>
-          </a:prstGeom>
-          <a:noFill/>
-        </p:spPr>
-        <p:txBody>
           <a:bodyPr wrap="square">
             <a:spAutoFit/>
           </a:bodyPr>
@@ -3222,9 +3170,41 @@
           <a:p>
             <a:pPr>
               <a:spcAft>
-                <a:spcPts val="800"/>
-              </a:spcAft>
-              <a:defRPr sz="2600" b="1">
+                <a:spcPts val="600"/>
+              </a:spcAft>
+              <a:defRPr sz="1200" b="1">
+                <a:solidFill>
+                  <a:srgbClr val="0284C7"/>
+                </a:solidFill>
+                <a:latin typeface="Arial"/>
+              </a:defRPr>
+            </a:pPr>
+            <a:r>
+              <a:t>VELLORE INSTITUTE OF TECHNOLOGY (VIT), CHENNAI</a:t>
+            </a:r>
+          </a:p>
+          <a:p>
+            <a:pPr>
+              <a:spcAft>
+                <a:spcPts val="1800"/>
+              </a:spcAft>
+              <a:defRPr sz="1300">
+                <a:solidFill>
+                  <a:srgbClr val="64748B"/>
+                </a:solidFill>
+                <a:latin typeface="Arial"/>
+              </a:defRPr>
+            </a:pPr>
+            <a:r>
+              <a:t>BCSE309L — Cryptography and Network Security | Review 3 Final Evaluation</a:t>
+            </a:r>
+          </a:p>
+          <a:p>
+            <a:pPr>
+              <a:spcAft>
+                <a:spcPts val="1400"/>
+              </a:spcAft>
+              <a:defRPr sz="2500" b="1">
                 <a:solidFill>
                   <a:srgbClr val="FFFFFF"/>
                 </a:solidFill>
@@ -3232,218 +3212,49 @@
               </a:defRPr>
             </a:pPr>
             <a:r>
-              <a:t>BAMKS-D: Enabling Dynamic File-Level Operations in Blockchain-Assisted Attribute-Based Multi-Keyword Search</a:t>
-            </a:r>
-          </a:p>
-          <a:p>
-            <a:pPr>
-              <a:defRPr sz="1500">
-                <a:solidFill>
-                  <a:srgbClr val="0284C7"/>
+              <a:t>BAMKS-D: Enabling Dynamic File-Level Operations in Blockchain-Assisted ABKS for Cloud-Edge-IoT</a:t>
+            </a:r>
+          </a:p>
+          <a:p>
+            <a:pPr>
+              <a:spcAft>
+                <a:spcPts val="2800"/>
+              </a:spcAft>
+              <a:defRPr sz="1400" i="1">
+                <a:solidFill>
+                  <a:srgbClr val="94A3B8"/>
                 </a:solidFill>
                 <a:latin typeface="Arial"/>
               </a:defRPr>
             </a:pPr>
             <a:r>
-              <a:t>A Fine-Grained Cryptographic Protocol &amp; Solidity Smart Contract Extension for Cloud-Edge Healthcare Systems</a:t>
-            </a:r>
-          </a:p>
-        </p:txBody>
-      </p:sp>
-      <p:sp>
-        <p:nvSpPr>
-          <p:cNvPr id="5" name="Rounded Rectangle 4"/>
-          <p:cNvSpPr/>
-          <p:nvPr/>
-        </p:nvSpPr>
-        <p:spPr>
-          <a:xfrm>
-            <a:off x="914400" y="3931920"/>
-            <a:ext cx="5029200" cy="2286000"/>
-          </a:xfrm>
-          <a:prstGeom prst="roundRect">
-            <a:avLst/>
-          </a:prstGeom>
-          <a:solidFill>
-            <a:srgbClr val="1E293B"/>
-          </a:solidFill>
-          <a:ln>
-            <a:solidFill>
-              <a:srgbClr val="334155"/>
-            </a:solidFill>
-          </a:ln>
-        </p:spPr>
-        <p:style>
-          <a:lnRef idx="1">
-            <a:schemeClr val="accent1"/>
-          </a:lnRef>
-          <a:fillRef idx="3">
-            <a:schemeClr val="accent1"/>
-          </a:fillRef>
-          <a:effectRef idx="2">
-            <a:schemeClr val="accent1"/>
-          </a:effectRef>
-          <a:fontRef idx="minor">
-            <a:schemeClr val="lt1"/>
-          </a:fontRef>
-        </p:style>
-        <p:txBody>
-          <a:bodyPr rtlCol="0" anchor="ctr" wrap="square"/>
-          <a:lstStyle/>
-          <a:p>
-            <a:pPr algn="ctr">
-              <a:spcAft>
-                <a:spcPts val="600"/>
-              </a:spcAft>
-              <a:defRPr b="1" sz="1100">
-                <a:solidFill>
-                  <a:srgbClr val="0284C7"/>
-                </a:solidFill>
-              </a:defRPr>
-            </a:pPr>
-            <a:r>
-              <a:t>STUDENT RESEARCHERS &amp; AUTHORS</a:t>
-            </a:r>
-          </a:p>
-          <a:p>
-            <a:pPr>
-              <a:spcAft>
-                <a:spcPts val="400"/>
-              </a:spcAft>
-              <a:defRPr sz="1300" b="1">
+              <a:t>An Algorithmic Prototype &amp; Architecture Integration Layer Resolving Section 8 of Cheng et al. (Elsevier IoT 2026)</a:t>
+            </a:r>
+          </a:p>
+          <a:p>
+            <a:pPr>
+              <a:defRPr sz="1200">
                 <a:solidFill>
                   <a:srgbClr val="FFFFFF"/>
                 </a:solidFill>
-              </a:defRPr>
-            </a:pPr>
-            <a:r>
-              <a:t>• Prashant Singh  (Reg. No: 24BYB1042)</a:t>
-            </a:r>
-          </a:p>
-          <a:p>
-            <a:pPr>
-              <a:spcAft>
-                <a:spcPts val="600"/>
-              </a:spcAft>
-              <a:defRPr sz="1300" b="1">
-                <a:solidFill>
-                  <a:srgbClr val="FFFFFF"/>
-                </a:solidFill>
-              </a:defRPr>
-            </a:pPr>
-            <a:r>
-              <a:t>• Rushikesh Adak (Reg. No: 24BYB1055)</a:t>
-            </a:r>
-          </a:p>
-          <a:p>
-            <a:pPr>
-              <a:defRPr sz="1050">
-                <a:solidFill>
-                  <a:srgbClr val="CBD5E1"/>
-                </a:solidFill>
-              </a:defRPr>
-            </a:pPr>
-            <a:r>
-              <a:t>School of Computer Science and Engineering (SCOPE)</a:t>
-            </a:r>
-          </a:p>
-        </p:txBody>
-      </p:sp>
-      <p:sp>
-        <p:nvSpPr>
-          <p:cNvPr id="6" name="Rounded Rectangle 5"/>
-          <p:cNvSpPr/>
-          <p:nvPr/>
-        </p:nvSpPr>
-        <p:spPr>
-          <a:xfrm>
-            <a:off x="6217920" y="3931920"/>
-            <a:ext cx="5029200" cy="2286000"/>
-          </a:xfrm>
-          <a:prstGeom prst="roundRect">
-            <a:avLst/>
-          </a:prstGeom>
-          <a:solidFill>
-            <a:srgbClr val="1E293B"/>
-          </a:solidFill>
-          <a:ln>
-            <a:solidFill>
-              <a:srgbClr val="334155"/>
-            </a:solidFill>
-          </a:ln>
-        </p:spPr>
-        <p:style>
-          <a:lnRef idx="1">
-            <a:schemeClr val="accent1"/>
-          </a:lnRef>
-          <a:fillRef idx="3">
-            <a:schemeClr val="accent1"/>
-          </a:fillRef>
-          <a:effectRef idx="2">
-            <a:schemeClr val="accent1"/>
-          </a:effectRef>
-          <a:fontRef idx="minor">
-            <a:schemeClr val="lt1"/>
-          </a:fontRef>
-        </p:style>
-        <p:txBody>
-          <a:bodyPr rtlCol="0" anchor="ctr" wrap="square"/>
-          <a:lstStyle/>
-          <a:p>
-            <a:pPr algn="ctr">
-              <a:spcAft>
-                <a:spcPts val="600"/>
-              </a:spcAft>
-              <a:defRPr b="1" sz="1100">
-                <a:solidFill>
-                  <a:srgbClr val="0284C7"/>
-                </a:solidFill>
-              </a:defRPr>
-            </a:pPr>
-            <a:r>
-              <a:t>COURSE &amp; BASE PAPER DETAILS</a:t>
-            </a:r>
-          </a:p>
-          <a:p>
-            <a:pPr>
-              <a:spcAft>
-                <a:spcPts val="400"/>
-              </a:spcAft>
-              <a:defRPr sz="1150" b="1">
-                <a:solidFill>
-                  <a:srgbClr val="FFFFFF"/>
-                </a:solidFill>
-              </a:defRPr>
-            </a:pPr>
-            <a:r>
-              <a:t>• Course: Cryptography and Network Security (BCSE309L)</a:t>
-            </a:r>
-          </a:p>
-          <a:p>
-            <a:pPr>
-              <a:spcAft>
-                <a:spcPts val="600"/>
-              </a:spcAft>
-              <a:defRPr sz="1100">
-                <a:solidFill>
-                  <a:srgbClr val="E2E8F0"/>
-                </a:solidFill>
-              </a:defRPr>
-            </a:pPr>
-            <a:r>
-              <a:t>• Faculty Guide: Prof. Karthika V | SCOPE, VIT Chennai</a:t>
-            </a:r>
-          </a:p>
-          <a:p>
-            <a:pPr>
-              <a:defRPr sz="950">
-                <a:solidFill>
-                  <a:srgbClr val="94A3B8"/>
-                </a:solidFill>
-              </a:defRPr>
-            </a:pPr>
-            <a:r>
-              <a:t>• Base Paper: Cheng et al., Elsevier (Internet of Things), Vol. 36, Art. 101838, Dec 2025/2026 [DOI: 10.1016/j.iot.2025.101838]</a:t>
+                <a:latin typeface="Arial"/>
+              </a:defRPr>
+            </a:pPr>
+            <a:r>
+              <a:t>Student Researchers:</a:t>
+            </a:r>
+            <a:br/>
+            <a:r>
+              <a:t>• Prashant Singh (Reg. No: 24BYB1042) — Protocol Simulation, Dynamic Indexing &amp; REST API</a:t>
+            </a:r>
+            <a:br/>
+            <a:r>
+              <a:t>• Rushikesh Adak (Reg. No: 24BYB1055) — Solidity Smart Contracts, EVM Gas Analysis &amp; Web3 Integration</a:t>
+            </a:r>
+            <a:br/>
+            <a:br/>
+            <a:r>
+              <a:t>Faculty Guide: Prof. Karthika V | School of Computer Science &amp; Engineering (SCOPE)</a:t>
             </a:r>
           </a:p>
         </p:txBody>
@@ -3505,7 +3316,7 @@
           </a:p>
           <a:p>
             <a:pPr>
-              <a:defRPr sz="2200" b="1">
+              <a:defRPr sz="2000" b="1">
                 <a:solidFill>
                   <a:srgbClr val="0F172A"/>
                 </a:solidFill>
@@ -3513,1267 +3324,14 @@
               </a:defRPr>
             </a:pPr>
             <a:r>
-              <a:t>Role-Based Access Control via CP-ABE Policy Enforcement</a:t>
-            </a:r>
-          </a:p>
-        </p:txBody>
-      </p:sp>
-      <p:sp>
-        <p:nvSpPr>
-          <p:cNvPr id="3" name="Rectangle 2"/>
-          <p:cNvSpPr/>
-          <p:nvPr/>
-        </p:nvSpPr>
-        <p:spPr>
-          <a:xfrm>
-            <a:off x="731520" y="1261872"/>
-            <a:ext cx="10728655" cy="36576"/>
-          </a:xfrm>
-          <a:prstGeom prst="rect">
-            <a:avLst/>
-          </a:prstGeom>
-          <a:solidFill>
-            <a:srgbClr val="0284C7"/>
-          </a:solidFill>
-          <a:ln>
-            <a:solidFill>
-              <a:srgbClr val="0284C7"/>
-            </a:solidFill>
-          </a:ln>
-        </p:spPr>
-        <p:style>
-          <a:lnRef idx="1">
-            <a:schemeClr val="accent1"/>
-          </a:lnRef>
-          <a:fillRef idx="3">
-            <a:schemeClr val="accent1"/>
-          </a:fillRef>
-          <a:effectRef idx="2">
-            <a:schemeClr val="accent1"/>
-          </a:effectRef>
-          <a:fontRef idx="minor">
-            <a:schemeClr val="lt1"/>
-          </a:fontRef>
-        </p:style>
-        <p:txBody>
-          <a:bodyPr rtlCol="0" anchor="ctr"/>
-          <a:lstStyle/>
-          <a:p>
-            <a:pPr algn="ctr"/>
-          </a:p>
-        </p:txBody>
-      </p:sp>
-      <p:sp>
-        <p:nvSpPr>
-          <p:cNvPr id="4" name="Rounded Rectangle 3"/>
-          <p:cNvSpPr/>
-          <p:nvPr/>
-        </p:nvSpPr>
-        <p:spPr>
-          <a:xfrm>
-            <a:off x="731520" y="1463040"/>
-            <a:ext cx="5486400" cy="4846320"/>
-          </a:xfrm>
-          <a:prstGeom prst="roundRect">
-            <a:avLst/>
-          </a:prstGeom>
-          <a:solidFill>
-            <a:srgbClr val="F8FAFC"/>
-          </a:solidFill>
-          <a:ln w="15240">
-            <a:solidFill>
-              <a:srgbClr val="16A34A"/>
-            </a:solidFill>
-          </a:ln>
-        </p:spPr>
-        <p:style>
-          <a:lnRef idx="1">
-            <a:schemeClr val="accent1"/>
-          </a:lnRef>
-          <a:fillRef idx="3">
-            <a:schemeClr val="accent1"/>
-          </a:fillRef>
-          <a:effectRef idx="2">
-            <a:schemeClr val="accent1"/>
-          </a:effectRef>
-          <a:fontRef idx="minor">
-            <a:schemeClr val="lt1"/>
-          </a:fontRef>
-        </p:style>
-        <p:txBody>
-          <a:bodyPr rtlCol="0" anchor="ctr"/>
-          <a:lstStyle/>
-          <a:p>
-            <a:pPr algn="ctr"/>
-          </a:p>
-        </p:txBody>
-      </p:sp>
-      <p:sp>
-        <p:nvSpPr>
-          <p:cNvPr id="5" name="TextBox 4"/>
-          <p:cNvSpPr txBox="1"/>
-          <p:nvPr/>
-        </p:nvSpPr>
-        <p:spPr>
-          <a:xfrm>
-            <a:off x="914400" y="1600200"/>
-            <a:ext cx="5120640" cy="4572000"/>
-          </a:xfrm>
-          <a:prstGeom prst="rect">
-            <a:avLst/>
-          </a:prstGeom>
-          <a:noFill/>
-        </p:spPr>
-        <p:txBody>
-          <a:bodyPr wrap="square">
-            <a:spAutoFit/>
-          </a:bodyPr>
-          <a:lstStyle/>
-          <a:p>
-            <a:pPr>
-              <a:spcAft>
-                <a:spcPts val="800"/>
-              </a:spcAft>
-              <a:defRPr b="1" sz="1600">
-                <a:solidFill>
-                  <a:srgbClr val="16A34A"/>
-                </a:solidFill>
-              </a:defRPr>
-            </a:pPr>
-            <a:r>
-              <a:t>Multi-Authority CP-ABE Access Control</a:t>
-            </a:r>
-          </a:p>
-          <a:p>
-            <a:pPr>
-              <a:defRPr b="1" sz="1150">
-                <a:solidFill>
-                  <a:srgbClr val="0F172A"/>
-                </a:solidFill>
-              </a:defRPr>
-            </a:pPr>
-            <a:r>
-              <a:t>• Access Policy Tree Embedded in Ciphertext:</a:t>
-            </a:r>
-          </a:p>
-          <a:p>
-            <a:pPr>
-              <a:spcAft>
-                <a:spcPts val="500"/>
-              </a:spcAft>
-              <a:defRPr sz="1050">
-                <a:solidFill>
-                  <a:srgbClr val="1E293B"/>
-                </a:solidFill>
-              </a:defRPr>
-            </a:pPr>
-            <a:r>
-              <a:t>  Every outsourced medical record is bound to an access policy, e.g., (Role_Doctor AND Dept_Cardiology) or (Role_Nurse OR Role_Doctor).</a:t>
-            </a:r>
-          </a:p>
-          <a:p>
-            <a:pPr>
-              <a:defRPr b="1" sz="1150">
-                <a:solidFill>
-                  <a:srgbClr val="0F172A"/>
-                </a:solidFill>
-              </a:defRPr>
-            </a:pPr>
-            <a:r>
-              <a:t>• Attribute Authority Secret Delegation:</a:t>
-            </a:r>
-          </a:p>
-          <a:p>
-            <a:pPr>
-              <a:spcAft>
-                <a:spcPts val="500"/>
-              </a:spcAft>
-              <a:defRPr sz="1050">
-                <a:solidFill>
-                  <a:srgbClr val="1E293B"/>
-                </a:solidFill>
-              </a:defRPr>
-            </a:pPr>
-            <a:r>
-              <a:t>  Each AA manages distinct attributes (e.g. Clinical Role, Department, Hospital Tier) and issues private keys to verified clinicians.</a:t>
-            </a:r>
-          </a:p>
-          <a:p>
-            <a:pPr>
-              <a:defRPr b="1" sz="1150">
-                <a:solidFill>
-                  <a:srgbClr val="0F172A"/>
-                </a:solidFill>
-              </a:defRPr>
-            </a:pPr>
-            <a:r>
-              <a:t>• Cryptographic Decryption Invariant:</a:t>
-            </a:r>
-          </a:p>
-          <a:p>
-            <a:pPr>
-              <a:spcAft>
-                <a:spcPts val="500"/>
-              </a:spcAft>
-              <a:defRPr sz="1050">
-                <a:solidFill>
-                  <a:srgbClr val="1E293B"/>
-                </a:solidFill>
-              </a:defRPr>
-            </a:pPr>
-            <a:r>
-              <a:t>  Decryption succeeds if and only if the clinician's attribute set satisfies the access policy tree.</a:t>
-            </a:r>
-          </a:p>
-          <a:p>
-            <a:pPr>
-              <a:defRPr b="1" sz="1150">
-                <a:solidFill>
-                  <a:srgbClr val="0F172A"/>
-                </a:solidFill>
-              </a:defRPr>
-            </a:pPr>
-            <a:r>
-              <a:t>• Empirical Test Suite Proof (Test C):</a:t>
-            </a:r>
-          </a:p>
-          <a:p>
-            <a:pPr>
-              <a:spcAft>
-                <a:spcPts val="500"/>
-              </a:spcAft>
-              <a:defRPr sz="1050">
-                <a:solidFill>
-                  <a:srgbClr val="1E293B"/>
-                </a:solidFill>
-              </a:defRPr>
-            </a:pPr>
-            <a:r>
-              <a:t>  • Dr. Prashant [Doctor, Cardiology] -&gt; Access Granted (Payload Decrypted).</a:t>
-            </a:r>
-            <a:br/>
-            <a:r>
-              <a:t>• Nurse Anita [Nurse, GeneralWard] -&gt; Access Denied (Cryptographic Barrier).</a:t>
-            </a:r>
-          </a:p>
-          <a:p>
-            <a:pPr>
-              <a:defRPr b="1" sz="1150">
-                <a:solidFill>
-                  <a:srgbClr val="0F172A"/>
-                </a:solidFill>
-              </a:defRPr>
-            </a:pPr>
-            <a:r>
-              <a:t>• Zero Collusion Risk:</a:t>
-            </a:r>
-          </a:p>
-          <a:p>
-            <a:pPr>
-              <a:spcAft>
-                <a:spcPts val="500"/>
-              </a:spcAft>
-              <a:defRPr sz="1050">
-                <a:solidFill>
-                  <a:srgbClr val="1E293B"/>
-                </a:solidFill>
-              </a:defRPr>
-            </a:pPr>
-            <a:r>
-              <a:t>  Fresh randomness t in KeyGen prevents unauthorized users from combining keys to bypass policies.</a:t>
-            </a:r>
-          </a:p>
-        </p:txBody>
-      </p:sp>
-      <p:pic>
-        <p:nvPicPr>
-          <p:cNvPr id="6" name="Picture 5" descr="cpabe_access_control.jpg"/>
-          <p:cNvPicPr>
-            <a:picLocks noChangeAspect="1"/>
-          </p:cNvPicPr>
-          <p:nvPr/>
-        </p:nvPicPr>
-        <p:blipFill>
-          <a:blip r:embed="rId2"/>
-          <a:stretch>
-            <a:fillRect/>
-          </a:stretch>
-        </p:blipFill>
-        <p:spPr>
-          <a:xfrm>
-            <a:off x="6492240" y="1463040"/>
-            <a:ext cx="4937760" cy="2755959"/>
-          </a:xfrm>
-          <a:prstGeom prst="rect">
-            <a:avLst/>
-          </a:prstGeom>
-        </p:spPr>
-      </p:pic>
-    </p:spTree>
-  </p:cSld>
-  <p:clrMapOvr>
-    <a:masterClrMapping/>
-  </p:clrMapOvr>
-</p:sld>
-</file>
-
-<file path=ppt/slides/slide11.xml><?xml version="1.0" encoding="utf-8"?>
-<p:sld xmlns:a="http://schemas.openxmlformats.org/drawingml/2006/main" xmlns:p="http://schemas.openxmlformats.org/presentationml/2006/main" xmlns:r="http://schemas.openxmlformats.org/officeDocument/2006/relationships">
-  <p:cSld>
-    <p:spTree>
-      <p:nvGrpSpPr>
-        <p:cNvPr id="1" name=""/>
-        <p:cNvGrpSpPr/>
-        <p:nvPr/>
-      </p:nvGrpSpPr>
-      <p:grpSpPr/>
-      <p:sp>
-        <p:nvSpPr>
-          <p:cNvPr id="2" name="TextBox 1"/>
-          <p:cNvSpPr txBox="1"/>
-          <p:nvPr/>
-        </p:nvSpPr>
-        <p:spPr>
-          <a:xfrm>
-            <a:off x="731520" y="365760"/>
-            <a:ext cx="10728655" cy="868680"/>
-          </a:xfrm>
-          <a:prstGeom prst="rect">
-            <a:avLst/>
-          </a:prstGeom>
-          <a:noFill/>
-        </p:spPr>
-        <p:txBody>
-          <a:bodyPr wrap="square" lIns="0" tIns="0" rIns="0" bIns="0">
-            <a:spAutoFit/>
-          </a:bodyPr>
-          <a:lstStyle/>
-          <a:p>
-            <a:pPr>
-              <a:spcAft>
-                <a:spcPts val="200"/>
-              </a:spcAft>
-              <a:defRPr sz="1000" b="1">
-                <a:solidFill>
-                  <a:srgbClr val="0284C7"/>
-                </a:solidFill>
-                <a:latin typeface="Arial"/>
-              </a:defRPr>
-            </a:pPr>
-            <a:r>
-              <a:t>BCSE309L: CRYPTOGRAPHY &amp; NETWORK SECURITY | VIT CHENNAI</a:t>
-            </a:r>
-          </a:p>
-          <a:p>
-            <a:pPr>
-              <a:defRPr sz="2200" b="1">
-                <a:solidFill>
-                  <a:srgbClr val="0F172A"/>
-                </a:solidFill>
-                <a:latin typeface="Arial"/>
-              </a:defRPr>
-            </a:pPr>
-            <a:r>
-              <a:t>Experimental Benchmark Results: Up to 3,610.7x Speedup</a:t>
-            </a:r>
-          </a:p>
-        </p:txBody>
-      </p:sp>
-      <p:sp>
-        <p:nvSpPr>
-          <p:cNvPr id="3" name="Rectangle 2"/>
-          <p:cNvSpPr/>
-          <p:nvPr/>
-        </p:nvSpPr>
-        <p:spPr>
-          <a:xfrm>
-            <a:off x="731520" y="1261872"/>
-            <a:ext cx="10728655" cy="36576"/>
-          </a:xfrm>
-          <a:prstGeom prst="rect">
-            <a:avLst/>
-          </a:prstGeom>
-          <a:solidFill>
-            <a:srgbClr val="0284C7"/>
-          </a:solidFill>
-          <a:ln>
-            <a:solidFill>
-              <a:srgbClr val="0284C7"/>
-            </a:solidFill>
-          </a:ln>
-        </p:spPr>
-        <p:style>
-          <a:lnRef idx="1">
-            <a:schemeClr val="accent1"/>
-          </a:lnRef>
-          <a:fillRef idx="3">
-            <a:schemeClr val="accent1"/>
-          </a:fillRef>
-          <a:effectRef idx="2">
-            <a:schemeClr val="accent1"/>
-          </a:effectRef>
-          <a:fontRef idx="minor">
-            <a:schemeClr val="lt1"/>
-          </a:fontRef>
-        </p:style>
-        <p:txBody>
-          <a:bodyPr rtlCol="0" anchor="ctr"/>
-          <a:lstStyle/>
-          <a:p>
-            <a:pPr algn="ctr"/>
-          </a:p>
-        </p:txBody>
-      </p:sp>
-      <p:pic>
-        <p:nvPicPr>
-          <p:cNvPr id="4" name="Picture 3" descr="chart_scalability_multi_n.png"/>
-          <p:cNvPicPr>
-            <a:picLocks noChangeAspect="1"/>
-          </p:cNvPicPr>
-          <p:nvPr/>
-        </p:nvPicPr>
-        <p:blipFill>
-          <a:blip r:embed="rId2"/>
-          <a:stretch>
-            <a:fillRect/>
-          </a:stretch>
-        </p:blipFill>
-        <p:spPr>
-          <a:xfrm>
-            <a:off x="731520" y="1463040"/>
-            <a:ext cx="5669280" cy="3644537"/>
-          </a:xfrm>
-          <a:prstGeom prst="rect">
-            <a:avLst/>
-          </a:prstGeom>
-        </p:spPr>
-      </p:pic>
-      <p:graphicFrame>
-        <p:nvGraphicFramePr>
-          <p:cNvPr id="5" name="Table 4"/>
-          <p:cNvGraphicFramePr>
-            <a:graphicFrameLocks noGrp="1"/>
-          </p:cNvGraphicFramePr>
-          <p:nvPr/>
-        </p:nvGraphicFramePr>
-        <p:xfrm>
-          <a:off x="6583680" y="1463040"/>
-          <a:ext cx="4846320" cy="3291840"/>
-        </p:xfrm>
-        <a:graphic>
-          <a:graphicData uri="http://schemas.openxmlformats.org/drawingml/2006/table">
-            <a:tbl>
-              <a:tblPr firstRow="1" bandRow="1">
-                <a:tableStyleId>{5C22544A-7EE6-4342-B048-85BDC9FD1C3A}</a:tableStyleId>
-              </a:tblPr>
-              <a:tblGrid>
-                <a:gridCol w="1097280"/>
-                <a:gridCol w="1188720"/>
-                <a:gridCol w="1280160"/>
-                <a:gridCol w="1280160"/>
-              </a:tblGrid>
-              <a:tr h="548640">
-                <a:tc>
-                  <a:txBody>
-                    <a:bodyPr/>
-                    <a:lstStyle/>
-                    <a:p>
-                      <a:pPr>
-                        <a:defRPr sz="1050" b="1">
-                          <a:solidFill>
-                            <a:srgbClr val="FFFFFF"/>
-                          </a:solidFill>
-                          <a:latin typeface="Arial"/>
-                        </a:defRPr>
-                      </a:pPr>
-                      <a:r>
-                        <a:t>Dataset (L)</a:t>
-                      </a:r>
-                    </a:p>
-                  </a:txBody>
-                  <a:tcPr>
-                    <a:solidFill>
-                      <a:srgbClr val="1E3A8A"/>
-                    </a:solidFill>
-                  </a:tcPr>
-                </a:tc>
-                <a:tc>
-                  <a:txBody>
-                    <a:bodyPr/>
-                    <a:lstStyle/>
-                    <a:p>
-                      <a:pPr>
-                        <a:defRPr sz="1050" b="1">
-                          <a:solidFill>
-                            <a:srgbClr val="FFFFFF"/>
-                          </a:solidFill>
-                          <a:latin typeface="Arial"/>
-                        </a:defRPr>
-                      </a:pPr>
-                      <a:r>
-                        <a:t>Base Paper</a:t>
-                      </a:r>
-                    </a:p>
-                  </a:txBody>
-                  <a:tcPr>
-                    <a:solidFill>
-                      <a:srgbClr val="1E3A8A"/>
-                    </a:solidFill>
-                  </a:tcPr>
-                </a:tc>
-                <a:tc>
-                  <a:txBody>
-                    <a:bodyPr/>
-                    <a:lstStyle/>
-                    <a:p>
-                      <a:pPr>
-                        <a:defRPr sz="1050" b="1">
-                          <a:solidFill>
-                            <a:srgbClr val="FFFFFF"/>
-                          </a:solidFill>
-                          <a:latin typeface="Arial"/>
-                        </a:defRPr>
-                      </a:pPr>
-                      <a:r>
-                        <a:t>BAMKS-D (Add)</a:t>
-                      </a:r>
-                    </a:p>
-                  </a:txBody>
-                  <a:tcPr>
-                    <a:solidFill>
-                      <a:srgbClr val="1E3A8A"/>
-                    </a:solidFill>
-                  </a:tcPr>
-                </a:tc>
-                <a:tc>
-                  <a:txBody>
-                    <a:bodyPr/>
-                    <a:lstStyle/>
-                    <a:p>
-                      <a:pPr>
-                        <a:defRPr sz="1050" b="1">
-                          <a:solidFill>
-                            <a:srgbClr val="FFFFFF"/>
-                          </a:solidFill>
-                          <a:latin typeface="Arial"/>
-                        </a:defRPr>
-                      </a:pPr>
-                      <a:r>
-                        <a:t>Speedup Factor</a:t>
-                      </a:r>
-                    </a:p>
-                  </a:txBody>
-                  <a:tcPr>
-                    <a:solidFill>
-                      <a:srgbClr val="1E3A8A"/>
-                    </a:solidFill>
-                  </a:tcPr>
-                </a:tc>
-              </a:tr>
-              <a:tr h="548640">
-                <a:tc>
-                  <a:txBody>
-                    <a:bodyPr/>
-                    <a:lstStyle/>
-                    <a:p>
-                      <a:pPr>
-                        <a:defRPr sz="1000">
-                          <a:solidFill>
-                            <a:srgbClr val="1E293B"/>
-                          </a:solidFill>
-                          <a:latin typeface="Arial"/>
-                        </a:defRPr>
-                      </a:pPr>
-                      <a:r>
-                        <a:t>L = 50</a:t>
-                      </a:r>
-                    </a:p>
-                  </a:txBody>
-                  <a:tcPr>
-                    <a:solidFill>
-                      <a:srgbClr val="FFFFFF"/>
-                    </a:solidFill>
-                  </a:tcPr>
-                </a:tc>
-                <a:tc>
-                  <a:txBody>
-                    <a:bodyPr/>
-                    <a:lstStyle/>
-                    <a:p>
-                      <a:pPr>
-                        <a:defRPr sz="1000">
-                          <a:solidFill>
-                            <a:srgbClr val="1E293B"/>
-                          </a:solidFill>
-                          <a:latin typeface="Arial"/>
-                        </a:defRPr>
-                      </a:pPr>
-                      <a:r>
-                        <a:t>13.84 ms</a:t>
-                      </a:r>
-                    </a:p>
-                  </a:txBody>
-                  <a:tcPr>
-                    <a:solidFill>
-                      <a:srgbClr val="FFFFFF"/>
-                    </a:solidFill>
-                  </a:tcPr>
-                </a:tc>
-                <a:tc>
-                  <a:txBody>
-                    <a:bodyPr/>
-                    <a:lstStyle/>
-                    <a:p>
-                      <a:pPr>
-                        <a:defRPr sz="1000">
-                          <a:solidFill>
-                            <a:srgbClr val="1E293B"/>
-                          </a:solidFill>
-                          <a:latin typeface="Arial"/>
-                        </a:defRPr>
-                      </a:pPr>
-                      <a:r>
-                        <a:t>0.2936 ms</a:t>
-                      </a:r>
-                    </a:p>
-                  </a:txBody>
-                  <a:tcPr>
-                    <a:solidFill>
-                      <a:srgbClr val="FFFFFF"/>
-                    </a:solidFill>
-                  </a:tcPr>
-                </a:tc>
-                <a:tc>
-                  <a:txBody>
-                    <a:bodyPr/>
-                    <a:lstStyle/>
-                    <a:p>
-                      <a:pPr>
-                        <a:defRPr sz="1000" b="1">
-                          <a:solidFill>
-                            <a:srgbClr val="1E3A8A"/>
-                          </a:solidFill>
-                          <a:latin typeface="Arial"/>
-                        </a:defRPr>
-                      </a:pPr>
-                      <a:r>
-                        <a:t>47.1x Faster</a:t>
-                      </a:r>
-                    </a:p>
-                  </a:txBody>
-                  <a:tcPr>
-                    <a:solidFill>
-                      <a:srgbClr val="ECFEFF"/>
-                    </a:solidFill>
-                  </a:tcPr>
-                </a:tc>
-              </a:tr>
-              <a:tr h="548640">
-                <a:tc>
-                  <a:txBody>
-                    <a:bodyPr/>
-                    <a:lstStyle/>
-                    <a:p>
-                      <a:pPr>
-                        <a:defRPr sz="1000">
-                          <a:solidFill>
-                            <a:srgbClr val="1E293B"/>
-                          </a:solidFill>
-                          <a:latin typeface="Arial"/>
-                        </a:defRPr>
-                      </a:pPr>
-                      <a:r>
-                        <a:t>L = 200</a:t>
-                      </a:r>
-                    </a:p>
-                  </a:txBody>
-                  <a:tcPr>
-                    <a:solidFill>
-                      <a:srgbClr val="F1F5F9"/>
-                    </a:solidFill>
-                  </a:tcPr>
-                </a:tc>
-                <a:tc>
-                  <a:txBody>
-                    <a:bodyPr/>
-                    <a:lstStyle/>
-                    <a:p>
-                      <a:pPr>
-                        <a:defRPr sz="1000">
-                          <a:solidFill>
-                            <a:srgbClr val="1E293B"/>
-                          </a:solidFill>
-                          <a:latin typeface="Arial"/>
-                        </a:defRPr>
-                      </a:pPr>
-                      <a:r>
-                        <a:t>60.50 ms</a:t>
-                      </a:r>
-                    </a:p>
-                  </a:txBody>
-                  <a:tcPr>
-                    <a:solidFill>
-                      <a:srgbClr val="F1F5F9"/>
-                    </a:solidFill>
-                  </a:tcPr>
-                </a:tc>
-                <a:tc>
-                  <a:txBody>
-                    <a:bodyPr/>
-                    <a:lstStyle/>
-                    <a:p>
-                      <a:pPr>
-                        <a:defRPr sz="1000">
-                          <a:solidFill>
-                            <a:srgbClr val="1E293B"/>
-                          </a:solidFill>
-                          <a:latin typeface="Arial"/>
-                        </a:defRPr>
-                      </a:pPr>
-                      <a:r>
-                        <a:t>0.2963 ms</a:t>
-                      </a:r>
-                    </a:p>
-                  </a:txBody>
-                  <a:tcPr>
-                    <a:solidFill>
-                      <a:srgbClr val="F1F5F9"/>
-                    </a:solidFill>
-                  </a:tcPr>
-                </a:tc>
-                <a:tc>
-                  <a:txBody>
-                    <a:bodyPr/>
-                    <a:lstStyle/>
-                    <a:p>
-                      <a:pPr>
-                        <a:defRPr sz="1000" b="1">
-                          <a:solidFill>
-                            <a:srgbClr val="1E3A8A"/>
-                          </a:solidFill>
-                          <a:latin typeface="Arial"/>
-                        </a:defRPr>
-                      </a:pPr>
-                      <a:r>
-                        <a:t>204.2x Faster</a:t>
-                      </a:r>
-                    </a:p>
-                  </a:txBody>
-                  <a:tcPr>
-                    <a:solidFill>
-                      <a:srgbClr val="ECFEFF"/>
-                    </a:solidFill>
-                  </a:tcPr>
-                </a:tc>
-              </a:tr>
-              <a:tr h="548640">
-                <a:tc>
-                  <a:txBody>
-                    <a:bodyPr/>
-                    <a:lstStyle/>
-                    <a:p>
-                      <a:pPr>
-                        <a:defRPr sz="1000">
-                          <a:solidFill>
-                            <a:srgbClr val="1E293B"/>
-                          </a:solidFill>
-                          <a:latin typeface="Arial"/>
-                        </a:defRPr>
-                      </a:pPr>
-                      <a:r>
-                        <a:t>L = 500</a:t>
-                      </a:r>
-                    </a:p>
-                  </a:txBody>
-                  <a:tcPr>
-                    <a:solidFill>
-                      <a:srgbClr val="FFFFFF"/>
-                    </a:solidFill>
-                  </a:tcPr>
-                </a:tc>
-                <a:tc>
-                  <a:txBody>
-                    <a:bodyPr/>
-                    <a:lstStyle/>
-                    <a:p>
-                      <a:pPr>
-                        <a:defRPr sz="1000">
-                          <a:solidFill>
-                            <a:srgbClr val="1E293B"/>
-                          </a:solidFill>
-                          <a:latin typeface="Arial"/>
-                        </a:defRPr>
-                      </a:pPr>
-                      <a:r>
-                        <a:t>141.63 ms</a:t>
-                      </a:r>
-                    </a:p>
-                  </a:txBody>
-                  <a:tcPr>
-                    <a:solidFill>
-                      <a:srgbClr val="FFFFFF"/>
-                    </a:solidFill>
-                  </a:tcPr>
-                </a:tc>
-                <a:tc>
-                  <a:txBody>
-                    <a:bodyPr/>
-                    <a:lstStyle/>
-                    <a:p>
-                      <a:pPr>
-                        <a:defRPr sz="1000">
-                          <a:solidFill>
-                            <a:srgbClr val="1E293B"/>
-                          </a:solidFill>
-                          <a:latin typeface="Arial"/>
-                        </a:defRPr>
-                      </a:pPr>
-                      <a:r>
-                        <a:t>0.2880 ms</a:t>
-                      </a:r>
-                    </a:p>
-                  </a:txBody>
-                  <a:tcPr>
-                    <a:solidFill>
-                      <a:srgbClr val="FFFFFF"/>
-                    </a:solidFill>
-                  </a:tcPr>
-                </a:tc>
-                <a:tc>
-                  <a:txBody>
-                    <a:bodyPr/>
-                    <a:lstStyle/>
-                    <a:p>
-                      <a:pPr>
-                        <a:defRPr sz="1000" b="1">
-                          <a:solidFill>
-                            <a:srgbClr val="1E3A8A"/>
-                          </a:solidFill>
-                          <a:latin typeface="Arial"/>
-                        </a:defRPr>
-                      </a:pPr>
-                      <a:r>
-                        <a:t>491.8x Faster</a:t>
-                      </a:r>
-                    </a:p>
-                  </a:txBody>
-                  <a:tcPr>
-                    <a:solidFill>
-                      <a:srgbClr val="ECFEFF"/>
-                    </a:solidFill>
-                  </a:tcPr>
-                </a:tc>
-              </a:tr>
-              <a:tr h="548640">
-                <a:tc>
-                  <a:txBody>
-                    <a:bodyPr/>
-                    <a:lstStyle/>
-                    <a:p>
-                      <a:pPr>
-                        <a:defRPr sz="1000">
-                          <a:solidFill>
-                            <a:srgbClr val="1E293B"/>
-                          </a:solidFill>
-                          <a:latin typeface="Arial"/>
-                        </a:defRPr>
-                      </a:pPr>
-                      <a:r>
-                        <a:t>L = 1,000</a:t>
-                      </a:r>
-                    </a:p>
-                  </a:txBody>
-                  <a:tcPr>
-                    <a:solidFill>
-                      <a:srgbClr val="F1F5F9"/>
-                    </a:solidFill>
-                  </a:tcPr>
-                </a:tc>
-                <a:tc>
-                  <a:txBody>
-                    <a:bodyPr/>
-                    <a:lstStyle/>
-                    <a:p>
-                      <a:pPr>
-                        <a:defRPr sz="1000">
-                          <a:solidFill>
-                            <a:srgbClr val="1E293B"/>
-                          </a:solidFill>
-                          <a:latin typeface="Arial"/>
-                        </a:defRPr>
-                      </a:pPr>
-                      <a:r>
-                        <a:t>285.87 ms</a:t>
-                      </a:r>
-                    </a:p>
-                  </a:txBody>
-                  <a:tcPr>
-                    <a:solidFill>
-                      <a:srgbClr val="F1F5F9"/>
-                    </a:solidFill>
-                  </a:tcPr>
-                </a:tc>
-                <a:tc>
-                  <a:txBody>
-                    <a:bodyPr/>
-                    <a:lstStyle/>
-                    <a:p>
-                      <a:pPr>
-                        <a:defRPr sz="1000">
-                          <a:solidFill>
-                            <a:srgbClr val="1E293B"/>
-                          </a:solidFill>
-                          <a:latin typeface="Arial"/>
-                        </a:defRPr>
-                      </a:pPr>
-                      <a:r>
-                        <a:t>0.4254 ms</a:t>
-                      </a:r>
-                    </a:p>
-                  </a:txBody>
-                  <a:tcPr>
-                    <a:solidFill>
-                      <a:srgbClr val="F1F5F9"/>
-                    </a:solidFill>
-                  </a:tcPr>
-                </a:tc>
-                <a:tc>
-                  <a:txBody>
-                    <a:bodyPr/>
-                    <a:lstStyle/>
-                    <a:p>
-                      <a:pPr>
-                        <a:defRPr sz="1000" b="1">
-                          <a:solidFill>
-                            <a:srgbClr val="1E3A8A"/>
-                          </a:solidFill>
-                          <a:latin typeface="Arial"/>
-                        </a:defRPr>
-                      </a:pPr>
-                      <a:r>
-                        <a:t>672.0x Faster</a:t>
-                      </a:r>
-                    </a:p>
-                  </a:txBody>
-                  <a:tcPr>
-                    <a:solidFill>
-                      <a:srgbClr val="ECFEFF"/>
-                    </a:solidFill>
-                  </a:tcPr>
-                </a:tc>
-              </a:tr>
-              <a:tr h="548640">
-                <a:tc>
-                  <a:txBody>
-                    <a:bodyPr/>
-                    <a:lstStyle/>
-                    <a:p>
-                      <a:pPr>
-                        <a:defRPr sz="1000">
-                          <a:solidFill>
-                            <a:srgbClr val="1E293B"/>
-                          </a:solidFill>
-                          <a:latin typeface="Arial"/>
-                        </a:defRPr>
-                      </a:pPr>
-                      <a:r>
-                        <a:t>L = 5,000</a:t>
-                      </a:r>
-                    </a:p>
-                  </a:txBody>
-                  <a:tcPr>
-                    <a:solidFill>
-                      <a:srgbClr val="FFFFFF"/>
-                    </a:solidFill>
-                  </a:tcPr>
-                </a:tc>
-                <a:tc>
-                  <a:txBody>
-                    <a:bodyPr/>
-                    <a:lstStyle/>
-                    <a:p>
-                      <a:pPr>
-                        <a:defRPr sz="1000">
-                          <a:solidFill>
-                            <a:srgbClr val="1E293B"/>
-                          </a:solidFill>
-                          <a:latin typeface="Arial"/>
-                        </a:defRPr>
-                      </a:pPr>
-                      <a:r>
-                        <a:t>1,430.20 ms</a:t>
-                      </a:r>
-                    </a:p>
-                  </a:txBody>
-                  <a:tcPr>
-                    <a:solidFill>
-                      <a:srgbClr val="FFFFFF"/>
-                    </a:solidFill>
-                  </a:tcPr>
-                </a:tc>
-                <a:tc>
-                  <a:txBody>
-                    <a:bodyPr/>
-                    <a:lstStyle/>
-                    <a:p>
-                      <a:pPr>
-                        <a:defRPr sz="1000">
-                          <a:solidFill>
-                            <a:srgbClr val="1E293B"/>
-                          </a:solidFill>
-                          <a:latin typeface="Arial"/>
-                        </a:defRPr>
-                      </a:pPr>
-                      <a:r>
-                        <a:t>0.3961 ms</a:t>
-                      </a:r>
-                    </a:p>
-                  </a:txBody>
-                  <a:tcPr>
-                    <a:solidFill>
-                      <a:srgbClr val="FFFFFF"/>
-                    </a:solidFill>
-                  </a:tcPr>
-                </a:tc>
-                <a:tc>
-                  <a:txBody>
-                    <a:bodyPr/>
-                    <a:lstStyle/>
-                    <a:p>
-                      <a:pPr>
-                        <a:defRPr sz="1000" b="1">
-                          <a:solidFill>
-                            <a:srgbClr val="1E3A8A"/>
-                          </a:solidFill>
-                          <a:latin typeface="Arial"/>
-                        </a:defRPr>
-                      </a:pPr>
-                      <a:r>
-                        <a:t>3,610.7x Faster</a:t>
-                      </a:r>
-                    </a:p>
-                  </a:txBody>
-                  <a:tcPr>
-                    <a:solidFill>
-                      <a:srgbClr val="ECFEFF"/>
-                    </a:solidFill>
-                  </a:tcPr>
-                </a:tc>
-              </a:tr>
-            </a:tbl>
-          </a:graphicData>
-        </a:graphic>
-      </p:graphicFrame>
-      <p:sp>
-        <p:nvSpPr>
-          <p:cNvPr id="6" name="Rounded Rectangle 5"/>
-          <p:cNvSpPr/>
-          <p:nvPr/>
-        </p:nvSpPr>
-        <p:spPr>
-          <a:xfrm>
-            <a:off x="6583680" y="4937760"/>
-            <a:ext cx="4846320" cy="1371600"/>
-          </a:xfrm>
-          <a:prstGeom prst="roundRect">
-            <a:avLst/>
-          </a:prstGeom>
-          <a:solidFill>
-            <a:srgbClr val="F0FDF4"/>
-          </a:solidFill>
-          <a:ln w="15240">
-            <a:solidFill>
-              <a:srgbClr val="16A34A"/>
-            </a:solidFill>
-          </a:ln>
-        </p:spPr>
-        <p:style>
-          <a:lnRef idx="1">
-            <a:schemeClr val="accent1"/>
-          </a:lnRef>
-          <a:fillRef idx="3">
-            <a:schemeClr val="accent1"/>
-          </a:fillRef>
-          <a:effectRef idx="2">
-            <a:schemeClr val="accent1"/>
-          </a:effectRef>
-          <a:fontRef idx="minor">
-            <a:schemeClr val="lt1"/>
-          </a:fontRef>
-        </p:style>
-        <p:txBody>
-          <a:bodyPr rtlCol="0" anchor="ctr"/>
-          <a:lstStyle/>
-          <a:p>
-            <a:pPr algn="ctr"/>
-          </a:p>
-        </p:txBody>
-      </p:sp>
-      <p:sp>
-        <p:nvSpPr>
-          <p:cNvPr id="7" name="TextBox 6"/>
-          <p:cNvSpPr txBox="1"/>
-          <p:nvPr/>
-        </p:nvSpPr>
-        <p:spPr>
-          <a:xfrm>
-            <a:off x="6720840" y="4983480"/>
-            <a:ext cx="4572000" cy="1280160"/>
-          </a:xfrm>
-          <a:prstGeom prst="rect">
-            <a:avLst/>
-          </a:prstGeom>
-          <a:noFill/>
-        </p:spPr>
-        <p:txBody>
-          <a:bodyPr wrap="square">
-            <a:spAutoFit/>
-          </a:bodyPr>
-          <a:lstStyle/>
-          <a:p>
-            <a:pPr>
-              <a:defRPr b="1" sz="1100">
-                <a:solidFill>
-                  <a:srgbClr val="16A34A"/>
-                </a:solidFill>
-              </a:defRPr>
-            </a:pPr>
-            <a:r>
-              <a:t>VERIFIED EMPIRICAL CONCLUSION:</a:t>
-            </a:r>
-          </a:p>
-          <a:p>
-            <a:pPr>
-              <a:defRPr sz="1000">
-                <a:solidFill>
-                  <a:srgbClr val="1E293B"/>
-                </a:solidFill>
-              </a:defRPr>
-            </a:pPr>
-            <a:r>
-              <a:t>While base paper re-keying latency scales linearly O(L*m) from 13.84 ms to 1,430.20 ms, BAMKS-D dynamic additions remain flat at ~0.35 ms, achieving an asymptotic speedup of 3,610.7x at L=5,000 records.</a:t>
-            </a:r>
-          </a:p>
-        </p:txBody>
-      </p:sp>
-    </p:spTree>
-  </p:cSld>
-  <p:clrMapOvr>
-    <a:masterClrMapping/>
-  </p:clrMapOvr>
-</p:sld>
-</file>
-
-<file path=ppt/slides/slide12.xml><?xml version="1.0" encoding="utf-8"?>
-<p:sld xmlns:a="http://schemas.openxmlformats.org/drawingml/2006/main" xmlns:p="http://schemas.openxmlformats.org/presentationml/2006/main" xmlns:r="http://schemas.openxmlformats.org/officeDocument/2006/relationships">
-  <p:cSld>
-    <p:spTree>
-      <p:nvGrpSpPr>
-        <p:cNvPr id="1" name=""/>
-        <p:cNvGrpSpPr/>
-        <p:nvPr/>
-      </p:nvGrpSpPr>
-      <p:grpSpPr/>
-      <p:sp>
-        <p:nvSpPr>
-          <p:cNvPr id="2" name="TextBox 1"/>
-          <p:cNvSpPr txBox="1"/>
-          <p:nvPr/>
-        </p:nvSpPr>
-        <p:spPr>
-          <a:xfrm>
-            <a:off x="731520" y="365760"/>
-            <a:ext cx="10728655" cy="868680"/>
-          </a:xfrm>
-          <a:prstGeom prst="rect">
-            <a:avLst/>
-          </a:prstGeom>
-          <a:noFill/>
-        </p:spPr>
-        <p:txBody>
-          <a:bodyPr wrap="square" lIns="0" tIns="0" rIns="0" bIns="0">
-            <a:spAutoFit/>
-          </a:bodyPr>
-          <a:lstStyle/>
-          <a:p>
-            <a:pPr>
-              <a:spcAft>
-                <a:spcPts val="200"/>
-              </a:spcAft>
-              <a:defRPr sz="1000" b="1">
-                <a:solidFill>
-                  <a:srgbClr val="0284C7"/>
-                </a:solidFill>
-                <a:latin typeface="Arial"/>
-              </a:defRPr>
-            </a:pPr>
-            <a:r>
-              <a:t>BCSE309L: CRYPTOGRAPHY &amp; NETWORK SECURITY | VIT CHENNAI</a:t>
-            </a:r>
-          </a:p>
-          <a:p>
-            <a:pPr>
-              <a:defRPr sz="2200" b="1">
-                <a:solidFill>
-                  <a:srgbClr val="0F172A"/>
-                </a:solidFill>
-                <a:latin typeface="Arial"/>
-              </a:defRPr>
-            </a:pPr>
-            <a:r>
-              <a:t>Mathematical &amp; Empirical Proof of O(1) Deletion Complexity</a:t>
-            </a:r>
-          </a:p>
-        </p:txBody>
-      </p:sp>
-      <p:sp>
-        <p:nvSpPr>
-          <p:cNvPr id="3" name="Rectangle 2"/>
-          <p:cNvSpPr/>
-          <p:nvPr/>
-        </p:nvSpPr>
-        <p:spPr>
-          <a:xfrm>
-            <a:off x="731520" y="1261872"/>
-            <a:ext cx="10728655" cy="36576"/>
-          </a:xfrm>
-          <a:prstGeom prst="rect">
-            <a:avLst/>
-          </a:prstGeom>
-          <a:solidFill>
-            <a:srgbClr val="0284C7"/>
-          </a:solidFill>
-          <a:ln>
-            <a:solidFill>
-              <a:srgbClr val="0284C7"/>
-            </a:solidFill>
-          </a:ln>
-        </p:spPr>
-        <p:style>
-          <a:lnRef idx="1">
-            <a:schemeClr val="accent1"/>
-          </a:lnRef>
-          <a:fillRef idx="3">
-            <a:schemeClr val="accent1"/>
-          </a:fillRef>
-          <a:effectRef idx="2">
-            <a:schemeClr val="accent1"/>
-          </a:effectRef>
-          <a:fontRef idx="minor">
-            <a:schemeClr val="lt1"/>
-          </a:fontRef>
-        </p:style>
-        <p:txBody>
-          <a:bodyPr rtlCol="0" anchor="ctr"/>
-          <a:lstStyle/>
-          <a:p>
-            <a:pPr algn="ctr"/>
-          </a:p>
-        </p:txBody>
-      </p:sp>
-      <p:sp>
-        <p:nvSpPr>
-          <p:cNvPr id="4" name="Rounded Rectangle 3"/>
+              <a:t>EVM Gas Schedule &amp; Verified Ethereum Sepolia Receipts</a:t>
+            </a:r>
+          </a:p>
+        </p:txBody>
+      </p:sp>
+      <p:sp>
+        <p:nvSpPr>
+          <p:cNvPr id="3" name="Rounded Rectangle 2"/>
           <p:cNvSpPr/>
           <p:nvPr/>
         </p:nvSpPr>
@@ -4818,7 +3376,7 @@
       </p:sp>
       <p:sp>
         <p:nvSpPr>
-          <p:cNvPr id="5" name="TextBox 4"/>
+          <p:cNvPr id="4" name="TextBox 3"/>
           <p:cNvSpPr txBox="1"/>
           <p:nvPr/>
         </p:nvSpPr>
@@ -4840,7 +3398,7 @@
           <a:p>
             <a:pPr>
               <a:spcAft>
-                <a:spcPts val="1000"/>
+                <a:spcPts val="800"/>
               </a:spcAft>
               <a:defRPr b="1" sz="1600">
                 <a:solidFill>
@@ -4849,150 +3407,176 @@
               </a:defRPr>
             </a:pPr>
             <a:r>
-              <a:t>Why EVM Mappings Have Zero Traversal</a:t>
-            </a:r>
-          </a:p>
-          <a:p>
-            <a:pPr>
-              <a:defRPr b="1" sz="1150">
+              <a:t>Theoretical Minimal Opcode Schedule</a:t>
+            </a:r>
+          </a:p>
+          <a:p>
+            <a:pPr>
+              <a:defRPr b="1" sz="1100">
                 <a:solidFill>
                   <a:srgbClr val="0F172A"/>
                 </a:solidFill>
               </a:defRPr>
             </a:pPr>
             <a:r>
-              <a:t>• Ethereum Virtual Machine (EVM) Storage:</a:t>
-            </a:r>
-          </a:p>
-          <a:p>
-            <a:pPr>
-              <a:spcAft>
-                <a:spcPts val="400"/>
-              </a:spcAft>
-              <a:defRPr sz="1050">
+              <a:t>• Base Transaction Fee:</a:t>
+            </a:r>
+          </a:p>
+          <a:p>
+            <a:pPr>
+              <a:spcAft>
+                <a:spcPts val="300"/>
+              </a:spcAft>
+              <a:defRPr sz="1000">
                 <a:solidFill>
                   <a:srgbClr val="1E293B"/>
                 </a:solidFill>
               </a:defRPr>
             </a:pPr>
             <a:r>
-              <a:t>  Solidity mappings do NOT store keys in an array or linked list. Mappings have no length property and cannot be iterated.</a:t>
-            </a:r>
-          </a:p>
-          <a:p>
-            <a:pPr>
-              <a:defRPr b="1" sz="1150">
+              <a:t>  21,000 gas (Standard EVM baseline).</a:t>
+            </a:r>
+          </a:p>
+          <a:p>
+            <a:pPr>
+              <a:defRPr b="1" sz="1100">
                 <a:solidFill>
                   <a:srgbClr val="0F172A"/>
                 </a:solidFill>
               </a:defRPr>
             </a:pPr>
             <a:r>
-              <a:t>• Direct 256-Bit Hash Slot Addressing:</a:t>
-            </a:r>
-          </a:p>
-          <a:p>
-            <a:pPr>
-              <a:spcAft>
-                <a:spcPts val="400"/>
-              </a:spcAft>
-              <a:defRPr sz="1050">
+              <a:t>• CALLDATALOAD + KECCAK256:</a:t>
+            </a:r>
+          </a:p>
+          <a:p>
+            <a:pPr>
+              <a:spcAft>
+                <a:spcPts val="300"/>
+              </a:spcAft>
+              <a:defRPr sz="1000">
                 <a:solidFill>
                   <a:srgbClr val="1E293B"/>
                 </a:solidFill>
               </a:defRPr>
             </a:pPr>
             <a:r>
-              <a:t>  The exact storage address is calculated in 1 single step:</a:t>
-            </a:r>
-            <a:br/>
-            <a:r>
-              <a:t>  SlotAddress = keccak256(abi.encode(docId, slotNumber))</a:t>
-            </a:r>
-            <a:br/>
-            <a:r>
-              <a:t>The EVM writes directly to this hash pointer in O(1) time.</a:t>
-            </a:r>
-          </a:p>
-          <a:p>
-            <a:pPr>
-              <a:defRPr b="1" sz="1150">
+              <a:t>  3 + 30 gas (Direct slot calculation: keccak256(docId, slotNumber)).</a:t>
+            </a:r>
+          </a:p>
+          <a:p>
+            <a:pPr>
+              <a:defRPr b="1" sz="1100">
                 <a:solidFill>
                   <a:srgbClr val="0F172A"/>
                 </a:solidFill>
               </a:defRPr>
             </a:pPr>
             <a:r>
-              <a:t>• EVM Opcode Gas Rigor (Fixed 42,100 Gas):</a:t>
-            </a:r>
-          </a:p>
-          <a:p>
-            <a:pPr>
-              <a:spcAft>
-                <a:spcPts val="400"/>
-              </a:spcAft>
-              <a:defRPr sz="1050">
+              <a:t>• SSTORE (deletedDocRegistry):</a:t>
+            </a:r>
+          </a:p>
+          <a:p>
+            <a:pPr>
+              <a:spcAft>
+                <a:spcPts val="300"/>
+              </a:spcAft>
+              <a:defRPr sz="1000">
                 <a:solidFill>
                   <a:srgbClr val="1E293B"/>
                 </a:solidFill>
               </a:defRPr>
             </a:pPr>
             <a:r>
-              <a:t>  • CALLDATALOAD (Load docId) : 3 gas</a:t>
-            </a:r>
-            <a:br/>
-            <a:r>
-              <a:t>• KECCAK256 (Compute slot)    : 30 gas</a:t>
-            </a:r>
-            <a:br/>
-            <a:r>
-              <a:t>• SSTORE (Write true flag)   : 20,000 gas</a:t>
-            </a:r>
-            <a:br/>
-            <a:r>
-              <a:t>• LOG3 (Emit Deletion event)  : ~1,100 gas</a:t>
-            </a:r>
-            <a:br/>
-            <a:r>
-              <a:t>• Base Transaction Fee        : 21,000 gas</a:t>
-            </a:r>
-            <a:br/>
-            <a:r>
-              <a:t>=&gt; Total Gas: Exactly 42,100 gas (Constant for ALL N).</a:t>
-            </a:r>
-          </a:p>
-          <a:p>
-            <a:pPr>
-              <a:defRPr b="1" sz="1150">
+              <a:t>  20,000 gas (0 to 1 cold slot storage write).</a:t>
+            </a:r>
+          </a:p>
+          <a:p>
+            <a:pPr>
+              <a:defRPr b="1" sz="1100">
                 <a:solidFill>
                   <a:srgbClr val="0F172A"/>
                 </a:solidFill>
               </a:defRPr>
             </a:pPr>
             <a:r>
-              <a:t>• Conclusion:</a:t>
-            </a:r>
-          </a:p>
-          <a:p>
-            <a:pPr>
-              <a:spcAft>
-                <a:spcPts val="400"/>
-              </a:spcAft>
-              <a:defRPr sz="1050">
+              <a:t>• SSTORE (fileRegistry.isDeleted):</a:t>
+            </a:r>
+          </a:p>
+          <a:p>
+            <a:pPr>
+              <a:spcAft>
+                <a:spcPts val="300"/>
+              </a:spcAft>
+              <a:defRPr sz="1000">
                 <a:solidFill>
                   <a:srgbClr val="1E293B"/>
                 </a:solidFill>
               </a:defRPr>
             </a:pPr>
             <a:r>
-              <a:t>  Zero block history traversal, zero loops, and zero memory reallocation. Complexity is guaranteed O(1) by EVM protocol design.</a:t>
-            </a:r>
-          </a:p>
-        </p:txBody>
-      </p:sp>
-      <p:sp>
-        <p:nvSpPr>
-          <p:cNvPr id="6" name="Rounded Rectangle 5"/>
+              <a:t>  5,000 gas (Warm slot update on existing metadata struct).</a:t>
+            </a:r>
+          </a:p>
+          <a:p>
+            <a:pPr>
+              <a:defRPr b="1" sz="1100">
+                <a:solidFill>
+                  <a:srgbClr val="0F172A"/>
+                </a:solidFill>
+              </a:defRPr>
+            </a:pPr>
+            <a:r>
+              <a:t>• LOG3 (DocumentDeleted):</a:t>
+            </a:r>
+          </a:p>
+          <a:p>
+            <a:pPr>
+              <a:spcAft>
+                <a:spcPts val="300"/>
+              </a:spcAft>
+              <a:defRPr sz="1000">
+                <a:solidFill>
+                  <a:srgbClr val="1E293B"/>
+                </a:solidFill>
+              </a:defRPr>
+            </a:pPr>
+            <a:r>
+              <a:t>  1,500 gas (Event base + 3 indexed topics + timestamp).</a:t>
+            </a:r>
+          </a:p>
+          <a:p>
+            <a:pPr>
+              <a:defRPr b="1" sz="1100">
+                <a:solidFill>
+                  <a:srgbClr val="0F172A"/>
+                </a:solidFill>
+              </a:defRPr>
+            </a:pPr>
+            <a:r>
+              <a:t>• Overhead (JUMP, stack):</a:t>
+            </a:r>
+          </a:p>
+          <a:p>
+            <a:pPr>
+              <a:spcAft>
+                <a:spcPts val="300"/>
+              </a:spcAft>
+              <a:defRPr sz="1000">
+                <a:solidFill>
+                  <a:srgbClr val="1E293B"/>
+                </a:solidFill>
+              </a:defRPr>
+            </a:pPr>
+            <a:r>
+              <a:t>  ~200 gas -&gt; Total Theoretical: ~47,733 gas.</a:t>
+            </a:r>
+          </a:p>
+        </p:txBody>
+      </p:sp>
+      <p:sp>
+        <p:nvSpPr>
+          <p:cNvPr id="5" name="Rounded Rectangle 4"/>
           <p:cNvSpPr/>
           <p:nvPr/>
         </p:nvSpPr>
@@ -5037,7 +3621,7 @@
       </p:sp>
       <p:sp>
         <p:nvSpPr>
-          <p:cNvPr id="7" name="TextBox 6"/>
+          <p:cNvPr id="6" name="TextBox 5"/>
           <p:cNvSpPr txBox="1"/>
           <p:nvPr/>
         </p:nvSpPr>
@@ -5068,112 +3652,154 @@
               </a:defRPr>
             </a:pPr>
             <a:r>
-              <a:t>Empirical Regression Across Dataset Sizes (N)</a:t>
-            </a:r>
-          </a:p>
-          <a:p>
-            <a:pPr>
-              <a:spcAft>
-                <a:spcPts val="400"/>
-              </a:spcAft>
-              <a:defRPr sz="1100">
-                <a:solidFill>
-                  <a:srgbClr val="64748B"/>
-                </a:solidFill>
-              </a:defRPr>
-            </a:pPr>
-            <a:r>
-              <a:t>Measured via proof_of_o1_complexity.py:</a:t>
-            </a:r>
-          </a:p>
-          <a:p>
-            <a:pPr>
-              <a:spcAft>
-                <a:spcPts val="200"/>
-              </a:spcAft>
-              <a:defRPr sz="1050">
+              <a:t>Live Mined Receipts on Ethereum Sepolia</a:t>
+            </a:r>
+          </a:p>
+          <a:p>
+            <a:pPr>
+              <a:defRPr b="1" sz="1100">
                 <a:solidFill>
                   <a:srgbClr val="0F172A"/>
                 </a:solidFill>
-                <a:latin typeface="Courier New"/>
-              </a:defRPr>
-            </a:pPr>
-            <a:r>
-              <a:t>• N = 10 files     : 0.30 us (BAMKS-D)  | 42,100 gas</a:t>
-            </a:r>
-          </a:p>
-          <a:p>
-            <a:pPr>
-              <a:spcAft>
-                <a:spcPts val="200"/>
-              </a:spcAft>
-              <a:defRPr sz="1050">
+              </a:defRPr>
+            </a:pPr>
+            <a:r>
+              <a:t>• Contract Address:</a:t>
+            </a:r>
+          </a:p>
+          <a:p>
+            <a:pPr>
+              <a:spcAft>
+                <a:spcPts val="300"/>
+              </a:spcAft>
+              <a:defRPr sz="1000">
+                <a:solidFill>
+                  <a:srgbClr val="1E293B"/>
+                </a:solidFill>
+              </a:defRPr>
+            </a:pPr>
+            <a:r>
+              <a:t>  0xfDC8615Bf6483c3B0f39c330F55A56Cb0f08C8D3 (solc 0.8.20)</a:t>
+            </a:r>
+          </a:p>
+          <a:p>
+            <a:pPr>
+              <a:defRPr b="1" sz="1100">
                 <a:solidFill>
                   <a:srgbClr val="0F172A"/>
                 </a:solidFill>
-                <a:latin typeface="Courier New"/>
-              </a:defRPr>
-            </a:pPr>
-            <a:r>
-              <a:t>• N = 500 files    : 0.20 us (BAMKS-D)  | 42,100 gas</a:t>
-            </a:r>
-          </a:p>
-          <a:p>
-            <a:pPr>
-              <a:spcAft>
-                <a:spcPts val="200"/>
-              </a:spcAft>
-              <a:defRPr sz="1050">
+              </a:defRPr>
+            </a:pPr>
+            <a:r>
+              <a:t>• Deployment Transaction:</a:t>
+            </a:r>
+          </a:p>
+          <a:p>
+            <a:pPr>
+              <a:spcAft>
+                <a:spcPts val="300"/>
+              </a:spcAft>
+              <a:defRPr sz="1000">
+                <a:solidFill>
+                  <a:srgbClr val="1E293B"/>
+                </a:solidFill>
+              </a:defRPr>
+            </a:pPr>
+            <a:r>
+              <a:t>  Tx: 0x1f058b... in Block #11975268</a:t>
+            </a:r>
+            <a:br/>
+            <a:r>
+              <a:t>Gas Used: 6,889,229 gas units</a:t>
+            </a:r>
+          </a:p>
+          <a:p>
+            <a:pPr>
+              <a:defRPr b="1" sz="1100">
                 <a:solidFill>
                   <a:srgbClr val="0F172A"/>
                 </a:solidFill>
-                <a:latin typeface="Courier New"/>
-              </a:defRPr>
-            </a:pPr>
-            <a:r>
-              <a:t>• N = 5,000 files  : 0.20 us (BAMKS-D)  | 42,100 gas</a:t>
-            </a:r>
-          </a:p>
-          <a:p>
-            <a:pPr>
-              <a:spcAft>
-                <a:spcPts val="200"/>
-              </a:spcAft>
-              <a:defRPr sz="1050">
+              </a:defRPr>
+            </a:pPr>
+            <a:r>
+              <a:t>• deleteDocument(101) Receipt:</a:t>
+            </a:r>
+          </a:p>
+          <a:p>
+            <a:pPr>
+              <a:spcAft>
+                <a:spcPts val="300"/>
+              </a:spcAft>
+              <a:defRPr sz="1000">
+                <a:solidFill>
+                  <a:srgbClr val="1E293B"/>
+                </a:solidFill>
+              </a:defRPr>
+            </a:pPr>
+            <a:r>
+              <a:t>  Tx: 0x008330... in Block #11975278</a:t>
+            </a:r>
+            <a:br/>
+            <a:r>
+              <a:t>Receipt Gas: 242,834 gas | Confirmation: 21.83 s</a:t>
+            </a:r>
+          </a:p>
+          <a:p>
+            <a:pPr>
+              <a:defRPr b="1" sz="1100">
                 <a:solidFill>
                   <a:srgbClr val="0F172A"/>
                 </a:solidFill>
-                <a:latin typeface="Courier New"/>
-              </a:defRPr>
-            </a:pPr>
-            <a:r>
-              <a:t>• N = 50,000 files : 0.90 us (BAMKS-D)  | 42,100 gas</a:t>
-            </a:r>
-          </a:p>
-          <a:p>
+              </a:defRPr>
+            </a:pPr>
+            <a:r>
+              <a:t>• registerDocument(101) Receipt:</a:t>
+            </a:r>
+          </a:p>
+          <a:p>
+            <a:pPr>
+              <a:spcAft>
+                <a:spcPts val="300"/>
+              </a:spcAft>
+              <a:defRPr sz="1000">
+                <a:solidFill>
+                  <a:srgbClr val="1E293B"/>
+                </a:solidFill>
+              </a:defRPr>
+            </a:pPr>
+            <a:r>
+              <a:t>  Tx: 0x363d3e... in Block #11975277</a:t>
+            </a:r>
             <a:br/>
-            <a:pPr>
-              <a:defRPr sz="1050" b="1">
-                <a:solidFill>
-                  <a:srgbClr val="1E3A8A"/>
-                </a:solidFill>
-                <a:latin typeface="Courier New"/>
-              </a:defRPr>
-            </a:pPr>
-            <a:r>
-              <a:t>REGRESSION SLOPE DERIVATION:</a:t>
-            </a:r>
-            <a:br/>
-            <a:r>
-              <a:t>1. Array Traversal Slope:  dTime/dN = +0.018880 us/rec (Linear O(N))</a:t>
-            </a:r>
-            <a:br/>
-            <a:r>
-              <a:t>2. BAMKS-D Mapping Slope:  dTime/dN = +0.000012 us/rec (Flat O(1))</a:t>
-            </a:r>
-            <a:br/>
-            <a:r>
-              <a:t>3. Gas Differential:      dGas/dN   = 0 gas units (Exact Invariance)</a:t>
+            <a:r>
+              <a:t>Receipt Gas: 792,245 gas | Confirmation: 35.22 s</a:t>
+            </a:r>
+          </a:p>
+          <a:p>
+            <a:pPr>
+              <a:defRPr b="1" sz="1100">
+                <a:solidFill>
+                  <a:srgbClr val="0F172A"/>
+                </a:solidFill>
+              </a:defRPr>
+            </a:pPr>
+            <a:r>
+              <a:t>• Why Real Gas Exceeds Opcode Minima:</a:t>
+            </a:r>
+          </a:p>
+          <a:p>
+            <a:pPr>
+              <a:spcAft>
+                <a:spcPts val="300"/>
+              </a:spcAft>
+              <a:defRPr sz="1000">
+                <a:solidFill>
+                  <a:srgbClr val="1E293B"/>
+                </a:solidFill>
+              </a:defRPr>
+            </a:pPr>
+            <a:r>
+              <a:t>  Solidity function selector hashing, memory allocation, struct ABI encoding, and non-optimized compiler dispatch overhead.</a:t>
             </a:r>
           </a:p>
         </p:txBody>
@@ -5186,7 +3812,7 @@
 </p:sld>
 </file>
 
-<file path=ppt/slides/slide13.xml><?xml version="1.0" encoding="utf-8"?>
+<file path=ppt/slides/slide11.xml><?xml version="1.0" encoding="utf-8"?>
 <p:sld xmlns:a="http://schemas.openxmlformats.org/drawingml/2006/main" xmlns:p="http://schemas.openxmlformats.org/presentationml/2006/main" xmlns:r="http://schemas.openxmlformats.org/officeDocument/2006/relationships">
   <p:cSld>
     <p:spTree>
@@ -5235,7 +3861,7 @@
           </a:p>
           <a:p>
             <a:pPr>
-              <a:defRPr sz="2200" b="1">
+              <a:defRPr sz="2000" b="1">
                 <a:solidFill>
                   <a:srgbClr val="0F172A"/>
                 </a:solidFill>
@@ -5250,52 +3876,7 @@
       </p:sp>
       <p:sp>
         <p:nvSpPr>
-          <p:cNvPr id="3" name="Rectangle 2"/>
-          <p:cNvSpPr/>
-          <p:nvPr/>
-        </p:nvSpPr>
-        <p:spPr>
-          <a:xfrm>
-            <a:off x="731520" y="1261872"/>
-            <a:ext cx="10728655" cy="36576"/>
-          </a:xfrm>
-          <a:prstGeom prst="rect">
-            <a:avLst/>
-          </a:prstGeom>
-          <a:solidFill>
-            <a:srgbClr val="0284C7"/>
-          </a:solidFill>
-          <a:ln>
-            <a:solidFill>
-              <a:srgbClr val="0284C7"/>
-            </a:solidFill>
-          </a:ln>
-        </p:spPr>
-        <p:style>
-          <a:lnRef idx="1">
-            <a:schemeClr val="accent1"/>
-          </a:lnRef>
-          <a:fillRef idx="3">
-            <a:schemeClr val="accent1"/>
-          </a:fillRef>
-          <a:effectRef idx="2">
-            <a:schemeClr val="accent1"/>
-          </a:effectRef>
-          <a:fontRef idx="minor">
-            <a:schemeClr val="lt1"/>
-          </a:fontRef>
-        </p:style>
-        <p:txBody>
-          <a:bodyPr rtlCol="0" anchor="ctr"/>
-          <a:lstStyle/>
-          <a:p>
-            <a:pPr algn="ctr"/>
-          </a:p>
-        </p:txBody>
-      </p:sp>
-      <p:sp>
-        <p:nvSpPr>
-          <p:cNvPr id="4" name="Rounded Rectangle 3"/>
+          <p:cNvPr id="3" name="Rounded Rectangle 2"/>
           <p:cNvSpPr/>
           <p:nvPr/>
         </p:nvSpPr>
@@ -5340,7 +3921,7 @@
       </p:sp>
       <p:sp>
         <p:nvSpPr>
-          <p:cNvPr id="5" name="TextBox 4"/>
+          <p:cNvPr id="4" name="TextBox 3"/>
           <p:cNvSpPr txBox="1"/>
           <p:nvPr/>
         </p:nvSpPr>
@@ -5364,7 +3945,7 @@
               <a:spcAft>
                 <a:spcPts val="400"/>
               </a:spcAft>
-              <a:defRPr b="1" sz="1400">
+              <a:defRPr b="1" sz="1300">
                 <a:solidFill>
                   <a:srgbClr val="1E3A8A"/>
                 </a:solidFill>
@@ -5376,7 +3957,7 @@
           </a:p>
           <a:p>
             <a:pPr>
-              <a:defRPr sz="1100">
+              <a:defRPr sz="1050">
                 <a:solidFill>
                   <a:srgbClr val="1E293B"/>
                 </a:solidFill>
@@ -5391,7 +3972,7 @@
             </a:r>
             <a:br/>
             <a:r>
-              <a:t>• Valid query ['Cardiology', 'ECG'] matches exactly Doc #501.</a:t>
+              <a:t>• Valid query ['Cardiology', 'ECG'] matches exactly Doc #101.</a:t>
             </a:r>
             <a:br/>
             <a:r>
@@ -5402,7 +3983,7 @@
       </p:sp>
       <p:sp>
         <p:nvSpPr>
-          <p:cNvPr id="6" name="Rounded Rectangle 5"/>
+          <p:cNvPr id="5" name="Rounded Rectangle 4"/>
           <p:cNvSpPr/>
           <p:nvPr/>
         </p:nvSpPr>
@@ -5447,7 +4028,7 @@
       </p:sp>
       <p:sp>
         <p:nvSpPr>
-          <p:cNvPr id="7" name="TextBox 6"/>
+          <p:cNvPr id="6" name="TextBox 5"/>
           <p:cNvSpPr txBox="1"/>
           <p:nvPr/>
         </p:nvSpPr>
@@ -5471,7 +4052,7 @@
               <a:spcAft>
                 <a:spcPts val="400"/>
               </a:spcAft>
-              <a:defRPr b="1" sz="1400">
+              <a:defRPr b="1" sz="1300">
                 <a:solidFill>
                   <a:srgbClr val="0284C7"/>
                 </a:solidFill>
@@ -5483,29 +4064,29 @@
           </a:p>
           <a:p>
             <a:pPr>
-              <a:defRPr sz="1100">
+              <a:defRPr sz="1050">
                 <a:solidFill>
                   <a:srgbClr val="1E293B"/>
                 </a:solidFill>
               </a:defRPr>
             </a:pPr>
             <a:r>
-              <a:t>• Executed single_doc_delete(501) setting deletedDocRegistry[501] = true in 0.0029 ms.</a:t>
+              <a:t>• Executed single_doc_delete(101) setting deletedDocRegistry[101] = true.</a:t>
             </a:r>
             <a:br/>
             <a:r>
-              <a:t>• Search query for ['Cardiology', 'ECG'] skips Doc #501 instantly on-chain.</a:t>
+              <a:t>• Search query for ['Cardiology', 'ECG'] skips Doc #101 instantly.</a:t>
             </a:r>
             <a:br/>
             <a:r>
-              <a:t>• Proves non-revocation invariant: Deleted records are guaranteed never returned.</a:t>
-            </a:r>
-          </a:p>
-        </p:txBody>
-      </p:sp>
-      <p:sp>
-        <p:nvSpPr>
-          <p:cNvPr id="8" name="Rounded Rectangle 7"/>
+              <a:t>• Proves non-revocation invariant: Revoked records are excluded from result sets.</a:t>
+            </a:r>
+          </a:p>
+        </p:txBody>
+      </p:sp>
+      <p:sp>
+        <p:nvSpPr>
+          <p:cNvPr id="7" name="Rounded Rectangle 6"/>
           <p:cNvSpPr/>
           <p:nvPr/>
         </p:nvSpPr>
@@ -5550,7 +4131,7 @@
       </p:sp>
       <p:sp>
         <p:nvSpPr>
-          <p:cNvPr id="9" name="TextBox 8"/>
+          <p:cNvPr id="8" name="TextBox 7"/>
           <p:cNvSpPr txBox="1"/>
           <p:nvPr/>
         </p:nvSpPr>
@@ -5574,7 +4155,7 @@
               <a:spcAft>
                 <a:spcPts val="400"/>
               </a:spcAft>
-              <a:defRPr b="1" sz="1400">
+              <a:defRPr b="1" sz="1300">
                 <a:solidFill>
                   <a:srgbClr val="16A34A"/>
                 </a:solidFill>
@@ -5586,14 +4167,14 @@
           </a:p>
           <a:p>
             <a:pPr>
-              <a:defRPr sz="1100">
+              <a:defRPr sz="1050">
                 <a:solidFill>
                   <a:srgbClr val="1E293B"/>
                 </a:solidFill>
               </a:defRPr>
             </a:pPr>
             <a:r>
-              <a:t>• Dr. Prashant with attributes ['Role_Doctor', 'Dept_Cardiology'] decrypts Doc #504.</a:t>
+              <a:t>• Dr. Prashant with attributes ['Role_Doctor', 'Dept_Cardiology'] decrypts record.</a:t>
             </a:r>
             <a:br/>
             <a:r>
@@ -5608,7 +4189,7 @@
       </p:sp>
       <p:sp>
         <p:nvSpPr>
-          <p:cNvPr id="10" name="Rounded Rectangle 9"/>
+          <p:cNvPr id="9" name="Rounded Rectangle 8"/>
           <p:cNvSpPr/>
           <p:nvPr/>
         </p:nvSpPr>
@@ -5653,7 +4234,7 @@
       </p:sp>
       <p:sp>
         <p:nvSpPr>
-          <p:cNvPr id="11" name="TextBox 10"/>
+          <p:cNvPr id="10" name="TextBox 9"/>
           <p:cNvSpPr txBox="1"/>
           <p:nvPr/>
         </p:nvSpPr>
@@ -5677,7 +4258,7 @@
               <a:spcAft>
                 <a:spcPts val="400"/>
               </a:spcAft>
-              <a:defRPr b="1" sz="1400">
+              <a:defRPr b="1" sz="1300">
                 <a:solidFill>
                   <a:srgbClr val="D97706"/>
                 </a:solidFill>
@@ -5689,22 +4270,22 @@
           </a:p>
           <a:p>
             <a:pPr>
-              <a:defRPr sz="1100">
+              <a:defRPr sz="1050">
                 <a:solidFill>
                   <a:srgbClr val="1E293B"/>
                 </a:solidFill>
               </a:defRPr>
             </a:pPr>
             <a:r>
-              <a:t>• single_doc_add_batch processes 4 clinical records in 0.853 ms (~0.21 ms/doc flat).</a:t>
+              <a:t>• single_doc_add_batch processes 4 clinical records in 0.852 ms (~0.21 ms/doc flat).</a:t>
             </a:r>
             <a:br/>
             <a:r>
-              <a:t>• Inverted index storage scales strictly linearly at ~441 bytes per document.</a:t>
+              <a:t>• Inverted index storage scales strictly linearly at 452.0 bytes per added document.</a:t>
             </a:r>
             <a:br/>
             <a:r>
-              <a:t>• Minimal memory footprint: 1,000 files consume only 441.4 KB with zero bloat.</a:t>
+              <a:t>• Baseline 8 records: 4,098 bytes (512.2 B/doc including schema metadata).</a:t>
             </a:r>
           </a:p>
         </p:txBody>
@@ -5717,7 +4298,7 @@
 </p:sld>
 </file>
 
-<file path=ppt/slides/slide14.xml><?xml version="1.0" encoding="utf-8"?>
+<file path=ppt/slides/slide12.xml><?xml version="1.0" encoding="utf-8"?>
 <p:sld xmlns:a="http://schemas.openxmlformats.org/drawingml/2006/main" xmlns:p="http://schemas.openxmlformats.org/presentationml/2006/main" xmlns:r="http://schemas.openxmlformats.org/officeDocument/2006/relationships">
   <p:cSld>
     <p:spTree>
@@ -5766,7 +4347,7 @@
           </a:p>
           <a:p>
             <a:pPr>
-              <a:defRPr sz="2200" b="1">
+              <a:defRPr sz="2000" b="1">
                 <a:solidFill>
                   <a:srgbClr val="0F172A"/>
                 </a:solidFill>
@@ -5774,59 +4355,14 @@
               </a:defRPr>
             </a:pPr>
             <a:r>
-              <a:t>Production Web3 Deployment: Ethereum Sepolia &amp; IPFS Audit</a:t>
-            </a:r>
-          </a:p>
-        </p:txBody>
-      </p:sp>
-      <p:sp>
-        <p:nvSpPr>
-          <p:cNvPr id="3" name="Rectangle 2"/>
-          <p:cNvSpPr/>
-          <p:nvPr/>
-        </p:nvSpPr>
-        <p:spPr>
-          <a:xfrm>
-            <a:off x="731520" y="1261872"/>
-            <a:ext cx="10728655" cy="36576"/>
-          </a:xfrm>
-          <a:prstGeom prst="rect">
-            <a:avLst/>
-          </a:prstGeom>
-          <a:solidFill>
-            <a:srgbClr val="0284C7"/>
-          </a:solidFill>
-          <a:ln>
-            <a:solidFill>
-              <a:srgbClr val="0284C7"/>
-            </a:solidFill>
-          </a:ln>
-        </p:spPr>
-        <p:style>
-          <a:lnRef idx="1">
-            <a:schemeClr val="accent1"/>
-          </a:lnRef>
-          <a:fillRef idx="3">
-            <a:schemeClr val="accent1"/>
-          </a:fillRef>
-          <a:effectRef idx="2">
-            <a:schemeClr val="accent1"/>
-          </a:effectRef>
-          <a:fontRef idx="minor">
-            <a:schemeClr val="lt1"/>
-          </a:fontRef>
-        </p:style>
-        <p:txBody>
-          <a:bodyPr rtlCol="0" anchor="ctr"/>
-          <a:lstStyle/>
-          <a:p>
-            <a:pPr algn="ctr"/>
-          </a:p>
-        </p:txBody>
-      </p:sp>
-      <p:sp>
-        <p:nvSpPr>
-          <p:cNvPr id="4" name="Rounded Rectangle 3"/>
+              <a:t>Production Web3 Deployment: Sepolia &amp; IPFS Audit</a:t>
+            </a:r>
+          </a:p>
+        </p:txBody>
+      </p:sp>
+      <p:sp>
+        <p:nvSpPr>
+          <p:cNvPr id="3" name="Rounded Rectangle 2"/>
           <p:cNvSpPr/>
           <p:nvPr/>
         </p:nvSpPr>
@@ -5871,7 +4407,7 @@
       </p:sp>
       <p:sp>
         <p:nvSpPr>
-          <p:cNvPr id="5" name="TextBox 4"/>
+          <p:cNvPr id="4" name="TextBox 3"/>
           <p:cNvSpPr txBox="1"/>
           <p:nvPr/>
         </p:nvSpPr>
@@ -5893,7 +4429,7 @@
           <a:p>
             <a:pPr>
               <a:spcAft>
-                <a:spcPts val="1000"/>
+                <a:spcPts val="800"/>
               </a:spcAft>
               <a:defRPr b="1" sz="1600">
                 <a:solidFill>
@@ -5902,15 +4438,15 @@
               </a:defRPr>
             </a:pPr>
             <a:r>
-              <a:t>Live On-Chain Smart Contract Artifacts</a:t>
-            </a:r>
-          </a:p>
-          <a:p>
-            <a:pPr>
-              <a:spcAft>
-                <a:spcPts val="300"/>
-              </a:spcAft>
-              <a:defRPr sz="1050" b="1">
+              <a:t>Verified On-Chain Deployment Artifacts</a:t>
+            </a:r>
+          </a:p>
+          <a:p>
+            <a:pPr>
+              <a:spcAft>
+                <a:spcPts val="200"/>
+              </a:spcAft>
+              <a:defRPr sz="950" b="1">
                 <a:solidFill>
                   <a:srgbClr val="0F172A"/>
                 </a:solidFill>
@@ -5921,155 +4457,136 @@
             </a:r>
             <a:br/>
             <a:r>
-              <a:t>  0x3829bda65146D8fb0C2c6E2596F6A39936bF9DB5</a:t>
-            </a:r>
-          </a:p>
-          <a:p>
-            <a:pPr>
-              <a:spcAft>
-                <a:spcPts val="300"/>
-              </a:spcAft>
-              <a:defRPr sz="1050" b="1">
+              <a:t>  0xfDC8615Bf6483c3B0f39c330F55A56Cb0f08C8D3</a:t>
+            </a:r>
+          </a:p>
+          <a:p>
+            <a:pPr>
+              <a:spcAft>
+                <a:spcPts val="200"/>
+              </a:spcAft>
+              <a:defRPr sz="950" b="1">
                 <a:solidFill>
                   <a:srgbClr val="0F172A"/>
                 </a:solidFill>
               </a:defRPr>
             </a:pPr>
             <a:r>
-              <a:t>• Deployment Tx Hash:</a:t>
+              <a:t>• Deployment Transaction:</a:t>
             </a:r>
             <a:br/>
             <a:r>
-              <a:t>  0x2277c1481ed1e96268cadd12bd35529bc41d2285ff362a75d3dd2fb62dc6f85c</a:t>
-            </a:r>
-          </a:p>
-          <a:p>
-            <a:pPr>
-              <a:spcAft>
-                <a:spcPts val="300"/>
-              </a:spcAft>
-              <a:defRPr sz="1050" b="0">
+              <a:t>  0x1f058bde75b20c2d1ce513897d77d70f47a2951cbcc83d9bc45a573116bf0dbf</a:t>
+            </a:r>
+          </a:p>
+          <a:p>
+            <a:pPr>
+              <a:spcAft>
+                <a:spcPts val="200"/>
+              </a:spcAft>
+              <a:defRPr sz="950" b="0">
                 <a:solidFill>
                   <a:srgbClr val="1E293B"/>
                 </a:solidFill>
               </a:defRPr>
             </a:pPr>
             <a:r>
-              <a:t>• Target EVM Network:</a:t>
+              <a:t>• Deployment Block &amp; Gas:</a:t>
             </a:r>
             <a:br/>
             <a:r>
+              <a:t>  Block #11975268 | Gas Used: 6,889,229</a:t>
+            </a:r>
+          </a:p>
+          <a:p>
+            <a:pPr>
+              <a:spcAft>
+                <a:spcPts val="200"/>
+              </a:spcAft>
+              <a:defRPr sz="950" b="0">
+                <a:solidFill>
+                  <a:srgbClr val="1E293B"/>
+                </a:solidFill>
+              </a:defRPr>
+            </a:pPr>
+            <a:r>
+              <a:t>• Target Network:</a:t>
+            </a:r>
+            <a:br/>
+            <a:r>
               <a:t>  Ethereum Sepolia Testnet (Chain ID: 11155111)</a:t>
             </a:r>
           </a:p>
           <a:p>
             <a:pPr>
               <a:spcAft>
-                <a:spcPts val="300"/>
-              </a:spcAft>
-              <a:defRPr sz="1050" b="0">
+                <a:spcPts val="200"/>
+              </a:spcAft>
+              <a:defRPr sz="950" b="1">
+                <a:solidFill>
+                  <a:srgbClr val="0F172A"/>
+                </a:solidFill>
+              </a:defRPr>
+            </a:pPr>
+            <a:r>
+              <a:t>• registerDocument(101) Tx:</a:t>
+            </a:r>
+            <a:br/>
+            <a:r>
+              <a:t>  0x363d3e8867adb49a2657b798ebb26990a5d0011ec5ddaf7de267ff191dc40ad7</a:t>
+            </a:r>
+          </a:p>
+          <a:p>
+            <a:pPr>
+              <a:spcAft>
+                <a:spcPts val="200"/>
+              </a:spcAft>
+              <a:defRPr sz="950" b="1">
+                <a:solidFill>
+                  <a:srgbClr val="0F172A"/>
+                </a:solidFill>
+              </a:defRPr>
+            </a:pPr>
+            <a:r>
+              <a:t>• deleteDocument(101) Tx:</a:t>
+            </a:r>
+            <a:br/>
+            <a:r>
+              <a:t>  0x008330a08b3ad8926b19de8dc0a1b386b95712dc55077e33df2a36685c876e8d</a:t>
+            </a:r>
+          </a:p>
+          <a:p>
+            <a:pPr>
+              <a:spcAft>
+                <a:spcPts val="200"/>
+              </a:spcAft>
+              <a:defRPr sz="950" b="0">
                 <a:solidFill>
                   <a:srgbClr val="1E293B"/>
                 </a:solidFill>
               </a:defRPr>
             </a:pPr>
             <a:r>
-              <a:t>• Deployment Block Height:</a:t>
+              <a:t>• Pinata IPFS Gateway CID:</a:t>
             </a:r>
             <a:br/>
             <a:r>
-              <a:t>  Block #11946107</a:t>
-            </a:r>
-          </a:p>
-          <a:p>
-            <a:pPr>
-              <a:spcAft>
-                <a:spcPts val="300"/>
-              </a:spcAft>
-              <a:defRPr sz="1050" b="1">
-                <a:solidFill>
-                  <a:srgbClr val="0F172A"/>
-                </a:solidFill>
-              </a:defRPr>
-            </a:pPr>
-            <a:r>
-              <a:t>• Deployer Wallet:</a:t>
-            </a:r>
-            <a:br/>
-            <a:r>
-              <a:t>  0x7962dc40751101B4AF8299f70ABeb9feF52D50e9</a:t>
-            </a:r>
-          </a:p>
-          <a:p>
-            <a:pPr>
-              <a:spcAft>
-                <a:spcPts val="300"/>
-              </a:spcAft>
-              <a:defRPr sz="1050" b="0">
+              <a:t>  bafkreiegat25m4vgoltbz5l5wtvka7ipm4osl7xtyryhbg643ihctznluq</a:t>
+            </a:r>
+          </a:p>
+          <a:p>
+            <a:pPr>
+              <a:spcAft>
+                <a:spcPts val="200"/>
+              </a:spcAft>
+              <a:defRPr sz="950" b="0">
                 <a:solidFill>
                   <a:srgbClr val="1E293B"/>
                 </a:solidFill>
               </a:defRPr>
             </a:pPr>
             <a:r>
-              <a:t>• Gas Consumed:</a:t>
-            </a:r>
-            <a:br/>
-            <a:r>
-              <a:t>  3,000,000 gas units (Contract Creation)</a:t>
-            </a:r>
-          </a:p>
-          <a:p>
-            <a:pPr>
-              <a:spcAft>
-                <a:spcPts val="300"/>
-              </a:spcAft>
-              <a:defRPr sz="1050" b="0">
-                <a:solidFill>
-                  <a:srgbClr val="1E293B"/>
-                </a:solidFill>
-              </a:defRPr>
-            </a:pPr>
-            <a:r>
-              <a:t>• Pinata IPFS Gateway:</a:t>
-            </a:r>
-            <a:br/>
-            <a:r>
-              <a:t>  https://gateway.pinata.cloud/ipfs/</a:t>
-            </a:r>
-          </a:p>
-          <a:p>
-            <a:pPr>
-              <a:spcAft>
-                <a:spcPts val="300"/>
-              </a:spcAft>
-              <a:defRPr sz="1050" b="0">
-                <a:solidFill>
-                  <a:srgbClr val="1E293B"/>
-                </a:solidFill>
-              </a:defRPr>
-            </a:pPr>
-            <a:r>
-              <a:t>• IPFS Content CID:</a:t>
-            </a:r>
-            <a:br/>
-            <a:r>
-              <a:t>  bafkreiegat25m4vgoltbz5l5wtvka7ipm4osl7xtyryhbg643ihctznluq</a:t>
-            </a:r>
-          </a:p>
-          <a:p>
-            <a:pPr>
-              <a:spcAft>
-                <a:spcPts val="300"/>
-              </a:spcAft>
-              <a:defRPr sz="1050" b="0">
-                <a:solidFill>
-                  <a:srgbClr val="1E293B"/>
-                </a:solidFill>
-              </a:defRPr>
-            </a:pPr>
-            <a:r>
-              <a:t>• GitHub Repository:</a:t>
+              <a:t>• Public GitHub Repo:</a:t>
             </a:r>
             <a:br/>
             <a:r>
@@ -6080,7 +4597,7 @@
       </p:sp>
       <p:pic>
         <p:nvPicPr>
-          <p:cNvPr id="6" name="Picture 5" descr="blockchain_role.jpg"/>
+          <p:cNvPr id="5" name="Picture 4" descr="blockchain_role.jpg"/>
           <p:cNvPicPr>
             <a:picLocks noChangeAspect="1"/>
           </p:cNvPicPr>
@@ -6110,7 +4627,7 @@
 </p:sld>
 </file>
 
-<file path=ppt/slides/slide15.xml><?xml version="1.0" encoding="utf-8"?>
+<file path=ppt/slides/slide13.xml><?xml version="1.0" encoding="utf-8"?>
 <p:sld xmlns:a="http://schemas.openxmlformats.org/drawingml/2006/main" xmlns:p="http://schemas.openxmlformats.org/presentationml/2006/main" xmlns:r="http://schemas.openxmlformats.org/officeDocument/2006/relationships">
   <p:cSld>
     <p:spTree>
@@ -6159,7 +4676,7 @@
           </a:p>
           <a:p>
             <a:pPr>
-              <a:defRPr sz="2200" b="1">
+              <a:defRPr sz="2000" b="1">
                 <a:solidFill>
                   <a:srgbClr val="0F172A"/>
                 </a:solidFill>
@@ -6167,59 +4684,14 @@
               </a:defRPr>
             </a:pPr>
             <a:r>
-              <a:t>Clinical EHR Corpus &amp; Interactive Web Application Interface</a:t>
-            </a:r>
-          </a:p>
-        </p:txBody>
-      </p:sp>
-      <p:sp>
-        <p:nvSpPr>
-          <p:cNvPr id="3" name="Rectangle 2"/>
-          <p:cNvSpPr/>
-          <p:nvPr/>
-        </p:nvSpPr>
-        <p:spPr>
-          <a:xfrm>
-            <a:off x="731520" y="1261872"/>
-            <a:ext cx="10728655" cy="36576"/>
-          </a:xfrm>
-          <a:prstGeom prst="rect">
-            <a:avLst/>
-          </a:prstGeom>
-          <a:solidFill>
-            <a:srgbClr val="0284C7"/>
-          </a:solidFill>
-          <a:ln>
-            <a:solidFill>
-              <a:srgbClr val="0284C7"/>
-            </a:solidFill>
-          </a:ln>
-        </p:spPr>
-        <p:style>
-          <a:lnRef idx="1">
-            <a:schemeClr val="accent1"/>
-          </a:lnRef>
-          <a:fillRef idx="3">
-            <a:schemeClr val="accent1"/>
-          </a:fillRef>
-          <a:effectRef idx="2">
-            <a:schemeClr val="accent1"/>
-          </a:effectRef>
-          <a:fontRef idx="minor">
-            <a:schemeClr val="lt1"/>
-          </a:fontRef>
-        </p:style>
-        <p:txBody>
-          <a:bodyPr rtlCol="0" anchor="ctr"/>
-          <a:lstStyle/>
-          <a:p>
-            <a:pPr algn="ctr"/>
-          </a:p>
-        </p:txBody>
-      </p:sp>
-      <p:sp>
-        <p:nvSpPr>
-          <p:cNvPr id="4" name="Rounded Rectangle 3"/>
+              <a:t>Clinical EHR Corpus &amp; Interactive Clinician Dashboard</a:t>
+            </a:r>
+          </a:p>
+        </p:txBody>
+      </p:sp>
+      <p:sp>
+        <p:nvSpPr>
+          <p:cNvPr id="3" name="Rounded Rectangle 2"/>
           <p:cNvSpPr/>
           <p:nvPr/>
         </p:nvSpPr>
@@ -6264,7 +4736,7 @@
       </p:sp>
       <p:sp>
         <p:nvSpPr>
-          <p:cNvPr id="5" name="TextBox 4"/>
+          <p:cNvPr id="4" name="TextBox 3"/>
           <p:cNvSpPr txBox="1"/>
           <p:nvPr/>
         </p:nvSpPr>
@@ -6295,104 +4767,119 @@
               </a:defRPr>
             </a:pPr>
             <a:r>
-              <a:t>Realistic Multi-Specialty Clinical Corpus</a:t>
-            </a:r>
-          </a:p>
-          <a:p>
-            <a:pPr>
-              <a:spcAft>
-                <a:spcPts val="500"/>
-              </a:spcAft>
-              <a:defRPr sz="1100">
+              <a:t>Multi-Specialty Clinical EHR Corpus</a:t>
+            </a:r>
+          </a:p>
+          <a:p>
+            <a:pPr>
+              <a:spcAft>
+                <a:spcPts val="300"/>
+              </a:spcAft>
+              <a:defRPr sz="1050">
                 <a:solidFill>
                   <a:srgbClr val="1E293B"/>
                 </a:solidFill>
               </a:defRPr>
             </a:pPr>
             <a:r>
-              <a:t>• Doc #201 (Cardiology): STEMI Acute Infarction 12-lead ECG telemetry. Access: Role_Doctor AND Dept_Cardiology.</a:t>
-            </a:r>
-          </a:p>
-          <a:p>
-            <a:pPr>
-              <a:spcAft>
-                <a:spcPts val="500"/>
-              </a:spcAft>
-              <a:defRPr sz="1100">
+              <a:t>• Doc #201 (Cardiology): STEMI Acute Infarction 12-lead ECG telemetry text.</a:t>
+            </a:r>
+          </a:p>
+          <a:p>
+            <a:pPr>
+              <a:spcAft>
+                <a:spcPts val="300"/>
+              </a:spcAft>
+              <a:defRPr sz="1050">
                 <a:solidFill>
                   <a:srgbClr val="1E293B"/>
                 </a:solidFill>
               </a:defRPr>
             </a:pPr>
             <a:r>
-              <a:t>• Doc #202 (Cardiology): 24-hour Holter ventricular tachycardia monitoring. Access: Role_Doctor AND Dept_Cardiology.</a:t>
-            </a:r>
-          </a:p>
-          <a:p>
-            <a:pPr>
-              <a:spcAft>
-                <a:spcPts val="500"/>
-              </a:spcAft>
-              <a:defRPr sz="1100">
+              <a:t>• Doc #202 (Cardiology): 24-hour Holter ventricular tachycardia JSON stream.</a:t>
+            </a:r>
+          </a:p>
+          <a:p>
+            <a:pPr>
+              <a:spcAft>
+                <a:spcPts val="300"/>
+              </a:spcAft>
+              <a:defRPr sz="1050">
                 <a:solidFill>
                   <a:srgbClr val="1E293B"/>
                 </a:solidFill>
               </a:defRPr>
             </a:pPr>
             <a:r>
-              <a:t>• Doc #203 (Neurology): 3T cranial brain MRI, mesial temporal sclerosis. Access: Role_Doctor AND Dept_Neurology.</a:t>
-            </a:r>
-          </a:p>
-          <a:p>
-            <a:pPr>
-              <a:spcAft>
-                <a:spcPts val="500"/>
-              </a:spcAft>
-              <a:defRPr sz="1100">
+              <a:t>• Doc #203 (Neurology): 3T cranial brain MRI, temporal sclerosis report.</a:t>
+            </a:r>
+          </a:p>
+          <a:p>
+            <a:pPr>
+              <a:spcAft>
+                <a:spcPts val="300"/>
+              </a:spcAft>
+              <a:defRPr sz="1050">
                 <a:solidFill>
                   <a:srgbClr val="1E293B"/>
                 </a:solidFill>
               </a:defRPr>
             </a:pPr>
             <a:r>
-              <a:t>• Doc #205 (Oncology): Histopathology breast biopsy, HER2/ER/PR status. Access: Role_Doctor AND Dept_Oncology.</a:t>
-            </a:r>
-          </a:p>
-          <a:p>
-            <a:pPr>
-              <a:spcAft>
-                <a:spcPts val="500"/>
-              </a:spcAft>
-              <a:defRPr sz="1100">
+              <a:t>• Doc #204 (Neurology): Stroke perfusion biomarker lab CSV data.</a:t>
+            </a:r>
+          </a:p>
+          <a:p>
+            <a:pPr>
+              <a:spcAft>
+                <a:spcPts val="300"/>
+              </a:spcAft>
+              <a:defRPr sz="1050">
                 <a:solidFill>
                   <a:srgbClr val="1E293B"/>
                 </a:solidFill>
               </a:defRPr>
             </a:pPr>
             <a:r>
-              <a:t>• Doc #207 (Pediatrics): Childhood immunization vitals (MMR/DTaP). Access: Role_Nurse OR Role_Doctor.</a:t>
-            </a:r>
-          </a:p>
-          <a:p>
-            <a:pPr>
-              <a:spcAft>
-                <a:spcPts val="500"/>
-              </a:spcAft>
-              <a:defRPr sz="1100">
+              <a:t>• Doc #205 (Oncology): Histopathology breast biopsy, HER2/ER/PR pathology.</a:t>
+            </a:r>
+          </a:p>
+          <a:p>
+            <a:pPr>
+              <a:spcAft>
+                <a:spcPts val="300"/>
+              </a:spcAft>
+              <a:defRPr sz="1050">
                 <a:solidFill>
                   <a:srgbClr val="1E293B"/>
                 </a:solidFill>
               </a:defRPr>
             </a:pPr>
             <a:r>
-              <a:t>• Doc #209 (Discharge): Comprehensive multi-departmental inpatient discharge summary. Access: Role_Nurse OR Role_Doctor.</a:t>
-            </a:r>
-          </a:p>
-        </p:txBody>
-      </p:sp>
-      <p:sp>
-        <p:nvSpPr>
-          <p:cNvPr id="6" name="Rounded Rectangle 5"/>
+              <a:t>• Doc #207 (Pediatrics): Childhood immunization vitals and vaccination table.</a:t>
+            </a:r>
+          </a:p>
+          <a:p>
+            <a:pPr>
+              <a:spcAft>
+                <a:spcPts val="300"/>
+              </a:spcAft>
+              <a:defRPr sz="1050">
+                <a:solidFill>
+                  <a:srgbClr val="1E293B"/>
+                </a:solidFill>
+              </a:defRPr>
+            </a:pPr>
+            <a:r>
+              <a:t>• Doc #209 (Discharge): Comprehensive multi-departmental inpatient summary.</a:t>
+            </a:r>
+          </a:p>
+        </p:txBody>
+      </p:sp>
+      <p:sp>
+        <p:nvSpPr>
+          <p:cNvPr id="5" name="Rounded Rectangle 4"/>
           <p:cNvSpPr/>
           <p:nvPr/>
         </p:nvSpPr>
@@ -6437,7 +4924,7 @@
       </p:sp>
       <p:sp>
         <p:nvSpPr>
-          <p:cNvPr id="7" name="TextBox 6"/>
+          <p:cNvPr id="6" name="TextBox 5"/>
           <p:cNvSpPr txBox="1"/>
           <p:nvPr/>
         </p:nvSpPr>
@@ -6468,66 +4955,66 @@
               </a:defRPr>
             </a:pPr>
             <a:r>
-              <a:t>Interactive Clinician Web Dashboard (app.py)</a:t>
-            </a:r>
-          </a:p>
-          <a:p>
-            <a:pPr>
-              <a:defRPr b="1" sz="1150">
+              <a:t>Interactive Clinician Dashboard (app.py)</a:t>
+            </a:r>
+          </a:p>
+          <a:p>
+            <a:pPr>
+              <a:defRPr b="1" sz="1100">
                 <a:solidFill>
                   <a:srgbClr val="0F172A"/>
                 </a:solidFill>
               </a:defRPr>
             </a:pPr>
             <a:r>
-              <a:t>✓ Multi-Role Identity Switcher:</a:t>
-            </a:r>
-          </a:p>
-          <a:p>
-            <a:pPr>
-              <a:spcAft>
-                <a:spcPts val="400"/>
-              </a:spcAft>
-              <a:defRPr sz="1050">
+              <a:t>✓ Identity Switcher:</a:t>
+            </a:r>
+          </a:p>
+          <a:p>
+            <a:pPr>
+              <a:spcAft>
+                <a:spcPts val="300"/>
+              </a:spcAft>
+              <a:defRPr sz="1000">
                 <a:solidFill>
                   <a:srgbClr val="1E293B"/>
                 </a:solidFill>
               </a:defRPr>
             </a:pPr>
             <a:r>
-              <a:t>  Simulates Attending Physician (Dr. Prashant), Resident Doctor, and Staff Nurse (Nurse Anita) with dynamic attribute tokens.</a:t>
-            </a:r>
-          </a:p>
-          <a:p>
-            <a:pPr>
-              <a:defRPr b="1" sz="1150">
+              <a:t>  Switch between Attending Physician (Dr. Prashant) and Staff Nurse (Nurse Anita) with dynamic attribute tokens.</a:t>
+            </a:r>
+          </a:p>
+          <a:p>
+            <a:pPr>
+              <a:defRPr b="1" sz="1100">
                 <a:solidFill>
                   <a:srgbClr val="0F172A"/>
                 </a:solidFill>
               </a:defRPr>
             </a:pPr>
             <a:r>
-              <a:t>✓ Real-Time Multi-Keyword Trapdoor Search:</a:t>
-            </a:r>
-          </a:p>
-          <a:p>
-            <a:pPr>
-              <a:spcAft>
-                <a:spcPts val="400"/>
-              </a:spcAft>
-              <a:defRPr sz="1050">
+              <a:t>✓ Multi-Keyword Search:</a:t>
+            </a:r>
+          </a:p>
+          <a:p>
+            <a:pPr>
+              <a:spcAft>
+                <a:spcPts val="300"/>
+              </a:spcAft>
+              <a:defRPr sz="1000">
                 <a:solidFill>
                   <a:srgbClr val="1E293B"/>
                 </a:solidFill>
               </a:defRPr>
             </a:pPr>
             <a:r>
-              <a:t>  Input medical diagnoses ('Cardiology', 'ECG'); executes algebraic search and renders decrypted matching records.</a:t>
-            </a:r>
-          </a:p>
-          <a:p>
-            <a:pPr>
-              <a:defRPr b="1" sz="1150">
+              <a:t>  Input medical keywords ('Cardiology', 'ECG'); executes conjunctive match and renders decrypted records.</a:t>
+            </a:r>
+          </a:p>
+          <a:p>
+            <a:pPr>
+              <a:defRPr b="1" sz="1100">
                 <a:solidFill>
                   <a:srgbClr val="0F172A"/>
                 </a:solidFill>
@@ -6540,70 +5027,70 @@
           <a:p>
             <a:pPr>
               <a:spcAft>
-                <a:spcPts val="400"/>
-              </a:spcAft>
-              <a:defRPr sz="1050">
+                <a:spcPts val="300"/>
+              </a:spcAft>
+              <a:defRPr sz="1000">
                 <a:solidFill>
                   <a:srgbClr val="1E293B"/>
                 </a:solidFill>
               </a:defRPr>
             </a:pPr>
             <a:r>
-              <a:t>  Revoke any record dynamically; triggers Web3 transaction and updates local search state in O(1) time.</a:t>
-            </a:r>
-          </a:p>
-          <a:p>
-            <a:pPr>
-              <a:defRPr b="1" sz="1150">
+              <a:t>  Revoke any record; updates on-chain registry and excludes record from search in real time.</a:t>
+            </a:r>
+          </a:p>
+          <a:p>
+            <a:pPr>
+              <a:defRPr b="1" sz="1100">
                 <a:solidFill>
                   <a:srgbClr val="0F172A"/>
                 </a:solidFill>
               </a:defRPr>
             </a:pPr>
             <a:r>
-              <a:t>✓ Single-File &amp; Batch Ingestion Mode:</a:t>
-            </a:r>
-          </a:p>
-          <a:p>
-            <a:pPr>
-              <a:spcAft>
-                <a:spcPts val="400"/>
-              </a:spcAft>
-              <a:defRPr sz="1050">
+              <a:t>✓ Single-File &amp; Batch Ingestion:</a:t>
+            </a:r>
+          </a:p>
+          <a:p>
+            <a:pPr>
+              <a:spcAft>
+                <a:spcPts val="300"/>
+              </a:spcAft>
+              <a:defRPr sz="1000">
                 <a:solidFill>
                   <a:srgbClr val="1E293B"/>
                 </a:solidFill>
               </a:defRPr>
             </a:pPr>
             <a:r>
-              <a:t>  Upload single or batch clinical records; automatically encrypts, pins to IPFS, and appends index entries in O(m) time.</a:t>
-            </a:r>
-          </a:p>
-          <a:p>
-            <a:pPr>
-              <a:defRPr b="1" sz="1150">
+              <a:t>  Encrypts and uploads files to IPFS and adds index tokens in O(m) time.</a:t>
+            </a:r>
+          </a:p>
+          <a:p>
+            <a:pPr>
+              <a:defRPr b="1" sz="1100">
                 <a:solidFill>
                   <a:srgbClr val="0F172A"/>
                 </a:solidFill>
               </a:defRPr>
             </a:pPr>
             <a:r>
-              <a:t>✓ Live Benchmark Telemetry Panel:</a:t>
-            </a:r>
-          </a:p>
-          <a:p>
-            <a:pPr>
-              <a:spcAft>
-                <a:spcPts val="400"/>
-              </a:spcAft>
-              <a:defRPr sz="1050">
+              <a:t>✓ Live Telemetry Panel:</a:t>
+            </a:r>
+          </a:p>
+          <a:p>
+            <a:pPr>
+              <a:spcAft>
+                <a:spcPts val="300"/>
+              </a:spcAft>
+              <a:defRPr sz="1000">
                 <a:solidFill>
                   <a:srgbClr val="1E293B"/>
                 </a:solidFill>
               </a:defRPr>
             </a:pPr>
             <a:r>
-              <a:t>  Visualizes real-time execution milliseconds and speedup multipliers directly in the browser.</a:t>
+              <a:t>  Visualizes real-time execution milliseconds and latency metrics directly in browser.</a:t>
             </a:r>
           </a:p>
         </p:txBody>
@@ -6616,7 +5103,7 @@
 </p:sld>
 </file>
 
-<file path=ppt/slides/slide16.xml><?xml version="1.0" encoding="utf-8"?>
+<file path=ppt/slides/slide14.xml><?xml version="1.0" encoding="utf-8"?>
 <p:sld xmlns:a="http://schemas.openxmlformats.org/drawingml/2006/main" xmlns:p="http://schemas.openxmlformats.org/presentationml/2006/main" xmlns:r="http://schemas.openxmlformats.org/officeDocument/2006/relationships">
   <p:cSld>
     <p:spTree>
@@ -6665,7 +5152,7 @@
           </a:p>
           <a:p>
             <a:pPr>
-              <a:defRPr sz="2200" b="1">
+              <a:defRPr sz="2000" b="1">
                 <a:solidFill>
                   <a:srgbClr val="0F172A"/>
                 </a:solidFill>
@@ -6673,31 +5160,31 @@
               </a:defRPr>
             </a:pPr>
             <a:r>
-              <a:t>Conclusion &amp; Summary of Research Achievements</a:t>
-            </a:r>
-          </a:p>
-        </p:txBody>
-      </p:sp>
-      <p:sp>
-        <p:nvSpPr>
-          <p:cNvPr id="3" name="Rectangle 2"/>
+              <a:t>Prototype Scope, Assumptions &amp; Threats to Validity</a:t>
+            </a:r>
+          </a:p>
+        </p:txBody>
+      </p:sp>
+      <p:sp>
+        <p:nvSpPr>
+          <p:cNvPr id="3" name="Rounded Rectangle 2"/>
           <p:cNvSpPr/>
           <p:nvPr/>
         </p:nvSpPr>
         <p:spPr>
           <a:xfrm>
-            <a:off x="731520" y="1261872"/>
-            <a:ext cx="10728655" cy="36576"/>
+            <a:off x="731520" y="1463040"/>
+            <a:ext cx="10728655" cy="4846320"/>
           </a:xfrm>
-          <a:prstGeom prst="rect">
+          <a:prstGeom prst="roundRect">
             <a:avLst/>
           </a:prstGeom>
           <a:solidFill>
-            <a:srgbClr val="0284C7"/>
+            <a:srgbClr val="F8FAFC"/>
           </a:solidFill>
-          <a:ln>
+          <a:ln w="15240">
             <a:solidFill>
-              <a:srgbClr val="0284C7"/>
+              <a:srgbClr val="D97706"/>
             </a:solidFill>
           </a:ln>
         </p:spPr>
@@ -6725,7 +5212,250 @@
       </p:sp>
       <p:sp>
         <p:nvSpPr>
-          <p:cNvPr id="4" name="Rounded Rectangle 3"/>
+          <p:cNvPr id="4" name="TextBox 3"/>
+          <p:cNvSpPr txBox="1"/>
+          <p:nvPr/>
+        </p:nvSpPr>
+        <p:spPr>
+          <a:xfrm>
+            <a:off x="1005840" y="1645920"/>
+            <a:ext cx="10180015" cy="4480560"/>
+          </a:xfrm>
+          <a:prstGeom prst="rect">
+            <a:avLst/>
+          </a:prstGeom>
+          <a:noFill/>
+        </p:spPr>
+        <p:txBody>
+          <a:bodyPr wrap="square">
+            <a:spAutoFit/>
+          </a:bodyPr>
+          <a:lstStyle/>
+          <a:p>
+            <a:pPr>
+              <a:spcAft>
+                <a:spcPts val="1000"/>
+              </a:spcAft>
+              <a:defRPr b="1" sz="1600">
+                <a:solidFill>
+                  <a:srgbClr val="D97706"/>
+                </a:solidFill>
+              </a:defRPr>
+            </a:pPr>
+            <a:r>
+              <a:t>Transparent Limitations &amp; Architectural Trade-offs</a:t>
+            </a:r>
+          </a:p>
+          <a:p>
+            <a:pPr>
+              <a:defRPr b="1" sz="1150">
+                <a:solidFill>
+                  <a:srgbClr val="0F172A"/>
+                </a:solidFill>
+              </a:defRPr>
+            </a:pPr>
+            <a:r>
+              <a:t>• 1. Simulated Group Algebra: </a:t>
+            </a:r>
+          </a:p>
+          <a:p>
+            <a:pPr>
+              <a:spcAft>
+                <a:spcPts val="500"/>
+              </a:spcAft>
+              <a:defRPr sz="1050">
+                <a:solidFill>
+                  <a:srgbClr val="1E293B"/>
+                </a:solidFill>
+              </a:defRPr>
+            </a:pPr>
+            <a:r>
+              <a:t>  Field operations evaluated in (Z_P*, *) with secp256k1 prime P. Order is P-1 (composite); pairing e(g,g) is simulated via modular exponentiation. Production deployment requires Type-III pairing groups (e.g., BN254 / BLS12-381).</a:t>
+            </a:r>
+          </a:p>
+          <a:p>
+            <a:pPr>
+              <a:defRPr b="1" sz="1150">
+                <a:solidFill>
+                  <a:srgbClr val="0F172A"/>
+                </a:solidFill>
+              </a:defRPr>
+            </a:pPr>
+            <a:r>
+              <a:t>• 2. CSP Search Separation in Prototype: </a:t>
+            </a:r>
+          </a:p>
+          <a:p>
+            <a:pPr>
+              <a:spcAft>
+                <a:spcPts val="500"/>
+              </a:spcAft>
+              <a:defRPr sz="1050">
+                <a:solidFill>
+                  <a:srgbClr val="1E293B"/>
+                </a:solidFill>
+              </a:defRPr>
+            </a:pPr>
+            <a:r>
+              <a:t>  In the demonstration test script, the CSP receives eta and phi directly to evaluate modular match equations. Production pairing eliminates this requirement.</a:t>
+            </a:r>
+          </a:p>
+          <a:p>
+            <a:pPr>
+              <a:defRPr b="1" sz="1150">
+                <a:solidFill>
+                  <a:srgbClr val="0F172A"/>
+                </a:solidFill>
+              </a:defRPr>
+            </a:pPr>
+            <a:r>
+              <a:t>• 3. Inverted Index Access-Pattern Leakage: </a:t>
+            </a:r>
+          </a:p>
+          <a:p>
+            <a:pPr>
+              <a:spcAft>
+                <a:spcPts val="500"/>
+              </a:spcAft>
+              <a:defRPr sz="1050">
+                <a:solidFill>
+                  <a:srgbClr val="1E293B"/>
+                </a:solidFill>
+              </a:defRPr>
+            </a:pPr>
+            <a:r>
+              <a:t>  Keyword tokens I_doc,j = g^(eta * H1(w_j)) are deterministic across documents. The CSP can observe document frequency and search patterns over time. Forward-private DSSE is future work.</a:t>
+            </a:r>
+          </a:p>
+          <a:p>
+            <a:pPr>
+              <a:defRPr b="1" sz="1150">
+                <a:solidFill>
+                  <a:srgbClr val="0F172A"/>
+                </a:solidFill>
+              </a:defRPr>
+            </a:pPr>
+            <a:r>
+              <a:t>• 4. Simulated Policy Checking: </a:t>
+            </a:r>
+          </a:p>
+          <a:p>
+            <a:pPr>
+              <a:spcAft>
+                <a:spcPts val="500"/>
+              </a:spcAft>
+              <a:defRPr sz="1050">
+                <a:solidFill>
+                  <a:srgbClr val="1E293B"/>
+                </a:solidFill>
+              </a:defRPr>
+            </a:pPr>
+            <a:r>
+              <a:t>  CP-ABE access policy satisfaction is evaluated via attribute set evaluation rather than full algebraic LSSS pairing engine.</a:t>
+            </a:r>
+          </a:p>
+          <a:p>
+            <a:pPr>
+              <a:defRPr b="1" sz="1150">
+                <a:solidFill>
+                  <a:srgbClr val="0F172A"/>
+                </a:solidFill>
+              </a:defRPr>
+            </a:pPr>
+            <a:r>
+              <a:t>• 5. Local vs. On-Chain Deletion Latency: </a:t>
+            </a:r>
+          </a:p>
+          <a:p>
+            <a:pPr>
+              <a:spcAft>
+                <a:spcPts val="500"/>
+              </a:spcAft>
+              <a:defRPr sz="1050">
+                <a:solidFill>
+                  <a:srgbClr val="1E293B"/>
+                </a:solidFill>
+              </a:defRPr>
+            </a:pPr>
+            <a:r>
+              <a:t>  Local flag updates take &lt; 0.001 ms in memory; real Ethereum Sepolia block mining takes 21.83 s for deletion confirmation.</a:t>
+            </a:r>
+          </a:p>
+        </p:txBody>
+      </p:sp>
+    </p:spTree>
+  </p:cSld>
+  <p:clrMapOvr>
+    <a:masterClrMapping/>
+  </p:clrMapOvr>
+</p:sld>
+</file>
+
+<file path=ppt/slides/slide15.xml><?xml version="1.0" encoding="utf-8"?>
+<p:sld xmlns:a="http://schemas.openxmlformats.org/drawingml/2006/main" xmlns:p="http://schemas.openxmlformats.org/presentationml/2006/main" xmlns:r="http://schemas.openxmlformats.org/officeDocument/2006/relationships">
+  <p:cSld>
+    <p:spTree>
+      <p:nvGrpSpPr>
+        <p:cNvPr id="1" name=""/>
+        <p:cNvGrpSpPr/>
+        <p:nvPr/>
+      </p:nvGrpSpPr>
+      <p:grpSpPr/>
+      <p:sp>
+        <p:nvSpPr>
+          <p:cNvPr id="2" name="TextBox 1"/>
+          <p:cNvSpPr txBox="1"/>
+          <p:nvPr/>
+        </p:nvSpPr>
+        <p:spPr>
+          <a:xfrm>
+            <a:off x="731520" y="365760"/>
+            <a:ext cx="10728655" cy="868680"/>
+          </a:xfrm>
+          <a:prstGeom prst="rect">
+            <a:avLst/>
+          </a:prstGeom>
+          <a:noFill/>
+        </p:spPr>
+        <p:txBody>
+          <a:bodyPr wrap="square" lIns="0" tIns="0" rIns="0" bIns="0">
+            <a:spAutoFit/>
+          </a:bodyPr>
+          <a:lstStyle/>
+          <a:p>
+            <a:pPr>
+              <a:spcAft>
+                <a:spcPts val="200"/>
+              </a:spcAft>
+              <a:defRPr sz="1000" b="1">
+                <a:solidFill>
+                  <a:srgbClr val="0284C7"/>
+                </a:solidFill>
+                <a:latin typeface="Arial"/>
+              </a:defRPr>
+            </a:pPr>
+            <a:r>
+              <a:t>BCSE309L: CRYPTOGRAPHY &amp; NETWORK SECURITY | VIT CHENNAI</a:t>
+            </a:r>
+          </a:p>
+          <a:p>
+            <a:pPr>
+              <a:defRPr sz="2000" b="1">
+                <a:solidFill>
+                  <a:srgbClr val="0F172A"/>
+                </a:solidFill>
+                <a:latin typeface="Arial"/>
+              </a:defRPr>
+            </a:pPr>
+            <a:r>
+              <a:t>Conclusion &amp; Summary of Research Contributions</a:t>
+            </a:r>
+          </a:p>
+        </p:txBody>
+      </p:sp>
+      <p:sp>
+        <p:nvSpPr>
+          <p:cNvPr id="3" name="Rounded Rectangle 2"/>
           <p:cNvSpPr/>
           <p:nvPr/>
         </p:nvSpPr>
@@ -6770,7 +5500,7 @@
       </p:sp>
       <p:sp>
         <p:nvSpPr>
-          <p:cNvPr id="5" name="TextBox 4"/>
+          <p:cNvPr id="4" name="TextBox 3"/>
           <p:cNvSpPr txBox="1"/>
           <p:nvPr/>
         </p:nvSpPr>
@@ -6801,157 +5531,142 @@
               </a:defRPr>
             </a:pPr>
             <a:r>
-              <a:t>Summary of Key Research Achievements</a:t>
-            </a:r>
-          </a:p>
-          <a:p>
-            <a:pPr>
-              <a:spcAft>
-                <a:spcPts val="100"/>
-              </a:spcAft>
-              <a:defRPr b="1" sz="1200">
+              <a:t>Summary of Key Contributions</a:t>
+            </a:r>
+          </a:p>
+          <a:p>
+            <a:pPr>
+              <a:defRPr b="1" sz="1150">
                 <a:solidFill>
                   <a:srgbClr val="0F172A"/>
                 </a:solidFill>
               </a:defRPr>
             </a:pPr>
             <a:r>
-              <a:t>• 1. Resolved Section 8 Base Paper Research Gap: </a:t>
-            </a:r>
-          </a:p>
-          <a:p>
-            <a:pPr>
-              <a:spcAft>
-                <a:spcPts val="600"/>
-              </a:spcAft>
-              <a:defRPr sz="1150">
+              <a:t>• 1. Addressed Section 8 Base Paper Research Gap: </a:t>
+            </a:r>
+          </a:p>
+          <a:p>
+            <a:pPr>
+              <a:spcAft>
+                <a:spcPts val="500"/>
+              </a:spcAft>
+              <a:defRPr sz="1050">
                 <a:solidFill>
                   <a:srgbClr val="1E293B"/>
                 </a:solidFill>
               </a:defRPr>
             </a:pPr>
             <a:r>
-              <a:t>  Directly solved the fundamental limitation explicitly highlighted in Cheng et al. (Elsevier IoT 2026), providing the first fine-grained, file-level dynamic update protocol for BAMKS.</a:t>
-            </a:r>
-          </a:p>
-          <a:p>
-            <a:pPr>
-              <a:spcAft>
-                <a:spcPts val="100"/>
-              </a:spcAft>
-              <a:defRPr b="1" sz="1200">
+              <a:t>  Formulated an atomic file-level update mechanism for BAMKS, eliminating collection-wide re-keying bottlenecks.</a:t>
+            </a:r>
+          </a:p>
+          <a:p>
+            <a:pPr>
+              <a:defRPr b="1" sz="1150">
                 <a:solidFill>
                   <a:srgbClr val="0F172A"/>
                 </a:solidFill>
               </a:defRPr>
             </a:pPr>
             <a:r>
-              <a:t>• 2. Proven Algorithmic Speedup (3,610.7x): </a:t>
-            </a:r>
-          </a:p>
-          <a:p>
-            <a:pPr>
-              <a:spcAft>
-                <a:spcPts val="600"/>
-              </a:spcAft>
-              <a:defRPr sz="1150">
+              <a:t>• 2. Demonstrated Empirical Speedup (12.11x): </a:t>
+            </a:r>
+          </a:p>
+          <a:p>
+            <a:pPr>
+              <a:spcAft>
+                <a:spcPts val="500"/>
+              </a:spcAft>
+              <a:defRPr sz="1050">
                 <a:solidFill>
                   <a:srgbClr val="1E293B"/>
                 </a:solidFill>
               </a:defRPr>
             </a:pPr>
             <a:r>
-              <a:t>  Replaced prohibitive O(L x m) collection re-keying with atomic SingleDocAdd in O(m) time and SingleDocDelete in strict O(1) time, achieving a 3,610.7x speedup at L=5,000 records.</a:t>
-            </a:r>
-          </a:p>
-          <a:p>
-            <a:pPr>
-              <a:spcAft>
-                <a:spcPts val="100"/>
-              </a:spcAft>
-              <a:defRPr b="1" sz="1200">
+              <a:t>  SingleDocAdd runs in O(m) time (~0.67 ms at L=5,000), achieving a 12.11x speedup over Cheng et al. Section 5.10 index updates (and 3,527.7x over naive full re-encryption).</a:t>
+            </a:r>
+          </a:p>
+          <a:p>
+            <a:pPr>
+              <a:defRPr b="1" sz="1150">
                 <a:solidFill>
                   <a:srgbClr val="0F172A"/>
                 </a:solidFill>
               </a:defRPr>
             </a:pPr>
             <a:r>
-              <a:t>• 3. Mathematical EVM Opcode Gas Rigor: </a:t>
-            </a:r>
-          </a:p>
-          <a:p>
-            <a:pPr>
-              <a:spcAft>
-                <a:spcPts val="600"/>
-              </a:spcAft>
-              <a:defRPr sz="1150">
+              <a:t>• 3. On-Chain EVM Mapping Revocation (O(1)): </a:t>
+            </a:r>
+          </a:p>
+          <a:p>
+            <a:pPr>
+              <a:spcAft>
+                <a:spcPts val="500"/>
+              </a:spcAft>
+              <a:defRPr sz="1050">
                 <a:solidFill>
                   <a:srgbClr val="1E293B"/>
                 </a:solidFill>
               </a:defRPr>
             </a:pPr>
             <a:r>
-              <a:t>  Proved on-chain deletion consumes an invariant 42,100 gas with zero blockchain traversal (linear regression slope dTime/dN = +0.000012 us).</a:t>
-            </a:r>
-          </a:p>
-          <a:p>
-            <a:pPr>
-              <a:spcAft>
-                <a:spcPts val="100"/>
-              </a:spcAft>
-              <a:defRPr b="1" sz="1200">
+              <a:t>  Solidity deletedDocRegistry mapping executes in constant time via keccak256 slot calculation with zero array traversal.</a:t>
+            </a:r>
+          </a:p>
+          <a:p>
+            <a:pPr>
+              <a:defRPr b="1" sz="1150">
                 <a:solidFill>
                   <a:srgbClr val="0F172A"/>
                 </a:solidFill>
               </a:defRPr>
             </a:pPr>
             <a:r>
-              <a:t>• 4. Comprehensive Cryptographic Security: </a:t>
-            </a:r>
-          </a:p>
-          <a:p>
-            <a:pPr>
-              <a:spcAft>
-                <a:spcPts val="600"/>
-              </a:spcAft>
-              <a:defRPr sz="1150">
+              <a:t>• 4. Live Ethereum Sepolia Deployment: </a:t>
+            </a:r>
+          </a:p>
+          <a:p>
+            <a:pPr>
+              <a:spcAft>
+                <a:spcPts val="500"/>
+              </a:spcAft>
+              <a:defRPr sz="1050">
                 <a:solidFill>
                   <a:srgbClr val="1E293B"/>
                 </a:solidFill>
               </a:defRPr>
             </a:pPr>
             <a:r>
-              <a:t>  Empirically verified zero keyword leakage, strict CP-ABE attribute access control, and soundness across wrong trapdoors with 100% test pass rate.</a:t>
-            </a:r>
-          </a:p>
-          <a:p>
-            <a:pPr>
-              <a:spcAft>
-                <a:spcPts val="100"/>
-              </a:spcAft>
-              <a:defRPr b="1" sz="1200">
+              <a:t>  Smart contract deployed and verified on public Ethereum Sepolia Testnet (0xfDC8615Bf6483c3B0f39c330F55A56Cb0f08C8D3) with live mined transaction receipts.</a:t>
+            </a:r>
+          </a:p>
+          <a:p>
+            <a:pPr>
+              <a:defRPr b="1" sz="1150">
                 <a:solidFill>
                   <a:srgbClr val="0F172A"/>
                 </a:solidFill>
               </a:defRPr>
             </a:pPr>
             <a:r>
-              <a:t>• 5. Full Production Web3 Deployment: </a:t>
-            </a:r>
-          </a:p>
-          <a:p>
-            <a:pPr>
-              <a:spcAft>
-                <a:spcPts val="600"/>
-              </a:spcAft>
-              <a:defRPr sz="1150">
+              <a:t>• 5. Open-Source Reproducibility: </a:t>
+            </a:r>
+          </a:p>
+          <a:p>
+            <a:pPr>
+              <a:spcAft>
+                <a:spcPts val="500"/>
+              </a:spcAft>
+              <a:defRPr sz="1050">
                 <a:solidFill>
                   <a:srgbClr val="1E293B"/>
                 </a:solidFill>
               </a:defRPr>
             </a:pPr>
             <a:r>
-              <a:t>  Live smart contract verified on public Ethereum Sepolia Testnet with decentralized Pinata IPFS ciphertext storage and an interactive clinical dashboard.</a:t>
+              <a:t>  Complete source code, contracts, clinical dataset, and test scripts available at https://github.com/Prashant8991/BAMKS.git.</a:t>
             </a:r>
           </a:p>
         </p:txBody>
@@ -6964,7 +5679,7 @@
 </p:sld>
 </file>
 
-<file path=ppt/slides/slide17.xml><?xml version="1.0" encoding="utf-8"?>
+<file path=ppt/slides/slide16.xml><?xml version="1.0" encoding="utf-8"?>
 <p:sld xmlns:a="http://schemas.openxmlformats.org/drawingml/2006/main" xmlns:p="http://schemas.openxmlformats.org/presentationml/2006/main" xmlns:r="http://schemas.openxmlformats.org/officeDocument/2006/relationships">
   <p:cSld>
     <p:spTree>
@@ -7013,7 +5728,7 @@
           </a:p>
           <a:p>
             <a:pPr>
-              <a:defRPr sz="2200" b="1">
+              <a:defRPr sz="2000" b="1">
                 <a:solidFill>
                   <a:srgbClr val="0F172A"/>
                 </a:solidFill>
@@ -7028,52 +5743,7 @@
       </p:sp>
       <p:sp>
         <p:nvSpPr>
-          <p:cNvPr id="3" name="Rectangle 2"/>
-          <p:cNvSpPr/>
-          <p:nvPr/>
-        </p:nvSpPr>
-        <p:spPr>
-          <a:xfrm>
-            <a:off x="731520" y="1261872"/>
-            <a:ext cx="10728655" cy="36576"/>
-          </a:xfrm>
-          <a:prstGeom prst="rect">
-            <a:avLst/>
-          </a:prstGeom>
-          <a:solidFill>
-            <a:srgbClr val="0284C7"/>
-          </a:solidFill>
-          <a:ln>
-            <a:solidFill>
-              <a:srgbClr val="0284C7"/>
-            </a:solidFill>
-          </a:ln>
-        </p:spPr>
-        <p:style>
-          <a:lnRef idx="1">
-            <a:schemeClr val="accent1"/>
-          </a:lnRef>
-          <a:fillRef idx="3">
-            <a:schemeClr val="accent1"/>
-          </a:fillRef>
-          <a:effectRef idx="2">
-            <a:schemeClr val="accent1"/>
-          </a:effectRef>
-          <a:fontRef idx="minor">
-            <a:schemeClr val="lt1"/>
-          </a:fontRef>
-        </p:style>
-        <p:txBody>
-          <a:bodyPr rtlCol="0" anchor="ctr"/>
-          <a:lstStyle/>
-          <a:p>
-            <a:pPr algn="ctr"/>
-          </a:p>
-        </p:txBody>
-      </p:sp>
-      <p:sp>
-        <p:nvSpPr>
-          <p:cNvPr id="4" name="Rounded Rectangle 3"/>
+          <p:cNvPr id="3" name="Rounded Rectangle 2"/>
           <p:cNvSpPr/>
           <p:nvPr/>
         </p:nvSpPr>
@@ -7118,7 +5788,7 @@
       </p:sp>
       <p:sp>
         <p:nvSpPr>
-          <p:cNvPr id="5" name="TextBox 4"/>
+          <p:cNvPr id="4" name="TextBox 3"/>
           <p:cNvSpPr txBox="1"/>
           <p:nvPr/>
         </p:nvSpPr>
@@ -7149,30 +5819,30 @@
               </a:defRPr>
             </a:pPr>
             <a:r>
-              <a:t>Academic References &amp; Cited Literature</a:t>
-            </a:r>
-          </a:p>
-          <a:p>
-            <a:pPr>
-              <a:spcAft>
-                <a:spcPts val="800"/>
-              </a:spcAft>
-              <a:defRPr sz="1100" b="1">
+              <a:t>Key Academic References</a:t>
+            </a:r>
+          </a:p>
+          <a:p>
+            <a:pPr>
+              <a:spcAft>
+                <a:spcPts val="600"/>
+              </a:spcAft>
+              <a:defRPr sz="1000" b="1">
                 <a:solidFill>
                   <a:srgbClr val="1E3A8A"/>
                 </a:solidFill>
               </a:defRPr>
             </a:pPr>
             <a:r>
-              <a:t>[1] H. Cheng, S.-L. Lo, and J. Lu, 'Blockchain-assisted attribute-based multi-keyword search for dynamic encrypted data in cloud-edge-IoT,' Internet of Things, Elsevier, vol. 36, Art. no. 101838, Dec 2025/2026. DOI: 10.1016/j.iot.2025.101838. (BASE PAPER)</a:t>
-            </a:r>
-          </a:p>
-          <a:p>
-            <a:pPr>
-              <a:spcAft>
-                <a:spcPts val="800"/>
-              </a:spcAft>
-              <a:defRPr sz="1100">
+              <a:t>[1] H. Cheng, S.-L. Lo, and J. Lu, 'Blockchain-assisted attribute-based multi-keyword search for dynamic encrypted data in cloud-edge-IoT,' Internet of Things, Elsevier, vol. 36, Art. no. 101838, 2026. DOI: 10.1016/j.iot.2025.101838. (BASE PAPER)</a:t>
+            </a:r>
+          </a:p>
+          <a:p>
+            <a:pPr>
+              <a:spcAft>
+                <a:spcPts val="600"/>
+              </a:spcAft>
+              <a:defRPr sz="1000">
                 <a:solidFill>
                   <a:srgbClr val="1E293B"/>
                 </a:solidFill>
@@ -7185,9 +5855,9 @@
           <a:p>
             <a:pPr>
               <a:spcAft>
-                <a:spcPts val="800"/>
-              </a:spcAft>
-              <a:defRPr sz="1100">
+                <a:spcPts val="600"/>
+              </a:spcAft>
+              <a:defRPr sz="1000">
                 <a:solidFill>
                   <a:srgbClr val="1E293B"/>
                 </a:solidFill>
@@ -7200,9 +5870,9 @@
           <a:p>
             <a:pPr>
               <a:spcAft>
-                <a:spcPts val="800"/>
-              </a:spcAft>
-              <a:defRPr sz="1100">
+                <a:spcPts val="600"/>
+              </a:spcAft>
+              <a:defRPr sz="1000">
                 <a:solidFill>
                   <a:srgbClr val="1E293B"/>
                 </a:solidFill>
@@ -7215,9 +5885,9 @@
           <a:p>
             <a:pPr>
               <a:spcAft>
-                <a:spcPts val="800"/>
-              </a:spcAft>
-              <a:defRPr sz="1100">
+                <a:spcPts val="600"/>
+              </a:spcAft>
+              <a:defRPr sz="1000">
                 <a:solidFill>
                   <a:srgbClr val="1E293B"/>
                 </a:solidFill>
@@ -7230,9 +5900,9 @@
           <a:p>
             <a:pPr>
               <a:spcAft>
-                <a:spcPts val="800"/>
-              </a:spcAft>
-              <a:defRPr sz="1100">
+                <a:spcPts val="600"/>
+              </a:spcAft>
+              <a:defRPr sz="1000">
                 <a:solidFill>
                   <a:srgbClr val="1E293B"/>
                 </a:solidFill>
@@ -7240,6 +5910,21 @@
             </a:pPr>
             <a:r>
               <a:t>[6] J. Benet, 'IPFS - Content Addressed, Versioned, P2P File System,' Draft 3, Protocol Labs, 2014.</a:t>
+            </a:r>
+          </a:p>
+          <a:p>
+            <a:pPr>
+              <a:spcAft>
+                <a:spcPts val="600"/>
+              </a:spcAft>
+              <a:defRPr sz="1000">
+                <a:solidFill>
+                  <a:srgbClr val="1E293B"/>
+                </a:solidFill>
+              </a:defRPr>
+            </a:pPr>
+            <a:r>
+              <a:t>[7] R. Bost, 'Sigma o phi o varsigma: Forward secure searchable encryption,' in ACM CCS 2016, pp. 1143–1154.</a:t>
             </a:r>
           </a:p>
         </p:txBody>
@@ -7301,7 +5986,7 @@
           </a:p>
           <a:p>
             <a:pPr>
-              <a:defRPr sz="2200" b="1">
+              <a:defRPr sz="2000" b="1">
                 <a:solidFill>
                   <a:srgbClr val="0F172A"/>
                 </a:solidFill>
@@ -7309,66 +5994,21 @@
               </a:defRPr>
             </a:pPr>
             <a:r>
-              <a:t>Research Motivation: The Encrypted Healthcare IoT Dilemma</a:t>
-            </a:r>
-          </a:p>
-        </p:txBody>
-      </p:sp>
-      <p:sp>
-        <p:nvSpPr>
-          <p:cNvPr id="3" name="Rectangle 2"/>
-          <p:cNvSpPr/>
-          <p:nvPr/>
-        </p:nvSpPr>
-        <p:spPr>
-          <a:xfrm>
-            <a:off x="731520" y="1261872"/>
-            <a:ext cx="10728655" cy="36576"/>
-          </a:xfrm>
-          <a:prstGeom prst="rect">
-            <a:avLst/>
-          </a:prstGeom>
-          <a:solidFill>
-            <a:srgbClr val="0284C7"/>
-          </a:solidFill>
-          <a:ln>
-            <a:solidFill>
-              <a:srgbClr val="0284C7"/>
-            </a:solidFill>
-          </a:ln>
-        </p:spPr>
-        <p:style>
-          <a:lnRef idx="1">
-            <a:schemeClr val="accent1"/>
-          </a:lnRef>
-          <a:fillRef idx="3">
-            <a:schemeClr val="accent1"/>
-          </a:fillRef>
-          <a:effectRef idx="2">
-            <a:schemeClr val="accent1"/>
-          </a:effectRef>
-          <a:fontRef idx="minor">
-            <a:schemeClr val="lt1"/>
-          </a:fontRef>
-        </p:style>
-        <p:txBody>
-          <a:bodyPr rtlCol="0" anchor="ctr"/>
-          <a:lstStyle/>
-          <a:p>
-            <a:pPr algn="ctr"/>
-          </a:p>
-        </p:txBody>
-      </p:sp>
-      <p:sp>
-        <p:nvSpPr>
-          <p:cNvPr id="4" name="Rounded Rectangle 3"/>
+              <a:t>Research Context: Healthcare IoT &amp; Encrypted Search</a:t>
+            </a:r>
+          </a:p>
+        </p:txBody>
+      </p:sp>
+      <p:sp>
+        <p:nvSpPr>
+          <p:cNvPr id="3" name="Rounded Rectangle 2"/>
           <p:cNvSpPr/>
           <p:nvPr/>
         </p:nvSpPr>
         <p:spPr>
           <a:xfrm>
             <a:off x="731520" y="1463040"/>
-            <a:ext cx="5212080" cy="4846320"/>
+            <a:ext cx="3383280" cy="4846320"/>
           </a:xfrm>
           <a:prstGeom prst="roundRect">
             <a:avLst/>
@@ -7406,14 +6046,14 @@
       </p:sp>
       <p:sp>
         <p:nvSpPr>
-          <p:cNvPr id="5" name="TextBox 4"/>
+          <p:cNvPr id="4" name="TextBox 3"/>
           <p:cNvSpPr txBox="1"/>
           <p:nvPr/>
         </p:nvSpPr>
         <p:spPr>
           <a:xfrm>
             <a:off x="914400" y="1645920"/>
-            <a:ext cx="4846320" cy="4480560"/>
+            <a:ext cx="3017520" cy="4480560"/>
           </a:xfrm>
           <a:prstGeom prst="rect">
             <a:avLst/>
@@ -7430,148 +6070,48 @@
               <a:spcAft>
                 <a:spcPts val="1000"/>
               </a:spcAft>
-              <a:defRPr b="1" sz="1600">
+              <a:defRPr b="1" sz="1500">
                 <a:solidFill>
                   <a:srgbClr val="1E3A8A"/>
                 </a:solidFill>
               </a:defRPr>
             </a:pPr>
             <a:r>
-              <a:t>The Healthcare IoT Outsourcing Paradox</a:t>
-            </a:r>
-          </a:p>
-          <a:p>
-            <a:pPr>
-              <a:spcAft>
-                <a:spcPts val="200"/>
-              </a:spcAft>
-              <a:defRPr b="1" sz="1200">
-                <a:solidFill>
-                  <a:srgbClr val="0F172A"/>
-                </a:solidFill>
-              </a:defRPr>
-            </a:pPr>
-            <a:r>
-              <a:t>• Massive Cloud Outsourcing: </a:t>
-            </a:r>
-          </a:p>
-          <a:p>
-            <a:pPr>
-              <a:spcAft>
-                <a:spcPts val="800"/>
-              </a:spcAft>
-              <a:defRPr sz="1100">
+              <a:t>Cloud-Edge Healthcare IoT</a:t>
+            </a:r>
+          </a:p>
+          <a:p>
+            <a:pPr>
+              <a:defRPr sz="1150">
                 <a:solidFill>
                   <a:srgbClr val="1E293B"/>
                 </a:solidFill>
               </a:defRPr>
             </a:pPr>
             <a:r>
-              <a:t>  Modern hospitals outsource millions of Electronic Health Records (EHRs), 12-lead ECG telemetry, and MRI scans to cloud-edge storage to cut costs.</a:t>
-            </a:r>
-          </a:p>
-          <a:p>
-            <a:pPr>
-              <a:spcAft>
-                <a:spcPts val="200"/>
-              </a:spcAft>
-              <a:defRPr b="1" sz="1200">
-                <a:solidFill>
-                  <a:srgbClr val="0F172A"/>
-                </a:solidFill>
-              </a:defRPr>
-            </a:pPr>
-            <a:r>
-              <a:t>• Strict Regulatory Privacy: </a:t>
-            </a:r>
-          </a:p>
-          <a:p>
-            <a:pPr>
-              <a:spcAft>
-                <a:spcPts val="800"/>
-              </a:spcAft>
-              <a:defRPr sz="1100">
-                <a:solidFill>
-                  <a:srgbClr val="1E293B"/>
-                </a:solidFill>
-              </a:defRPr>
-            </a:pPr>
-            <a:r>
-              <a:t>  HIPAA and GDPR legally require end-to-end encryption. Unencrypted patient diagnoses (e.g. oncology biopsies, HIV status) result in severe penalties.</a:t>
-            </a:r>
-          </a:p>
-          <a:p>
-            <a:pPr>
-              <a:spcAft>
-                <a:spcPts val="200"/>
-              </a:spcAft>
-              <a:defRPr b="1" sz="1200">
-                <a:solidFill>
-                  <a:srgbClr val="0F172A"/>
-                </a:solidFill>
-              </a:defRPr>
-            </a:pPr>
-            <a:r>
-              <a:t>• The Searchability Barrier: </a:t>
-            </a:r>
-          </a:p>
-          <a:p>
-            <a:pPr>
-              <a:spcAft>
-                <a:spcPts val="800"/>
-              </a:spcAft>
-              <a:defRPr sz="1100">
-                <a:solidFill>
-                  <a:srgbClr val="1E293B"/>
-                </a:solidFill>
-              </a:defRPr>
-            </a:pPr>
-            <a:r>
-              <a:t>  Standard symmetric encryption (AES-256) turns records into opaque ciphertext. Clinicians cannot search for 'Cardiology AND ECG' without decrypting everything.</a:t>
-            </a:r>
-          </a:p>
-          <a:p>
-            <a:pPr>
-              <a:spcAft>
-                <a:spcPts val="200"/>
-              </a:spcAft>
-              <a:defRPr b="1" sz="1200">
-                <a:solidFill>
-                  <a:srgbClr val="0F172A"/>
-                </a:solidFill>
-              </a:defRPr>
-            </a:pPr>
-            <a:r>
-              <a:t>• Untrusted Cloud Servers (CSPs): </a:t>
-            </a:r>
-          </a:p>
-          <a:p>
-            <a:pPr>
-              <a:spcAft>
-                <a:spcPts val="800"/>
-              </a:spcAft>
-              <a:defRPr sz="1100">
-                <a:solidFill>
-                  <a:srgbClr val="1E293B"/>
-                </a:solidFill>
-              </a:defRPr>
-            </a:pPr>
-            <a:r>
-              <a:t>  CSPs are honest-but-curious: they attempt to infer clinical diagnoses from access patterns and may return stale or incomplete results to save computation.</a:t>
-            </a:r>
-          </a:p>
-        </p:txBody>
-      </p:sp>
-      <p:sp>
-        <p:nvSpPr>
-          <p:cNvPr id="6" name="Rounded Rectangle 5"/>
+              <a:t>• IoMT telemetry (ECG, vitals, MRI scans) requires secure cloud archiving.</a:t>
+            </a:r>
+            <a:br/>
+            <a:r>
+              <a:t>• Regulatory compliance (HIPAA, GDPR) mandates end-to-end encryption.</a:t>
+            </a:r>
+            <a:br/>
+            <a:r>
+              <a:t>• Challenge: Cloud servers must enable search without learning plaintexts.</a:t>
+            </a:r>
+          </a:p>
+        </p:txBody>
+      </p:sp>
+      <p:sp>
+        <p:nvSpPr>
+          <p:cNvPr id="5" name="Rounded Rectangle 4"/>
           <p:cNvSpPr/>
           <p:nvPr/>
         </p:nvSpPr>
         <p:spPr>
           <a:xfrm>
-            <a:off x="6217920" y="1463040"/>
-            <a:ext cx="5212080" cy="4846320"/>
+            <a:off x="4389120" y="1463040"/>
+            <a:ext cx="3383280" cy="4846320"/>
           </a:xfrm>
           <a:prstGeom prst="roundRect">
             <a:avLst/>
@@ -7580,279 +6120,6 @@
             <a:srgbClr val="F8FAFC"/>
           </a:solidFill>
           <a:ln w="15240">
-            <a:solidFill>
-              <a:srgbClr val="CBD5E1"/>
-            </a:solidFill>
-          </a:ln>
-        </p:spPr>
-        <p:style>
-          <a:lnRef idx="1">
-            <a:schemeClr val="accent1"/>
-          </a:lnRef>
-          <a:fillRef idx="3">
-            <a:schemeClr val="accent1"/>
-          </a:fillRef>
-          <a:effectRef idx="2">
-            <a:schemeClr val="accent1"/>
-          </a:effectRef>
-          <a:fontRef idx="minor">
-            <a:schemeClr val="lt1"/>
-          </a:fontRef>
-        </p:style>
-        <p:txBody>
-          <a:bodyPr rtlCol="0" anchor="ctr"/>
-          <a:lstStyle/>
-          <a:p>
-            <a:pPr algn="ctr"/>
-          </a:p>
-        </p:txBody>
-      </p:sp>
-      <p:sp>
-        <p:nvSpPr>
-          <p:cNvPr id="7" name="TextBox 6"/>
-          <p:cNvSpPr txBox="1"/>
-          <p:nvPr/>
-        </p:nvSpPr>
-        <p:spPr>
-          <a:xfrm>
-            <a:off x="6400800" y="1645920"/>
-            <a:ext cx="4846320" cy="4480560"/>
-          </a:xfrm>
-          <a:prstGeom prst="rect">
-            <a:avLst/>
-          </a:prstGeom>
-          <a:noFill/>
-        </p:spPr>
-        <p:txBody>
-          <a:bodyPr wrap="square">
-            <a:spAutoFit/>
-          </a:bodyPr>
-          <a:lstStyle/>
-          <a:p>
-            <a:pPr>
-              <a:spcAft>
-                <a:spcPts val="1000"/>
-              </a:spcAft>
-              <a:defRPr b="1" sz="1600">
-                <a:solidFill>
-                  <a:srgbClr val="1E3A8A"/>
-                </a:solidFill>
-              </a:defRPr>
-            </a:pPr>
-            <a:r>
-              <a:t>Limitations of Prior State-of-the-Art</a:t>
-            </a:r>
-          </a:p>
-          <a:p>
-            <a:pPr>
-              <a:spcAft>
-                <a:spcPts val="200"/>
-              </a:spcAft>
-              <a:defRPr b="1" sz="1200">
-                <a:solidFill>
-                  <a:srgbClr val="0F172A"/>
-                </a:solidFill>
-              </a:defRPr>
-            </a:pPr>
-            <a:r>
-              <a:t>• Traditional PEKS (Boneh et al.): </a:t>
-            </a:r>
-          </a:p>
-          <a:p>
-            <a:pPr>
-              <a:spcAft>
-                <a:spcPts val="800"/>
-              </a:spcAft>
-              <a:defRPr sz="1100">
-                <a:solidFill>
-                  <a:srgbClr val="1E293B"/>
-                </a:solidFill>
-              </a:defRPr>
-            </a:pPr>
-            <a:r>
-              <a:t>  Supports only single-keyword queries. Searching multi-field EHRs creates massive false-positive sets and leaks keyword frequency.</a:t>
-            </a:r>
-          </a:p>
-          <a:p>
-            <a:pPr>
-              <a:spcAft>
-                <a:spcPts val="200"/>
-              </a:spcAft>
-              <a:defRPr b="1" sz="1200">
-                <a:solidFill>
-                  <a:srgbClr val="0F172A"/>
-                </a:solidFill>
-              </a:defRPr>
-            </a:pPr>
-            <a:r>
-              <a:t>• Standard CP-ABE (Bethencourt et al.): </a:t>
-            </a:r>
-          </a:p>
-          <a:p>
-            <a:pPr>
-              <a:spcAft>
-                <a:spcPts val="800"/>
-              </a:spcAft>
-              <a:defRPr sz="1100">
-                <a:solidFill>
-                  <a:srgbClr val="1E293B"/>
-                </a:solidFill>
-              </a:defRPr>
-            </a:pPr>
-            <a:r>
-              <a:t>  Provides fine-grained access trees, but possesses zero keyword searchability. Encrypted data remains unsearchable in the cloud.</a:t>
-            </a:r>
-          </a:p>
-          <a:p>
-            <a:pPr>
-              <a:spcAft>
-                <a:spcPts val="200"/>
-              </a:spcAft>
-              <a:defRPr b="1" sz="1200">
-                <a:solidFill>
-                  <a:srgbClr val="0F172A"/>
-                </a:solidFill>
-              </a:defRPr>
-            </a:pPr>
-            <a:r>
-              <a:t>• Centralized Result Verification: </a:t>
-            </a:r>
-          </a:p>
-          <a:p>
-            <a:pPr>
-              <a:spcAft>
-                <a:spcPts val="800"/>
-              </a:spcAft>
-              <a:defRPr sz="1100">
-                <a:solidFill>
-                  <a:srgbClr val="1E293B"/>
-                </a:solidFill>
-              </a:defRPr>
-            </a:pPr>
-            <a:r>
-              <a:t>  Relies on a single trusted third party or KGC to verify search outcomes, creating a single point of failure and vulnerability to collusive attacks.</a:t>
-            </a:r>
-          </a:p>
-          <a:p>
-            <a:pPr>
-              <a:spcAft>
-                <a:spcPts val="200"/>
-              </a:spcAft>
-              <a:defRPr b="1" sz="1200">
-                <a:solidFill>
-                  <a:srgbClr val="0F172A"/>
-                </a:solidFill>
-              </a:defRPr>
-            </a:pPr>
-            <a:r>
-              <a:t>• Static Dataset Assumption: </a:t>
-            </a:r>
-          </a:p>
-          <a:p>
-            <a:pPr>
-              <a:spcAft>
-                <a:spcPts val="800"/>
-              </a:spcAft>
-              <a:defRPr sz="1100">
-                <a:solidFill>
-                  <a:srgbClr val="1E293B"/>
-                </a:solidFill>
-              </a:defRPr>
-            </a:pPr>
-            <a:r>
-              <a:t>  Existing searchable encryption models assume static datasets. They completely fail when patient telemetry arrives in real-time streams.</a:t>
-            </a:r>
-          </a:p>
-        </p:txBody>
-      </p:sp>
-    </p:spTree>
-  </p:cSld>
-  <p:clrMapOvr>
-    <a:masterClrMapping/>
-  </p:clrMapOvr>
-</p:sld>
-</file>
-
-<file path=ppt/slides/slide3.xml><?xml version="1.0" encoding="utf-8"?>
-<p:sld xmlns:a="http://schemas.openxmlformats.org/drawingml/2006/main" xmlns:p="http://schemas.openxmlformats.org/presentationml/2006/main" xmlns:r="http://schemas.openxmlformats.org/officeDocument/2006/relationships">
-  <p:cSld>
-    <p:spTree>
-      <p:nvGrpSpPr>
-        <p:cNvPr id="1" name=""/>
-        <p:cNvGrpSpPr/>
-        <p:nvPr/>
-      </p:nvGrpSpPr>
-      <p:grpSpPr/>
-      <p:sp>
-        <p:nvSpPr>
-          <p:cNvPr id="2" name="TextBox 1"/>
-          <p:cNvSpPr txBox="1"/>
-          <p:nvPr/>
-        </p:nvSpPr>
-        <p:spPr>
-          <a:xfrm>
-            <a:off x="731520" y="365760"/>
-            <a:ext cx="10728655" cy="868680"/>
-          </a:xfrm>
-          <a:prstGeom prst="rect">
-            <a:avLst/>
-          </a:prstGeom>
-          <a:noFill/>
-        </p:spPr>
-        <p:txBody>
-          <a:bodyPr wrap="square" lIns="0" tIns="0" rIns="0" bIns="0">
-            <a:spAutoFit/>
-          </a:bodyPr>
-          <a:lstStyle/>
-          <a:p>
-            <a:pPr>
-              <a:spcAft>
-                <a:spcPts val="200"/>
-              </a:spcAft>
-              <a:defRPr sz="1000" b="1">
-                <a:solidFill>
-                  <a:srgbClr val="0284C7"/>
-                </a:solidFill>
-                <a:latin typeface="Arial"/>
-              </a:defRPr>
-            </a:pPr>
-            <a:r>
-              <a:t>BCSE309L: CRYPTOGRAPHY &amp; NETWORK SECURITY | VIT CHENNAI</a:t>
-            </a:r>
-          </a:p>
-          <a:p>
-            <a:pPr>
-              <a:defRPr sz="2200" b="1">
-                <a:solidFill>
-                  <a:srgbClr val="0F172A"/>
-                </a:solidFill>
-                <a:latin typeface="Arial"/>
-              </a:defRPr>
-            </a:pPr>
-            <a:r>
-              <a:t>Base Research Paper Analysis &amp; The Critical Research Gap</a:t>
-            </a:r>
-          </a:p>
-        </p:txBody>
-      </p:sp>
-      <p:sp>
-        <p:nvSpPr>
-          <p:cNvPr id="3" name="Rectangle 2"/>
-          <p:cNvSpPr/>
-          <p:nvPr/>
-        </p:nvSpPr>
-        <p:spPr>
-          <a:xfrm>
-            <a:off x="731520" y="1261872"/>
-            <a:ext cx="10728655" cy="36576"/>
-          </a:xfrm>
-          <a:prstGeom prst="rect">
-            <a:avLst/>
-          </a:prstGeom>
-          <a:solidFill>
-            <a:srgbClr val="0284C7"/>
-          </a:solidFill>
-          <a:ln>
             <a:solidFill>
               <a:srgbClr val="0284C7"/>
             </a:solidFill>
@@ -7882,24 +6149,82 @@
       </p:sp>
       <p:sp>
         <p:nvSpPr>
-          <p:cNvPr id="4" name="Rounded Rectangle 3"/>
+          <p:cNvPr id="6" name="TextBox 5"/>
+          <p:cNvSpPr txBox="1"/>
+          <p:nvPr/>
+        </p:nvSpPr>
+        <p:spPr>
+          <a:xfrm>
+            <a:off x="4572000" y="1645920"/>
+            <a:ext cx="3017520" cy="4480560"/>
+          </a:xfrm>
+          <a:prstGeom prst="rect">
+            <a:avLst/>
+          </a:prstGeom>
+          <a:noFill/>
+        </p:spPr>
+        <p:txBody>
+          <a:bodyPr wrap="square">
+            <a:spAutoFit/>
+          </a:bodyPr>
+          <a:lstStyle/>
+          <a:p>
+            <a:pPr>
+              <a:spcAft>
+                <a:spcPts val="1000"/>
+              </a:spcAft>
+              <a:defRPr b="1" sz="1500">
+                <a:solidFill>
+                  <a:srgbClr val="0284C7"/>
+                </a:solidFill>
+              </a:defRPr>
+            </a:pPr>
+            <a:r>
+              <a:t>Attribute-Based Keyword Search</a:t>
+            </a:r>
+          </a:p>
+          <a:p>
+            <a:pPr>
+              <a:defRPr sz="1150">
+                <a:solidFill>
+                  <a:srgbClr val="1E293B"/>
+                </a:solidFill>
+              </a:defRPr>
+            </a:pPr>
+            <a:r>
+              <a:t>• CP-ABE embeds access policies directly inside ciphertexts.</a:t>
+            </a:r>
+            <a:br/>
+            <a:r>
+              <a:t>• Clinicians decrypt only if their credentials satisfy access policies.</a:t>
+            </a:r>
+            <a:br/>
+            <a:r>
+              <a:t>• Conjunctive multi-keyword trapdoors enable multi-attribute diagnosis queries.</a:t>
+            </a:r>
+          </a:p>
+        </p:txBody>
+      </p:sp>
+      <p:sp>
+        <p:nvSpPr>
+          <p:cNvPr id="7" name="Rounded Rectangle 6"/>
           <p:cNvSpPr/>
           <p:nvPr/>
         </p:nvSpPr>
         <p:spPr>
           <a:xfrm>
-            <a:off x="731520" y="1371600"/>
-            <a:ext cx="10728655" cy="1097280"/>
+            <a:off x="8046720" y="1463040"/>
+            <a:ext cx="3383280" cy="4846320"/>
           </a:xfrm>
           <a:prstGeom prst="roundRect">
             <a:avLst/>
           </a:prstGeom>
           <a:solidFill>
-            <a:srgbClr val="EEF2FF"/>
+            <a:srgbClr val="F8FAFC"/>
           </a:solidFill>
           <a:ln w="15240">
             <a:solidFill>
-              <a:srgbClr val="1E3A8A"/>
+              <a:srgbClr val="16A34A"/>
             </a:solidFill>
           </a:ln>
         </p:spPr>
@@ -7927,14 +6252,14 @@
       </p:sp>
       <p:sp>
         <p:nvSpPr>
-          <p:cNvPr id="5" name="TextBox 4"/>
+          <p:cNvPr id="8" name="TextBox 7"/>
           <p:cNvSpPr txBox="1"/>
           <p:nvPr/>
         </p:nvSpPr>
         <p:spPr>
           <a:xfrm>
-            <a:off x="914400" y="1417320"/>
-            <a:ext cx="10362895" cy="1005840"/>
+            <a:off x="8229600" y="1645920"/>
+            <a:ext cx="3017520" cy="4480560"/>
           </a:xfrm>
           <a:prstGeom prst="rect">
             <a:avLst/>
@@ -7948,85 +6273,69 @@
           <a:lstStyle/>
           <a:p>
             <a:pPr>
-              <a:defRPr b="1" sz="1100">
-                <a:solidFill>
-                  <a:srgbClr val="1E3A8A"/>
-                </a:solidFill>
-              </a:defRPr>
-            </a:pPr>
-            <a:r>
-              <a:t>IDENTIFICATION OF BASE PAPER (ELSEVIER 2026):</a:t>
-            </a:r>
-          </a:p>
-          <a:p>
-            <a:pPr>
-              <a:defRPr sz="1150" b="1">
-                <a:solidFill>
-                  <a:srgbClr val="0F172A"/>
-                </a:solidFill>
-              </a:defRPr>
-            </a:pPr>
-            <a:r>
-              <a:t>Hanlei Cheng, Sio-Long Lo, Jing Lu, 'Blockchain-assisted attribute-based multi-keyword search for dynamic encrypted data in cloud-edge-IoT', Internet of Things (Elsevier), Vol. 36, Art. 101838, Dec 2025/2026. DOI: 10.1016/j.iot.2025.101838</a:t>
-            </a:r>
-          </a:p>
-        </p:txBody>
-      </p:sp>
-      <p:sp>
-        <p:nvSpPr>
-          <p:cNvPr id="6" name="Rounded Rectangle 5"/>
-          <p:cNvSpPr/>
+              <a:spcAft>
+                <a:spcPts val="1000"/>
+              </a:spcAft>
+              <a:defRPr b="1" sz="1500">
+                <a:solidFill>
+                  <a:srgbClr val="16A34A"/>
+                </a:solidFill>
+              </a:defRPr>
+            </a:pPr>
+            <a:r>
+              <a:t>Blockchain Result Verifiability</a:t>
+            </a:r>
+          </a:p>
+          <a:p>
+            <a:pPr>
+              <a:defRPr sz="1150">
+                <a:solidFill>
+                  <a:srgbClr val="1E293B"/>
+                </a:solidFill>
+              </a:defRPr>
+            </a:pPr>
+            <a:r>
+              <a:t>• Dishonest CSPs may return incomplete or stale search results.</a:t>
+            </a:r>
+            <a:br/>
+            <a:r>
+              <a:t>• Smart contracts verify aggregated Schnorr NIZK proofs.</a:t>
+            </a:r>
+            <a:br/>
+            <a:r>
+              <a:t>• Ethereum acts as an immutable arbiter enforcing state integrity.</a:t>
+            </a:r>
+          </a:p>
+        </p:txBody>
+      </p:sp>
+    </p:spTree>
+  </p:cSld>
+  <p:clrMapOvr>
+    <a:masterClrMapping/>
+  </p:clrMapOvr>
+</p:sld>
+</file>
+
+<file path=ppt/slides/slide3.xml><?xml version="1.0" encoding="utf-8"?>
+<p:sld xmlns:a="http://schemas.openxmlformats.org/drawingml/2006/main" xmlns:p="http://schemas.openxmlformats.org/presentationml/2006/main" xmlns:r="http://schemas.openxmlformats.org/officeDocument/2006/relationships">
+  <p:cSld>
+    <p:spTree>
+      <p:nvGrpSpPr>
+        <p:cNvPr id="1" name=""/>
+        <p:cNvGrpSpPr/>
+        <p:nvPr/>
+      </p:nvGrpSpPr>
+      <p:grpSpPr/>
+      <p:sp>
+        <p:nvSpPr>
+          <p:cNvPr id="2" name="TextBox 1"/>
+          <p:cNvSpPr txBox="1"/>
           <p:nvPr/>
         </p:nvSpPr>
         <p:spPr>
           <a:xfrm>
-            <a:off x="731520" y="2651760"/>
-            <a:ext cx="5212080" cy="3749039"/>
-          </a:xfrm>
-          <a:prstGeom prst="roundRect">
-            <a:avLst/>
-          </a:prstGeom>
-          <a:solidFill>
-            <a:srgbClr val="F8FAFC"/>
-          </a:solidFill>
-          <a:ln w="15240">
-            <a:solidFill>
-              <a:srgbClr val="CBD5E1"/>
-            </a:solidFill>
-          </a:ln>
-        </p:spPr>
-        <p:style>
-          <a:lnRef idx="1">
-            <a:schemeClr val="accent1"/>
-          </a:lnRef>
-          <a:fillRef idx="3">
-            <a:schemeClr val="accent1"/>
-          </a:fillRef>
-          <a:effectRef idx="2">
-            <a:schemeClr val="accent1"/>
-          </a:effectRef>
-          <a:fontRef idx="minor">
-            <a:schemeClr val="lt1"/>
-          </a:fontRef>
-        </p:style>
-        <p:txBody>
-          <a:bodyPr rtlCol="0" anchor="ctr"/>
-          <a:lstStyle/>
-          <a:p>
-            <a:pPr algn="ctr"/>
-          </a:p>
-        </p:txBody>
-      </p:sp>
-      <p:sp>
-        <p:nvSpPr>
-          <p:cNvPr id="7" name="TextBox 6"/>
-          <p:cNvSpPr txBox="1"/>
-          <p:nvPr/>
-        </p:nvSpPr>
-        <p:spPr>
-          <a:xfrm>
-            <a:off x="914400" y="2788920"/>
-            <a:ext cx="4846320" cy="3474720"/>
+            <a:off x="731520" y="365760"/>
+            <a:ext cx="10728655" cy="868680"/>
           </a:xfrm>
           <a:prstGeom prst="rect">
             <a:avLst/>
@@ -8034,97 +6343,51 @@
           <a:noFill/>
         </p:spPr>
         <p:txBody>
-          <a:bodyPr wrap="square">
+          <a:bodyPr wrap="square" lIns="0" tIns="0" rIns="0" bIns="0">
             <a:spAutoFit/>
           </a:bodyPr>
           <a:lstStyle/>
           <a:p>
             <a:pPr>
               <a:spcAft>
-                <a:spcPts val="800"/>
-              </a:spcAft>
-              <a:defRPr b="1" sz="1500">
-                <a:solidFill>
-                  <a:srgbClr val="16A34A"/>
-                </a:solidFill>
-              </a:defRPr>
-            </a:pPr>
-            <a:r>
-              <a:t>Merits of the Base BAMKS Scheme</a:t>
-            </a:r>
-          </a:p>
-          <a:p>
-            <a:pPr>
-              <a:spcAft>
-                <a:spcPts val="600"/>
-              </a:spcAft>
-              <a:defRPr sz="1150">
-                <a:solidFill>
-                  <a:srgbClr val="1E293B"/>
-                </a:solidFill>
-              </a:defRPr>
-            </a:pPr>
-            <a:r>
-              <a:t>✓ Unifies CP-ABE access policies with multi-keyword conjunctive search.</a:t>
-            </a:r>
-          </a:p>
-          <a:p>
-            <a:pPr>
-              <a:spcAft>
-                <a:spcPts val="600"/>
-              </a:spcAft>
-              <a:defRPr sz="1150">
-                <a:solidFill>
-                  <a:srgbClr val="1E293B"/>
-                </a:solidFill>
-              </a:defRPr>
-            </a:pPr>
-            <a:r>
-              <a:t>✓ Introduces multi-owner collaborative access tokens (Phi) for fine-grained sharing.</a:t>
-            </a:r>
-          </a:p>
-          <a:p>
-            <a:pPr>
-              <a:spcAft>
-                <a:spcPts val="600"/>
-              </a:spcAft>
-              <a:defRPr sz="1150">
-                <a:solidFill>
-                  <a:srgbClr val="1E293B"/>
-                </a:solidFill>
-              </a:defRPr>
-            </a:pPr>
-            <a:r>
-              <a:t>✓ Implements a Result Verification Smart Contract (RVSC) for on-chain integrity.</a:t>
-            </a:r>
-          </a:p>
-          <a:p>
-            <a:pPr>
-              <a:spcAft>
-                <a:spcPts val="600"/>
-              </a:spcAft>
-              <a:defRPr sz="1150">
-                <a:solidFill>
-                  <a:srgbClr val="1E293B"/>
-                </a:solidFill>
-              </a:defRPr>
-            </a:pPr>
-            <a:r>
-              <a:t>✓ Generates Schnorr NIZK proofs off-chain to detect malicious cloud tampering.</a:t>
-            </a:r>
-          </a:p>
-        </p:txBody>
-      </p:sp>
-      <p:sp>
-        <p:nvSpPr>
-          <p:cNvPr id="8" name="Rounded Rectangle 7"/>
+                <a:spcPts val="200"/>
+              </a:spcAft>
+              <a:defRPr sz="1000" b="1">
+                <a:solidFill>
+                  <a:srgbClr val="0284C7"/>
+                </a:solidFill>
+                <a:latin typeface="Arial"/>
+              </a:defRPr>
+            </a:pPr>
+            <a:r>
+              <a:t>BCSE309L: CRYPTOGRAPHY &amp; NETWORK SECURITY | VIT CHENNAI</a:t>
+            </a:r>
+          </a:p>
+          <a:p>
+            <a:pPr>
+              <a:defRPr sz="2000" b="1">
+                <a:solidFill>
+                  <a:srgbClr val="0F172A"/>
+                </a:solidFill>
+                <a:latin typeface="Arial"/>
+              </a:defRPr>
+            </a:pPr>
+            <a:r>
+              <a:t>Research Gap: The Open Challenge in Cheng et al. (Section 8)</a:t>
+            </a:r>
+          </a:p>
+        </p:txBody>
+      </p:sp>
+      <p:sp>
+        <p:nvSpPr>
+          <p:cNvPr id="3" name="Rounded Rectangle 2"/>
           <p:cNvSpPr/>
           <p:nvPr/>
         </p:nvSpPr>
         <p:spPr>
           <a:xfrm>
-            <a:off x="6217920" y="2651760"/>
-            <a:ext cx="5212080" cy="3749039"/>
+            <a:off x="731520" y="1463040"/>
+            <a:ext cx="5212080" cy="4846320"/>
           </a:xfrm>
           <a:prstGeom prst="roundRect">
             <a:avLst/>
@@ -8162,14 +6425,14 @@
       </p:sp>
       <p:sp>
         <p:nvSpPr>
-          <p:cNvPr id="9" name="TextBox 8"/>
+          <p:cNvPr id="4" name="TextBox 3"/>
           <p:cNvSpPr txBox="1"/>
           <p:nvPr/>
         </p:nvSpPr>
         <p:spPr>
           <a:xfrm>
-            <a:off x="6400800" y="2788920"/>
-            <a:ext cx="4846320" cy="3474720"/>
+            <a:off x="914400" y="1645920"/>
+            <a:ext cx="4846320" cy="4480560"/>
           </a:xfrm>
           <a:prstGeom prst="rect">
             <a:avLst/>
@@ -8184,23 +6447,20 @@
           <a:p>
             <a:pPr>
               <a:spcAft>
-                <a:spcPts val="800"/>
-              </a:spcAft>
-              <a:defRPr b="1" sz="1500">
+                <a:spcPts val="1000"/>
+              </a:spcAft>
+              <a:defRPr b="1" sz="1600">
                 <a:solidFill>
                   <a:srgbClr val="DC2626"/>
                 </a:solidFill>
               </a:defRPr>
             </a:pPr>
             <a:r>
-              <a:t>The Critical Research Gap (Section 8)</a:t>
-            </a:r>
-          </a:p>
-          <a:p>
-            <a:pPr>
-              <a:spcAft>
-                <a:spcPts val="100"/>
-              </a:spcAft>
+              <a:t>Foundational Limitation in Base BAMKS [1]</a:t>
+            </a:r>
+          </a:p>
+          <a:p>
+            <a:pPr>
               <a:defRPr b="1" sz="1150">
                 <a:solidFill>
                   <a:srgbClr val="0F172A"/>
@@ -8208,7 +6468,7 @@
               </a:defRPr>
             </a:pPr>
             <a:r>
-              <a:t>✗ Monolithic Batching: </a:t>
+              <a:t>• Base Paper Architecture:</a:t>
             </a:r>
           </a:p>
           <a:p>
@@ -8223,14 +6483,11 @@
               </a:defRPr>
             </a:pPr>
             <a:r>
-              <a:t>   Files are grouped into monolithic collection versions (F_ver). Updating or inserting ONE record requires a complete collection-wide re-keying.</a:t>
-            </a:r>
-          </a:p>
-          <a:p>
-            <a:pPr>
-              <a:spcAft>
-                <a:spcPts val="100"/>
-              </a:spcAft>
+              <a:t>  Cheng et al. (Elsevier IoT, 2026) successfully established multi-authority ABE and blockchain result verification.</a:t>
+            </a:r>
+          </a:p>
+          <a:p>
+            <a:pPr>
               <a:defRPr b="1" sz="1150">
                 <a:solidFill>
                   <a:srgbClr val="0F172A"/>
@@ -8238,7 +6495,7 @@
               </a:defRPr>
             </a:pPr>
             <a:r>
-              <a:t>✗ Prohibitive O(L x m) Cost: </a:t>
+              <a:t>• Monolithic Collection Overhead:</a:t>
             </a:r>
           </a:p>
           <a:p>
@@ -8253,14 +6510,11 @@
               </a:defRPr>
             </a:pPr>
             <a:r>
-              <a:t>   For L files with m keywords, regenerating all index tokens incurs O(L * m) latency, creating an intolerable computational wall.</a:t>
-            </a:r>
-          </a:p>
-          <a:p>
-            <a:pPr>
-              <a:spcAft>
-                <a:spcPts val="100"/>
-              </a:spcAft>
+              <a:t>  Section 5.10 specifies index updates by multiplying X_upd across all L*m existing index entries (O(L*m)). Alternatively, full re-indexing requires re-encrypting all files.</a:t>
+            </a:r>
+          </a:p>
+          <a:p>
+            <a:pPr>
               <a:defRPr b="1" sz="1150">
                 <a:solidFill>
                   <a:srgbClr val="0F172A"/>
@@ -8268,7 +6522,7 @@
               </a:defRPr>
             </a:pPr>
             <a:r>
-              <a:t>✗ Explicit Base Paper Admission: </a:t>
+              <a:t>• Prohibitive at Scale:</a:t>
             </a:r>
           </a:p>
           <a:p>
@@ -8283,22 +6537,19 @@
               </a:defRPr>
             </a:pPr>
             <a:r>
-              <a:t>   Section 8 ('Conclusion &amp; Future Work') explicitly states: 'Future work will focus on file-level fine-grained updates without collection re-keying.'</a:t>
-            </a:r>
-          </a:p>
-          <a:p>
-            <a:pPr>
-              <a:spcAft>
-                <a:spcPts val="100"/>
-              </a:spcAft>
+              <a:t>  For L = 5,000 files and m = 3 keywords, updating 15,000 entries consumes significant computation for every single file appended.</a:t>
+            </a:r>
+          </a:p>
+          <a:p>
+            <a:pPr>
               <a:defRPr b="1" sz="1150">
                 <a:solidFill>
-                  <a:srgbClr val="DC2626"/>
-                </a:solidFill>
-              </a:defRPr>
-            </a:pPr>
-            <a:r>
-              <a:t>✗ OUR TARGET OBJECTIVE: </a:t>
+                  <a:srgbClr val="0F172A"/>
+                </a:solidFill>
+              </a:defRPr>
+            </a:pPr>
+            <a:r>
+              <a:t>• Explicit Research Call:</a:t>
             </a:r>
           </a:p>
           <a:p>
@@ -8313,7 +6564,198 @@
               </a:defRPr>
             </a:pPr>
             <a:r>
-              <a:t>   We directly resolve this exact Section 8 limitation by inventing BAMKS-D.</a:t>
+              <a:t>  Section 8 explicitly identifies fine-grained dynamic file updates as an open research question.</a:t>
+            </a:r>
+          </a:p>
+        </p:txBody>
+      </p:sp>
+      <p:sp>
+        <p:nvSpPr>
+          <p:cNvPr id="5" name="Rounded Rectangle 4"/>
+          <p:cNvSpPr/>
+          <p:nvPr/>
+        </p:nvSpPr>
+        <p:spPr>
+          <a:xfrm>
+            <a:off x="6217920" y="1463040"/>
+            <a:ext cx="5212080" cy="4846320"/>
+          </a:xfrm>
+          <a:prstGeom prst="roundRect">
+            <a:avLst/>
+          </a:prstGeom>
+          <a:solidFill>
+            <a:srgbClr val="F0FDF4"/>
+          </a:solidFill>
+          <a:ln w="15240">
+            <a:solidFill>
+              <a:srgbClr val="16A34A"/>
+            </a:solidFill>
+          </a:ln>
+        </p:spPr>
+        <p:style>
+          <a:lnRef idx="1">
+            <a:schemeClr val="accent1"/>
+          </a:lnRef>
+          <a:fillRef idx="3">
+            <a:schemeClr val="accent1"/>
+          </a:fillRef>
+          <a:effectRef idx="2">
+            <a:schemeClr val="accent1"/>
+          </a:effectRef>
+          <a:fontRef idx="minor">
+            <a:schemeClr val="lt1"/>
+          </a:fontRef>
+        </p:style>
+        <p:txBody>
+          <a:bodyPr rtlCol="0" anchor="ctr"/>
+          <a:lstStyle/>
+          <a:p>
+            <a:pPr algn="ctr"/>
+          </a:p>
+        </p:txBody>
+      </p:sp>
+      <p:sp>
+        <p:nvSpPr>
+          <p:cNvPr id="6" name="TextBox 5"/>
+          <p:cNvSpPr txBox="1"/>
+          <p:nvPr/>
+        </p:nvSpPr>
+        <p:spPr>
+          <a:xfrm>
+            <a:off x="6400800" y="1645920"/>
+            <a:ext cx="4846320" cy="4480560"/>
+          </a:xfrm>
+          <a:prstGeom prst="rect">
+            <a:avLst/>
+          </a:prstGeom>
+          <a:noFill/>
+        </p:spPr>
+        <p:txBody>
+          <a:bodyPr wrap="square">
+            <a:spAutoFit/>
+          </a:bodyPr>
+          <a:lstStyle/>
+          <a:p>
+            <a:pPr>
+              <a:spcAft>
+                <a:spcPts val="1000"/>
+              </a:spcAft>
+              <a:defRPr b="1" sz="1600">
+                <a:solidFill>
+                  <a:srgbClr val="16A34A"/>
+                </a:solidFill>
+              </a:defRPr>
+            </a:pPr>
+            <a:r>
+              <a:t>The Proposed BAMKS-D Resolution</a:t>
+            </a:r>
+          </a:p>
+          <a:p>
+            <a:pPr>
+              <a:defRPr b="1" sz="1150">
+                <a:solidFill>
+                  <a:srgbClr val="0F172A"/>
+                </a:solidFill>
+              </a:defRPr>
+            </a:pPr>
+            <a:r>
+              <a:t>✓ Atomic SingleDocAdd (O(m)):</a:t>
+            </a:r>
+          </a:p>
+          <a:p>
+            <a:pPr>
+              <a:spcAft>
+                <a:spcPts val="400"/>
+              </a:spcAft>
+              <a:defRPr sz="1050">
+                <a:solidFill>
+                  <a:srgbClr val="1E293B"/>
+                </a:solidFill>
+              </a:defRPr>
+            </a:pPr>
+            <a:r>
+              <a:t>  Decouples the inverted keyword index so appending a record requires generating tokens only for its m keywords (~0.67 ms flat at L=5,000).</a:t>
+            </a:r>
+          </a:p>
+          <a:p>
+            <a:pPr>
+              <a:defRPr b="1" sz="1150">
+                <a:solidFill>
+                  <a:srgbClr val="0F172A"/>
+                </a:solidFill>
+              </a:defRPr>
+            </a:pPr>
+            <a:r>
+              <a:t>✓ Instant SingleDocDelete (O(1)):</a:t>
+            </a:r>
+          </a:p>
+          <a:p>
+            <a:pPr>
+              <a:spcAft>
+                <a:spcPts val="400"/>
+              </a:spcAft>
+              <a:defRPr sz="1050">
+                <a:solidFill>
+                  <a:srgbClr val="1E293B"/>
+                </a:solidFill>
+              </a:defRPr>
+            </a:pPr>
+            <a:r>
+              <a:t>  Solidity hash mapping (deletedDocRegistry) executes constant-time revocation with zero array traversal.</a:t>
+            </a:r>
+          </a:p>
+          <a:p>
+            <a:pPr>
+              <a:defRPr b="1" sz="1150">
+                <a:solidFill>
+                  <a:srgbClr val="0F172A"/>
+                </a:solidFill>
+              </a:defRPr>
+            </a:pPr>
+            <a:r>
+              <a:t>✓ Fair Baseline Comparison:</a:t>
+            </a:r>
+          </a:p>
+          <a:p>
+            <a:pPr>
+              <a:spcAft>
+                <a:spcPts val="400"/>
+              </a:spcAft>
+              <a:defRPr sz="1050">
+                <a:solidFill>
+                  <a:srgbClr val="1E293B"/>
+                </a:solidFill>
+              </a:defRPr>
+            </a:pPr>
+            <a:r>
+              <a:t>  Evaluates speedup against both naive re-encryption and true Cheng et al. Section 5.10 index updates across 30 runs.</a:t>
+            </a:r>
+          </a:p>
+          <a:p>
+            <a:pPr>
+              <a:defRPr b="1" sz="1150">
+                <a:solidFill>
+                  <a:srgbClr val="0F172A"/>
+                </a:solidFill>
+              </a:defRPr>
+            </a:pPr>
+            <a:r>
+              <a:t>✓ Live Web3 Sepolia Deployment:</a:t>
+            </a:r>
+          </a:p>
+          <a:p>
+            <a:pPr>
+              <a:spcAft>
+                <a:spcPts val="400"/>
+              </a:spcAft>
+              <a:defRPr sz="1050">
+                <a:solidFill>
+                  <a:srgbClr val="1E293B"/>
+                </a:solidFill>
+              </a:defRPr>
+            </a:pPr>
+            <a:r>
+              <a:t>  Smart contract deployed and verified on Ethereum Sepolia Testnet with real transaction receipts.</a:t>
             </a:r>
           </a:p>
         </p:txBody>
@@ -8375,7 +6817,7 @@
           </a:p>
           <a:p>
             <a:pPr>
-              <a:defRPr sz="2200" b="1">
+              <a:defRPr sz="2000" b="1">
                 <a:solidFill>
                   <a:srgbClr val="0F172A"/>
                 </a:solidFill>
@@ -8383,56 +6825,35 @@
               </a:defRPr>
             </a:pPr>
             <a:r>
-              <a:t>Research Objectives &amp; Core Scientific Contributions</a:t>
-            </a:r>
-          </a:p>
-        </p:txBody>
-      </p:sp>
-      <p:sp>
-        <p:nvSpPr>
-          <p:cNvPr id="3" name="Rectangle 2"/>
-          <p:cNvSpPr/>
+              <a:t>BAMKS-D System Architecture &amp; Seven-Entity Topology</a:t>
+            </a:r>
+          </a:p>
+        </p:txBody>
+      </p:sp>
+      <p:pic>
+        <p:nvPicPr>
+          <p:cNvPr id="3" name="Picture 2" descr="diagram_architecture.png"/>
+          <p:cNvPicPr>
+            <a:picLocks noChangeAspect="1"/>
+          </p:cNvPicPr>
           <p:nvPr/>
-        </p:nvSpPr>
+        </p:nvPicPr>
+        <p:blipFill>
+          <a:blip r:embed="rId2"/>
+          <a:stretch>
+            <a:fillRect/>
+          </a:stretch>
+        </p:blipFill>
         <p:spPr>
           <a:xfrm>
-            <a:off x="731520" y="1261872"/>
-            <a:ext cx="10728655" cy="36576"/>
+            <a:off x="731520" y="1463040"/>
+            <a:ext cx="6400800" cy="3467100"/>
           </a:xfrm>
           <a:prstGeom prst="rect">
             <a:avLst/>
           </a:prstGeom>
-          <a:solidFill>
-            <a:srgbClr val="0284C7"/>
-          </a:solidFill>
-          <a:ln>
-            <a:solidFill>
-              <a:srgbClr val="0284C7"/>
-            </a:solidFill>
-          </a:ln>
         </p:spPr>
-        <p:style>
-          <a:lnRef idx="1">
-            <a:schemeClr val="accent1"/>
-          </a:lnRef>
-          <a:fillRef idx="3">
-            <a:schemeClr val="accent1"/>
-          </a:fillRef>
-          <a:effectRef idx="2">
-            <a:schemeClr val="accent1"/>
-          </a:effectRef>
-          <a:fontRef idx="minor">
-            <a:schemeClr val="lt1"/>
-          </a:fontRef>
-        </p:style>
-        <p:txBody>
-          <a:bodyPr rtlCol="0" anchor="ctr"/>
-          <a:lstStyle/>
-          <a:p>
-            <a:pPr algn="ctr"/>
-          </a:p>
-        </p:txBody>
-      </p:sp>
+      </p:pic>
       <p:sp>
         <p:nvSpPr>
           <p:cNvPr id="4" name="Rounded Rectangle 3"/>
@@ -8441,8 +6862,8 @@
         </p:nvSpPr>
         <p:spPr>
           <a:xfrm>
-            <a:off x="731520" y="1463040"/>
-            <a:ext cx="5212080" cy="2286000"/>
+            <a:off x="7406640" y="1463040"/>
+            <a:ext cx="4023360" cy="4846320"/>
           </a:xfrm>
           <a:prstGeom prst="roundRect">
             <a:avLst/>
@@ -8486,8 +6907,8 @@
         </p:nvSpPr>
         <p:spPr>
           <a:xfrm>
-            <a:off x="960120" y="1645920"/>
-            <a:ext cx="4754880" cy="1920240"/>
+            <a:off x="7589520" y="1600200"/>
+            <a:ext cx="3657600" cy="4572000"/>
           </a:xfrm>
           <a:prstGeom prst="rect">
             <a:avLst/>
@@ -8504,14 +6925,14 @@
               <a:spcAft>
                 <a:spcPts val="800"/>
               </a:spcAft>
-              <a:defRPr b="1" sz="1500">
+              <a:defRPr b="1" sz="1600">
                 <a:solidFill>
                   <a:srgbClr val="1E3A8A"/>
                 </a:solidFill>
               </a:defRPr>
             </a:pPr>
             <a:r>
-              <a:t>1. Atomic File Ingestion (SingleDocAdd)</a:t>
+              <a:t>Seven System Entities</a:t>
             </a:r>
           </a:p>
           <a:p>
@@ -8519,97 +6940,14 @@
               <a:spcAft>
                 <a:spcPts val="400"/>
               </a:spcAft>
-              <a:defRPr sz="1200">
+              <a:defRPr sz="1050">
                 <a:solidFill>
                   <a:srgbClr val="1E293B"/>
                 </a:solidFill>
               </a:defRPr>
             </a:pPr>
             <a:r>
-              <a:t>Eliminates collection-wide re-keying. Inserts single EHR documents in strict O(m) time (~0.29 ms) without modifying or re-encrypting any of the existing L files.</a:t>
-            </a:r>
-          </a:p>
-        </p:txBody>
-      </p:sp>
-      <p:sp>
-        <p:nvSpPr>
-          <p:cNvPr id="6" name="Rounded Rectangle 5"/>
-          <p:cNvSpPr/>
-          <p:nvPr/>
-        </p:nvSpPr>
-        <p:spPr>
-          <a:xfrm>
-            <a:off x="6217920" y="1463040"/>
-            <a:ext cx="5212080" cy="2286000"/>
-          </a:xfrm>
-          <a:prstGeom prst="roundRect">
-            <a:avLst/>
-          </a:prstGeom>
-          <a:solidFill>
-            <a:srgbClr val="F8FAFC"/>
-          </a:solidFill>
-          <a:ln w="15240">
-            <a:solidFill>
-              <a:srgbClr val="0284C7"/>
-            </a:solidFill>
-          </a:ln>
-        </p:spPr>
-        <p:style>
-          <a:lnRef idx="1">
-            <a:schemeClr val="accent1"/>
-          </a:lnRef>
-          <a:fillRef idx="3">
-            <a:schemeClr val="accent1"/>
-          </a:fillRef>
-          <a:effectRef idx="2">
-            <a:schemeClr val="accent1"/>
-          </a:effectRef>
-          <a:fontRef idx="minor">
-            <a:schemeClr val="lt1"/>
-          </a:fontRef>
-        </p:style>
-        <p:txBody>
-          <a:bodyPr rtlCol="0" anchor="ctr"/>
-          <a:lstStyle/>
-          <a:p>
-            <a:pPr algn="ctr"/>
-          </a:p>
-        </p:txBody>
-      </p:sp>
-      <p:sp>
-        <p:nvSpPr>
-          <p:cNvPr id="7" name="TextBox 6"/>
-          <p:cNvSpPr txBox="1"/>
-          <p:nvPr/>
-        </p:nvSpPr>
-        <p:spPr>
-          <a:xfrm>
-            <a:off x="6446520" y="1645920"/>
-            <a:ext cx="4754880" cy="1920240"/>
-          </a:xfrm>
-          <a:prstGeom prst="rect">
-            <a:avLst/>
-          </a:prstGeom>
-          <a:noFill/>
-        </p:spPr>
-        <p:txBody>
-          <a:bodyPr wrap="square">
-            <a:spAutoFit/>
-          </a:bodyPr>
-          <a:lstStyle/>
-          <a:p>
-            <a:pPr>
-              <a:spcAft>
-                <a:spcPts val="800"/>
-              </a:spcAft>
-              <a:defRPr b="1" sz="1500">
-                <a:solidFill>
-                  <a:srgbClr val="0284C7"/>
-                </a:solidFill>
-              </a:defRPr>
-            </a:pPr>
-            <a:r>
-              <a:t>2. Instant On-Chain Revocation (SingleDocDelete)</a:t>
+              <a:t>1. KGC: Initializes global parameters and master secrets.</a:t>
             </a:r>
           </a:p>
           <a:p>
@@ -8617,97 +6955,14 @@
               <a:spcAft>
                 <a:spcPts val="400"/>
               </a:spcAft>
-              <a:defRPr sz="1200">
+              <a:defRPr sz="1050">
                 <a:solidFill>
                   <a:srgbClr val="1E293B"/>
                 </a:solidFill>
               </a:defRPr>
             </a:pPr>
             <a:r>
-              <a:t>Implements O(1) constant-time deletion via a Solidity state mapping on Ethereum Sepolia. Consumes exactly 42,100 gas with zero array traversal or block history scanning.</a:t>
-            </a:r>
-          </a:p>
-        </p:txBody>
-      </p:sp>
-      <p:sp>
-        <p:nvSpPr>
-          <p:cNvPr id="8" name="Rounded Rectangle 7"/>
-          <p:cNvSpPr/>
-          <p:nvPr/>
-        </p:nvSpPr>
-        <p:spPr>
-          <a:xfrm>
-            <a:off x="731520" y="3931920"/>
-            <a:ext cx="5212080" cy="2286000"/>
-          </a:xfrm>
-          <a:prstGeom prst="roundRect">
-            <a:avLst/>
-          </a:prstGeom>
-          <a:solidFill>
-            <a:srgbClr val="F8FAFC"/>
-          </a:solidFill>
-          <a:ln w="15240">
-            <a:solidFill>
-              <a:srgbClr val="16A34A"/>
-            </a:solidFill>
-          </a:ln>
-        </p:spPr>
-        <p:style>
-          <a:lnRef idx="1">
-            <a:schemeClr val="accent1"/>
-          </a:lnRef>
-          <a:fillRef idx="3">
-            <a:schemeClr val="accent1"/>
-          </a:fillRef>
-          <a:effectRef idx="2">
-            <a:schemeClr val="accent1"/>
-          </a:effectRef>
-          <a:fontRef idx="minor">
-            <a:schemeClr val="lt1"/>
-          </a:fontRef>
-        </p:style>
-        <p:txBody>
-          <a:bodyPr rtlCol="0" anchor="ctr"/>
-          <a:lstStyle/>
-          <a:p>
-            <a:pPr algn="ctr"/>
-          </a:p>
-        </p:txBody>
-      </p:sp>
-      <p:sp>
-        <p:nvSpPr>
-          <p:cNvPr id="9" name="TextBox 8"/>
-          <p:cNvSpPr txBox="1"/>
-          <p:nvPr/>
-        </p:nvSpPr>
-        <p:spPr>
-          <a:xfrm>
-            <a:off x="960120" y="4114800"/>
-            <a:ext cx="4754880" cy="1920240"/>
-          </a:xfrm>
-          <a:prstGeom prst="rect">
-            <a:avLst/>
-          </a:prstGeom>
-          <a:noFill/>
-        </p:spPr>
-        <p:txBody>
-          <a:bodyPr wrap="square">
-            <a:spAutoFit/>
-          </a:bodyPr>
-          <a:lstStyle/>
-          <a:p>
-            <a:pPr>
-              <a:spcAft>
-                <a:spcPts val="800"/>
-              </a:spcAft>
-              <a:defRPr b="1" sz="1500">
-                <a:solidFill>
-                  <a:srgbClr val="16A34A"/>
-                </a:solidFill>
-              </a:defRPr>
-            </a:pPr>
-            <a:r>
-              <a:t>3. Zero-Leakage Conjunctive Search</a:t>
+              <a:t>2. AA (Authorities): Issue attribute private keys to clinical users.</a:t>
             </a:r>
           </a:p>
           <a:p>
@@ -8715,97 +6970,14 @@
               <a:spcAft>
                 <a:spcPts val="400"/>
               </a:spcAft>
-              <a:defRPr sz="1200">
+              <a:defRPr sz="1050">
                 <a:solidFill>
                   <a:srgbClr val="1E293B"/>
                 </a:solidFill>
               </a:defRPr>
             </a:pPr>
             <a:r>
-              <a:t>Enforces Equation (9) algebraic verification (I_prod)^phi == (T3)^eta mod P. Inverted indices contain cryptographic hashes; cloud server learns zero plaintext keywords.</a:t>
-            </a:r>
-          </a:p>
-        </p:txBody>
-      </p:sp>
-      <p:sp>
-        <p:nvSpPr>
-          <p:cNvPr id="10" name="Rounded Rectangle 9"/>
-          <p:cNvSpPr/>
-          <p:nvPr/>
-        </p:nvSpPr>
-        <p:spPr>
-          <a:xfrm>
-            <a:off x="6217920" y="3931920"/>
-            <a:ext cx="5212080" cy="2286000"/>
-          </a:xfrm>
-          <a:prstGeom prst="roundRect">
-            <a:avLst/>
-          </a:prstGeom>
-          <a:solidFill>
-            <a:srgbClr val="F8FAFC"/>
-          </a:solidFill>
-          <a:ln w="15240">
-            <a:solidFill>
-              <a:srgbClr val="D97706"/>
-            </a:solidFill>
-          </a:ln>
-        </p:spPr>
-        <p:style>
-          <a:lnRef idx="1">
-            <a:schemeClr val="accent1"/>
-          </a:lnRef>
-          <a:fillRef idx="3">
-            <a:schemeClr val="accent1"/>
-          </a:fillRef>
-          <a:effectRef idx="2">
-            <a:schemeClr val="accent1"/>
-          </a:effectRef>
-          <a:fontRef idx="minor">
-            <a:schemeClr val="lt1"/>
-          </a:fontRef>
-        </p:style>
-        <p:txBody>
-          <a:bodyPr rtlCol="0" anchor="ctr"/>
-          <a:lstStyle/>
-          <a:p>
-            <a:pPr algn="ctr"/>
-          </a:p>
-        </p:txBody>
-      </p:sp>
-      <p:sp>
-        <p:nvSpPr>
-          <p:cNvPr id="11" name="TextBox 10"/>
-          <p:cNvSpPr txBox="1"/>
-          <p:nvPr/>
-        </p:nvSpPr>
-        <p:spPr>
-          <a:xfrm>
-            <a:off x="6446520" y="4114800"/>
-            <a:ext cx="4754880" cy="1920240"/>
-          </a:xfrm>
-          <a:prstGeom prst="rect">
-            <a:avLst/>
-          </a:prstGeom>
-          <a:noFill/>
-        </p:spPr>
-        <p:txBody>
-          <a:bodyPr wrap="square">
-            <a:spAutoFit/>
-          </a:bodyPr>
-          <a:lstStyle/>
-          <a:p>
-            <a:pPr>
-              <a:spcAft>
-                <a:spcPts val="800"/>
-              </a:spcAft>
-              <a:defRPr b="1" sz="1500">
-                <a:solidFill>
-                  <a:srgbClr val="D97706"/>
-                </a:solidFill>
-              </a:defRPr>
-            </a:pPr>
-            <a:r>
-              <a:t>4. Trustless Web3 &amp; IPFS Production Deployment</a:t>
+              <a:t>3. Data Owners: Encrypt EHRs, upload to IPFS, compute index tokens.</a:t>
             </a:r>
           </a:p>
           <a:p>
@@ -8813,14 +6985,59 @@
               <a:spcAft>
                 <a:spcPts val="400"/>
               </a:spcAft>
-              <a:defRPr sz="1200">
+              <a:defRPr sz="1050">
                 <a:solidFill>
                   <a:srgbClr val="1E293B"/>
                 </a:solidFill>
               </a:defRPr>
             </a:pPr>
             <a:r>
-              <a:t>Smart contract deployed and verified on public Ethereum Sepolia Testnet (0x3829bda65146D8fb0C2c6E2596F6A39936bF9DB5) with decentralized Pinata IPFS ciphertext storage.</a:t>
+              <a:t>4. Data Users: Generate search trapdoors and decrypt matching EHRs.</a:t>
+            </a:r>
+          </a:p>
+          <a:p>
+            <a:pPr>
+              <a:spcAft>
+                <a:spcPts val="400"/>
+              </a:spcAft>
+              <a:defRPr sz="1050">
+                <a:solidFill>
+                  <a:srgbClr val="1E293B"/>
+                </a:solidFill>
+              </a:defRPr>
+            </a:pPr>
+            <a:r>
+              <a:t>5. CSP (Cloud): Maintains inverted index and executes conjunctive matching.</a:t>
+            </a:r>
+          </a:p>
+          <a:p>
+            <a:pPr>
+              <a:spcAft>
+                <a:spcPts val="400"/>
+              </a:spcAft>
+              <a:defRPr sz="1050">
+                <a:solidFill>
+                  <a:srgbClr val="1E293B"/>
+                </a:solidFill>
+              </a:defRPr>
+            </a:pPr>
+            <a:r>
+              <a:t>6. Ethereum Sepolia: Smart contract enforcing instant deletion registry.</a:t>
+            </a:r>
+          </a:p>
+          <a:p>
+            <a:pPr>
+              <a:spcAft>
+                <a:spcPts val="400"/>
+              </a:spcAft>
+              <a:defRPr sz="1050">
+                <a:solidFill>
+                  <a:srgbClr val="1E293B"/>
+                </a:solidFill>
+              </a:defRPr>
+            </a:pPr>
+            <a:r>
+              <a:t>7. IPFS / Pinata: Content-addressed storage for encrypted medical files.</a:t>
             </a:r>
           </a:p>
         </p:txBody>
@@ -8882,7 +7099,7 @@
           </a:p>
           <a:p>
             <a:pPr>
-              <a:defRPr sz="2200" b="1">
+              <a:defRPr sz="2000" b="1">
                 <a:solidFill>
                   <a:srgbClr val="0F172A"/>
                 </a:solidFill>
@@ -8890,795 +7107,14 @@
               </a:defRPr>
             </a:pPr>
             <a:r>
-              <a:t>BAMKS-D System Architecture &amp; 4-Layer Operating Model</a:t>
-            </a:r>
-          </a:p>
-        </p:txBody>
-      </p:sp>
-      <p:sp>
-        <p:nvSpPr>
-          <p:cNvPr id="3" name="Rectangle 2"/>
-          <p:cNvSpPr/>
-          <p:nvPr/>
-        </p:nvSpPr>
-        <p:spPr>
-          <a:xfrm>
-            <a:off x="731520" y="1261872"/>
-            <a:ext cx="10728655" cy="36576"/>
-          </a:xfrm>
-          <a:prstGeom prst="rect">
-            <a:avLst/>
-          </a:prstGeom>
-          <a:solidFill>
-            <a:srgbClr val="0284C7"/>
-          </a:solidFill>
-          <a:ln>
-            <a:solidFill>
-              <a:srgbClr val="0284C7"/>
-            </a:solidFill>
-          </a:ln>
-        </p:spPr>
-        <p:style>
-          <a:lnRef idx="1">
-            <a:schemeClr val="accent1"/>
-          </a:lnRef>
-          <a:fillRef idx="3">
-            <a:schemeClr val="accent1"/>
-          </a:fillRef>
-          <a:effectRef idx="2">
-            <a:schemeClr val="accent1"/>
-          </a:effectRef>
-          <a:fontRef idx="minor">
-            <a:schemeClr val="lt1"/>
-          </a:fontRef>
-        </p:style>
-        <p:txBody>
-          <a:bodyPr rtlCol="0" anchor="ctr"/>
-          <a:lstStyle/>
-          <a:p>
-            <a:pPr algn="ctr"/>
-          </a:p>
-        </p:txBody>
-      </p:sp>
-      <p:sp>
-        <p:nvSpPr>
-          <p:cNvPr id="4" name="Rounded Rectangle 3"/>
-          <p:cNvSpPr/>
-          <p:nvPr/>
-        </p:nvSpPr>
-        <p:spPr>
-          <a:xfrm>
-            <a:off x="731520" y="1463040"/>
-            <a:ext cx="5303520" cy="4846320"/>
-          </a:xfrm>
-          <a:prstGeom prst="roundRect">
-            <a:avLst/>
-          </a:prstGeom>
-          <a:solidFill>
-            <a:srgbClr val="F8FAFC"/>
-          </a:solidFill>
-          <a:ln w="15240">
-            <a:solidFill>
-              <a:srgbClr val="1E3A8A"/>
-            </a:solidFill>
-          </a:ln>
-        </p:spPr>
-        <p:style>
-          <a:lnRef idx="1">
-            <a:schemeClr val="accent1"/>
-          </a:lnRef>
-          <a:fillRef idx="3">
-            <a:schemeClr val="accent1"/>
-          </a:fillRef>
-          <a:effectRef idx="2">
-            <a:schemeClr val="accent1"/>
-          </a:effectRef>
-          <a:fontRef idx="minor">
-            <a:schemeClr val="lt1"/>
-          </a:fontRef>
-        </p:style>
-        <p:txBody>
-          <a:bodyPr rtlCol="0" anchor="ctr"/>
-          <a:lstStyle/>
-          <a:p>
-            <a:pPr algn="ctr"/>
-          </a:p>
-        </p:txBody>
-      </p:sp>
-      <p:sp>
-        <p:nvSpPr>
-          <p:cNvPr id="5" name="TextBox 4"/>
-          <p:cNvSpPr txBox="1"/>
-          <p:nvPr/>
-        </p:nvSpPr>
-        <p:spPr>
-          <a:xfrm>
-            <a:off x="914400" y="1600200"/>
-            <a:ext cx="4937760" cy="4572000"/>
-          </a:xfrm>
-          <a:prstGeom prst="rect">
-            <a:avLst/>
-          </a:prstGeom>
-          <a:noFill/>
-        </p:spPr>
-        <p:txBody>
-          <a:bodyPr wrap="square">
-            <a:spAutoFit/>
-          </a:bodyPr>
-          <a:lstStyle/>
-          <a:p>
-            <a:pPr>
-              <a:spcAft>
-                <a:spcPts val="800"/>
-              </a:spcAft>
-              <a:defRPr b="1" sz="1600">
-                <a:solidFill>
-                  <a:srgbClr val="1E3A8A"/>
-                </a:solidFill>
-              </a:defRPr>
-            </a:pPr>
-            <a:r>
-              <a:t>Decoupled 4-Tier System Architecture</a:t>
-            </a:r>
-          </a:p>
-          <a:p>
-            <a:pPr>
-              <a:defRPr b="1" sz="1200">
-                <a:solidFill>
-                  <a:srgbClr val="0F172A"/>
-                </a:solidFill>
-              </a:defRPr>
-            </a:pPr>
-            <a:r>
-              <a:t>• Layer 1: Trust Authorities (KGC &amp; Multi-AA)</a:t>
-            </a:r>
-          </a:p>
-          <a:p>
-            <a:pPr>
-              <a:spcAft>
-                <a:spcPts val="600"/>
-              </a:spcAft>
-              <a:defRPr sz="1050">
-                <a:solidFill>
-                  <a:srgbClr val="1E293B"/>
-                </a:solidFill>
-              </a:defRPr>
-            </a:pPr>
-            <a:r>
-              <a:t>  Samples master secrets (mu, gamma), issues collection exponent eta, and binds CP-ABE attribute keys K1, K2 with fresh randomness t.</a:t>
-            </a:r>
-          </a:p>
-          <a:p>
-            <a:pPr>
-              <a:defRPr b="1" sz="1200">
-                <a:solidFill>
-                  <a:srgbClr val="0F172A"/>
-                </a:solidFill>
-              </a:defRPr>
-            </a:pPr>
-            <a:r>
-              <a:t>• Layer 2: Dynamic Ingestion Engine</a:t>
-            </a:r>
-          </a:p>
-          <a:p>
-            <a:pPr>
-              <a:spcAft>
-                <a:spcPts val="600"/>
-              </a:spcAft>
-              <a:defRPr sz="1050">
-                <a:solidFill>
-                  <a:srgbClr val="1E293B"/>
-                </a:solidFill>
-              </a:defRPr>
-            </a:pPr>
-            <a:r>
-              <a:t>  Executes SingleDocAdd (O(m)) and SingleDocDelete (O(1)). Encrypts EHR payloads under AES-256-GCM and computes keyword indices.</a:t>
-            </a:r>
-          </a:p>
-          <a:p>
-            <a:pPr>
-              <a:defRPr b="1" sz="1200">
-                <a:solidFill>
-                  <a:srgbClr val="0F172A"/>
-                </a:solidFill>
-              </a:defRPr>
-            </a:pPr>
-            <a:r>
-              <a:t>• Layer 3: Decentralized IPFS Storage</a:t>
-            </a:r>
-          </a:p>
-          <a:p>
-            <a:pPr>
-              <a:spcAft>
-                <a:spcPts val="600"/>
-              </a:spcAft>
-              <a:defRPr sz="1050">
-                <a:solidFill>
-                  <a:srgbClr val="1E293B"/>
-                </a:solidFill>
-              </a:defRPr>
-            </a:pPr>
-            <a:r>
-              <a:t>  Stores encrypted EHR payloads off-chain via Pinata IPFS gateway. Generates immutable content identifiers (CIDs) at zero gas cost.</a:t>
-            </a:r>
-          </a:p>
-          <a:p>
-            <a:pPr>
-              <a:defRPr b="1" sz="1200">
-                <a:solidFill>
-                  <a:srgbClr val="0F172A"/>
-                </a:solidFill>
-              </a:defRPr>
-            </a:pPr>
-            <a:r>
-              <a:t>• Layer 4: Ethereum Sepolia Smart Contract</a:t>
-            </a:r>
-          </a:p>
-          <a:p>
-            <a:pPr>
-              <a:spcAft>
-                <a:spcPts val="600"/>
-              </a:spcAft>
-              <a:defRPr sz="1050">
-                <a:solidFill>
-                  <a:srgbClr val="1E293B"/>
-                </a:solidFill>
-              </a:defRPr>
-            </a:pPr>
-            <a:r>
-              <a:t>  Executes Result Verification Smart Contract (RVSC). Enforces deletedDocRegistry state mapping to guarantee deleted files are never returned.</a:t>
-            </a:r>
-          </a:p>
-        </p:txBody>
-      </p:sp>
-      <p:pic>
-        <p:nvPicPr>
-          <p:cNvPr id="6" name="Picture 5" descr="diagram_architecture.png"/>
-          <p:cNvPicPr>
-            <a:picLocks noChangeAspect="1"/>
-          </p:cNvPicPr>
-          <p:nvPr/>
-        </p:nvPicPr>
-        <p:blipFill>
-          <a:blip r:embed="rId2"/>
-          <a:stretch>
-            <a:fillRect/>
-          </a:stretch>
-        </p:blipFill>
-        <p:spPr>
-          <a:xfrm>
-            <a:off x="6309360" y="1463040"/>
-            <a:ext cx="5120640" cy="2773680"/>
-          </a:xfrm>
-          <a:prstGeom prst="rect">
-            <a:avLst/>
-          </a:prstGeom>
-        </p:spPr>
-      </p:pic>
-    </p:spTree>
-  </p:cSld>
-  <p:clrMapOvr>
-    <a:masterClrMapping/>
-  </p:clrMapOvr>
-</p:sld>
-</file>
-
-<file path=ppt/slides/slide6.xml><?xml version="1.0" encoding="utf-8"?>
-<p:sld xmlns:a="http://schemas.openxmlformats.org/drawingml/2006/main" xmlns:p="http://schemas.openxmlformats.org/presentationml/2006/main" xmlns:r="http://schemas.openxmlformats.org/officeDocument/2006/relationships">
-  <p:cSld>
-    <p:spTree>
-      <p:nvGrpSpPr>
-        <p:cNvPr id="1" name=""/>
-        <p:cNvGrpSpPr/>
-        <p:nvPr/>
-      </p:nvGrpSpPr>
-      <p:grpSpPr/>
-      <p:sp>
-        <p:nvSpPr>
-          <p:cNvPr id="2" name="TextBox 1"/>
-          <p:cNvSpPr txBox="1"/>
-          <p:nvPr/>
-        </p:nvSpPr>
-        <p:spPr>
-          <a:xfrm>
-            <a:off x="731520" y="365760"/>
-            <a:ext cx="10728655" cy="868680"/>
-          </a:xfrm>
-          <a:prstGeom prst="rect">
-            <a:avLst/>
-          </a:prstGeom>
-          <a:noFill/>
-        </p:spPr>
-        <p:txBody>
-          <a:bodyPr wrap="square" lIns="0" tIns="0" rIns="0" bIns="0">
-            <a:spAutoFit/>
-          </a:bodyPr>
-          <a:lstStyle/>
-          <a:p>
-            <a:pPr>
-              <a:spcAft>
-                <a:spcPts val="200"/>
-              </a:spcAft>
-              <a:defRPr sz="1000" b="1">
-                <a:solidFill>
-                  <a:srgbClr val="0284C7"/>
-                </a:solidFill>
-                <a:latin typeface="Arial"/>
-              </a:defRPr>
-            </a:pPr>
-            <a:r>
-              <a:t>BCSE309L: CRYPTOGRAPHY &amp; NETWORK SECURITY | VIT CHENNAI</a:t>
-            </a:r>
-          </a:p>
-          <a:p>
-            <a:pPr>
-              <a:defRPr sz="2200" b="1">
-                <a:solidFill>
-                  <a:srgbClr val="0F172A"/>
-                </a:solidFill>
-                <a:latin typeface="Arial"/>
-              </a:defRPr>
-            </a:pPr>
-            <a:r>
-              <a:t>Cryptographic Parameters &amp; Multi-Authority KeyGen</a:t>
-            </a:r>
-          </a:p>
-        </p:txBody>
-      </p:sp>
-      <p:sp>
-        <p:nvSpPr>
-          <p:cNvPr id="3" name="Rectangle 2"/>
-          <p:cNvSpPr/>
-          <p:nvPr/>
-        </p:nvSpPr>
-        <p:spPr>
-          <a:xfrm>
-            <a:off x="731520" y="1261872"/>
-            <a:ext cx="10728655" cy="36576"/>
-          </a:xfrm>
-          <a:prstGeom prst="rect">
-            <a:avLst/>
-          </a:prstGeom>
-          <a:solidFill>
-            <a:srgbClr val="0284C7"/>
-          </a:solidFill>
-          <a:ln>
-            <a:solidFill>
-              <a:srgbClr val="0284C7"/>
-            </a:solidFill>
-          </a:ln>
-        </p:spPr>
-        <p:style>
-          <a:lnRef idx="1">
-            <a:schemeClr val="accent1"/>
-          </a:lnRef>
-          <a:fillRef idx="3">
-            <a:schemeClr val="accent1"/>
-          </a:fillRef>
-          <a:effectRef idx="2">
-            <a:schemeClr val="accent1"/>
-          </a:effectRef>
-          <a:fontRef idx="minor">
-            <a:schemeClr val="lt1"/>
-          </a:fontRef>
-        </p:style>
-        <p:txBody>
-          <a:bodyPr rtlCol="0" anchor="ctr"/>
-          <a:lstStyle/>
-          <a:p>
-            <a:pPr algn="ctr"/>
-          </a:p>
-        </p:txBody>
-      </p:sp>
-      <p:sp>
-        <p:nvSpPr>
-          <p:cNvPr id="4" name="Rounded Rectangle 3"/>
-          <p:cNvSpPr/>
-          <p:nvPr/>
-        </p:nvSpPr>
-        <p:spPr>
-          <a:xfrm>
-            <a:off x="731520" y="1463040"/>
-            <a:ext cx="5212080" cy="4846320"/>
-          </a:xfrm>
-          <a:prstGeom prst="roundRect">
-            <a:avLst/>
-          </a:prstGeom>
-          <a:solidFill>
-            <a:srgbClr val="F8FAFC"/>
-          </a:solidFill>
-          <a:ln w="15240">
-            <a:solidFill>
-              <a:srgbClr val="1E3A8A"/>
-            </a:solidFill>
-          </a:ln>
-        </p:spPr>
-        <p:style>
-          <a:lnRef idx="1">
-            <a:schemeClr val="accent1"/>
-          </a:lnRef>
-          <a:fillRef idx="3">
-            <a:schemeClr val="accent1"/>
-          </a:fillRef>
-          <a:effectRef idx="2">
-            <a:schemeClr val="accent1"/>
-          </a:effectRef>
-          <a:fontRef idx="minor">
-            <a:schemeClr val="lt1"/>
-          </a:fontRef>
-        </p:style>
-        <p:txBody>
-          <a:bodyPr rtlCol="0" anchor="ctr"/>
-          <a:lstStyle/>
-          <a:p>
-            <a:pPr algn="ctr"/>
-          </a:p>
-        </p:txBody>
-      </p:sp>
-      <p:sp>
-        <p:nvSpPr>
-          <p:cNvPr id="5" name="TextBox 4"/>
-          <p:cNvSpPr txBox="1"/>
-          <p:nvPr/>
-        </p:nvSpPr>
-        <p:spPr>
-          <a:xfrm>
-            <a:off x="914400" y="1645920"/>
-            <a:ext cx="4846320" cy="4480560"/>
-          </a:xfrm>
-          <a:prstGeom prst="rect">
-            <a:avLst/>
-          </a:prstGeom>
-          <a:noFill/>
-        </p:spPr>
-        <p:txBody>
-          <a:bodyPr wrap="square">
-            <a:spAutoFit/>
-          </a:bodyPr>
-          <a:lstStyle/>
-          <a:p>
-            <a:pPr>
-              <a:spcAft>
-                <a:spcPts val="1000"/>
-              </a:spcAft>
-              <a:defRPr b="1" sz="1600">
-                <a:solidFill>
-                  <a:srgbClr val="1E3A8A"/>
-                </a:solidFill>
-              </a:defRPr>
-            </a:pPr>
-            <a:r>
-              <a:t>Mathematical Foundation &amp; Group Parameters</a:t>
-            </a:r>
-          </a:p>
-          <a:p>
-            <a:pPr>
-              <a:spcAft>
-                <a:spcPts val="800"/>
-              </a:spcAft>
-              <a:defRPr sz="1150" b="1">
-                <a:solidFill>
-                  <a:srgbClr val="0F172A"/>
-                </a:solidFill>
-              </a:defRPr>
-            </a:pPr>
-            <a:r>
-              <a:t>1. Cyclic Group Order (256-bit Field Prime P):</a:t>
-            </a:r>
-            <a:br/>
-            <a:r>
-              <a:t>   P = 2^256 - 2^32 - 977 (secp256k1 field prime)</a:t>
-            </a:r>
-            <a:br/>
-            <a:r>
-              <a:t>   Generator: g = 2</a:t>
-            </a:r>
-          </a:p>
-          <a:p>
-            <a:pPr>
-              <a:spcAft>
-                <a:spcPts val="800"/>
-              </a:spcAft>
-              <a:defRPr sz="1150">
-                <a:solidFill>
-                  <a:srgbClr val="1E293B"/>
-                </a:solidFill>
-              </a:defRPr>
-            </a:pPr>
-            <a:r>
-              <a:t>2. Master Secrets Sampled by KGC:</a:t>
-            </a:r>
-            <a:br/>
-            <a:r>
-              <a:t>   mu, gamma in Z_P*  |  Shared Exponent eta in Z_(P-1)*</a:t>
-            </a:r>
-            <a:br/>
-            <a:r>
-              <a:t>   Collection Master Token: Phi = H(uid, ver)</a:t>
-            </a:r>
-          </a:p>
-          <a:p>
-            <a:pPr>
-              <a:defRPr sz="1150">
-                <a:solidFill>
-                  <a:srgbClr val="1E293B"/>
-                </a:solidFill>
-              </a:defRPr>
-            </a:pPr>
-            <a:r>
-              <a:t>3. Attribute Authority Parameters:</a:t>
-            </a:r>
-            <a:br/>
-            <a:r>
-              <a:t>   alpha, beta in Z_(P-1)*</a:t>
-            </a:r>
-            <a:br/>
-            <a:r>
-              <a:t>   dpk_ver = g^(alpha * beta) mod P</a:t>
-            </a:r>
-          </a:p>
-        </p:txBody>
-      </p:sp>
-      <p:sp>
-        <p:nvSpPr>
-          <p:cNvPr id="6" name="Rounded Rectangle 5"/>
-          <p:cNvSpPr/>
-          <p:nvPr/>
-        </p:nvSpPr>
-        <p:spPr>
-          <a:xfrm>
-            <a:off x="6217920" y="1463040"/>
-            <a:ext cx="5212080" cy="4846320"/>
-          </a:xfrm>
-          <a:prstGeom prst="roundRect">
-            <a:avLst/>
-          </a:prstGeom>
-          <a:solidFill>
-            <a:srgbClr val="F8FAFC"/>
-          </a:solidFill>
-          <a:ln w="15240">
-            <a:solidFill>
-              <a:srgbClr val="16A34A"/>
-            </a:solidFill>
-          </a:ln>
-        </p:spPr>
-        <p:style>
-          <a:lnRef idx="1">
-            <a:schemeClr val="accent1"/>
-          </a:lnRef>
-          <a:fillRef idx="3">
-            <a:schemeClr val="accent1"/>
-          </a:fillRef>
-          <a:effectRef idx="2">
-            <a:schemeClr val="accent1"/>
-          </a:effectRef>
-          <a:fontRef idx="minor">
-            <a:schemeClr val="lt1"/>
-          </a:fontRef>
-        </p:style>
-        <p:txBody>
-          <a:bodyPr rtlCol="0" anchor="ctr"/>
-          <a:lstStyle/>
-          <a:p>
-            <a:pPr algn="ctr"/>
-          </a:p>
-        </p:txBody>
-      </p:sp>
-      <p:sp>
-        <p:nvSpPr>
-          <p:cNvPr id="7" name="TextBox 6"/>
-          <p:cNvSpPr txBox="1"/>
-          <p:nvPr/>
-        </p:nvSpPr>
-        <p:spPr>
-          <a:xfrm>
-            <a:off x="6400800" y="1645920"/>
-            <a:ext cx="4846320" cy="4480560"/>
-          </a:xfrm>
-          <a:prstGeom prst="rect">
-            <a:avLst/>
-          </a:prstGeom>
-          <a:noFill/>
-        </p:spPr>
-        <p:txBody>
-          <a:bodyPr wrap="square">
-            <a:spAutoFit/>
-          </a:bodyPr>
-          <a:lstStyle/>
-          <a:p>
-            <a:pPr>
-              <a:spcAft>
-                <a:spcPts val="1000"/>
-              </a:spcAft>
-              <a:defRPr b="1" sz="1600">
-                <a:solidFill>
-                  <a:srgbClr val="16A34A"/>
-                </a:solidFill>
-              </a:defRPr>
-            </a:pPr>
-            <a:r>
-              <a:t>Resolution of KeyGen Randomness (Bug 3 Fix)</a:t>
-            </a:r>
-          </a:p>
-          <a:p>
-            <a:pPr>
-              <a:spcAft>
-                <a:spcPts val="800"/>
-              </a:spcAft>
-              <a:defRPr sz="1150">
-                <a:solidFill>
-                  <a:srgbClr val="1E293B"/>
-                </a:solidFill>
-              </a:defRPr>
-            </a:pPr>
-            <a:r>
-              <a:t>• Previous Defect in Base Code:</a:t>
-            </a:r>
-            <a:br/>
-            <a:r>
-              <a:t>  Randomness 't' was sampled but never incorporated into K1/K2. Key generation returned identical keys across repeated calls for the same user identity.</a:t>
-            </a:r>
-          </a:p>
-          <a:p>
-            <a:pPr>
-              <a:spcAft>
-                <a:spcPts val="800"/>
-              </a:spcAft>
-              <a:defRPr sz="1200" b="1">
-                <a:solidFill>
-                  <a:srgbClr val="1E3A8A"/>
-                </a:solidFill>
-              </a:defRPr>
-            </a:pPr>
-            <a:r>
-              <a:t>• Mathematical Fix Implemented:</a:t>
-            </a:r>
-            <a:br/>
-            <a:r>
-              <a:t>  Sample fresh t in Z_(P-1)* on every KeyGen invocation:</a:t>
-            </a:r>
-            <a:br/>
-            <a:br/>
-            <a:r>
-              <a:t>  K1 = H1(uid)^(-t mod P-1) mod P</a:t>
-            </a:r>
-            <a:br/>
-            <a:r>
-              <a:t>  K2,attr = ( H1(uid)^(t * beta) * dpk_ver^alpha ) mod P</a:t>
-            </a:r>
-          </a:p>
-          <a:p>
-            <a:pPr>
-              <a:defRPr sz="1100" b="1">
-                <a:solidFill>
-                  <a:srgbClr val="16A34A"/>
-                </a:solidFill>
-              </a:defRPr>
-            </a:pPr>
-            <a:r>
-              <a:t>✓ Verified via test_demo.py: Two sequential calls for 'Dr. Prashant' produce completely distinct keys K1 and K2, proving genuine per-session freshness.</a:t>
-            </a:r>
-          </a:p>
-        </p:txBody>
-      </p:sp>
-    </p:spTree>
-  </p:cSld>
-  <p:clrMapOvr>
-    <a:masterClrMapping/>
-  </p:clrMapOvr>
-</p:sld>
-</file>
-
-<file path=ppt/slides/slide7.xml><?xml version="1.0" encoding="utf-8"?>
-<p:sld xmlns:a="http://schemas.openxmlformats.org/drawingml/2006/main" xmlns:p="http://schemas.openxmlformats.org/presentationml/2006/main" xmlns:r="http://schemas.openxmlformats.org/officeDocument/2006/relationships">
-  <p:cSld>
-    <p:spTree>
-      <p:nvGrpSpPr>
-        <p:cNvPr id="1" name=""/>
-        <p:cNvGrpSpPr/>
-        <p:nvPr/>
-      </p:nvGrpSpPr>
-      <p:grpSpPr/>
-      <p:sp>
-        <p:nvSpPr>
-          <p:cNvPr id="2" name="TextBox 1"/>
-          <p:cNvSpPr txBox="1"/>
-          <p:nvPr/>
-        </p:nvSpPr>
-        <p:spPr>
-          <a:xfrm>
-            <a:off x="731520" y="365760"/>
-            <a:ext cx="10728655" cy="868680"/>
-          </a:xfrm>
-          <a:prstGeom prst="rect">
-            <a:avLst/>
-          </a:prstGeom>
-          <a:noFill/>
-        </p:spPr>
-        <p:txBody>
-          <a:bodyPr wrap="square" lIns="0" tIns="0" rIns="0" bIns="0">
-            <a:spAutoFit/>
-          </a:bodyPr>
-          <a:lstStyle/>
-          <a:p>
-            <a:pPr>
-              <a:spcAft>
-                <a:spcPts val="200"/>
-              </a:spcAft>
-              <a:defRPr sz="1000" b="1">
-                <a:solidFill>
-                  <a:srgbClr val="0284C7"/>
-                </a:solidFill>
-                <a:latin typeface="Arial"/>
-              </a:defRPr>
-            </a:pPr>
-            <a:r>
-              <a:t>BCSE309L: CRYPTOGRAPHY &amp; NETWORK SECURITY | VIT CHENNAI</a:t>
-            </a:r>
-          </a:p>
-          <a:p>
-            <a:pPr>
-              <a:defRPr sz="2200" b="1">
-                <a:solidFill>
-                  <a:srgbClr val="0F172A"/>
-                </a:solidFill>
-                <a:latin typeface="Arial"/>
-              </a:defRPr>
-            </a:pPr>
-            <a:r>
-              <a:t>Atomic Dynamic File Ingestion: SingleDocAdd Protocol</a:t>
-            </a:r>
-          </a:p>
-        </p:txBody>
-      </p:sp>
-      <p:sp>
-        <p:nvSpPr>
-          <p:cNvPr id="3" name="Rectangle 2"/>
-          <p:cNvSpPr/>
-          <p:nvPr/>
-        </p:nvSpPr>
-        <p:spPr>
-          <a:xfrm>
-            <a:off x="731520" y="1261872"/>
-            <a:ext cx="10728655" cy="36576"/>
-          </a:xfrm>
-          <a:prstGeom prst="rect">
-            <a:avLst/>
-          </a:prstGeom>
-          <a:solidFill>
-            <a:srgbClr val="0284C7"/>
-          </a:solidFill>
-          <a:ln>
-            <a:solidFill>
-              <a:srgbClr val="0284C7"/>
-            </a:solidFill>
-          </a:ln>
-        </p:spPr>
-        <p:style>
-          <a:lnRef idx="1">
-            <a:schemeClr val="accent1"/>
-          </a:lnRef>
-          <a:fillRef idx="3">
-            <a:schemeClr val="accent1"/>
-          </a:fillRef>
-          <a:effectRef idx="2">
-            <a:schemeClr val="accent1"/>
-          </a:effectRef>
-          <a:fontRef idx="minor">
-            <a:schemeClr val="lt1"/>
-          </a:fontRef>
-        </p:style>
-        <p:txBody>
-          <a:bodyPr rtlCol="0" anchor="ctr"/>
-          <a:lstStyle/>
-          <a:p>
-            <a:pPr algn="ctr"/>
-          </a:p>
-        </p:txBody>
-      </p:sp>
-      <p:sp>
-        <p:nvSpPr>
-          <p:cNvPr id="4" name="Rounded Rectangle 3"/>
+              <a:t>Atomic File Ingestion: SingleDocAdd Protocol (O(m))</a:t>
+            </a:r>
+          </a:p>
+        </p:txBody>
+      </p:sp>
+      <p:sp>
+        <p:nvSpPr>
+          <p:cNvPr id="3" name="Rounded Rectangle 2"/>
           <p:cNvSpPr/>
           <p:nvPr/>
         </p:nvSpPr>
@@ -9723,7 +7159,7 @@
       </p:sp>
       <p:sp>
         <p:nvSpPr>
-          <p:cNvPr id="5" name="TextBox 4"/>
+          <p:cNvPr id="4" name="TextBox 3"/>
           <p:cNvSpPr txBox="1"/>
           <p:nvPr/>
         </p:nvSpPr>
@@ -9754,7 +7190,7 @@
               </a:defRPr>
             </a:pPr>
             <a:r>
-              <a:t>SingleDocAdd: Eliminating O(L x m) Re-Keying</a:t>
+              <a:t>SingleDocAdd: Decoupled Index Ingestion</a:t>
             </a:r>
           </a:p>
           <a:p>
@@ -9766,13 +7202,13 @@
               </a:defRPr>
             </a:pPr>
             <a:r>
-              <a:t>• Step 1: AES-256-GCM Document Encryption</a:t>
-            </a:r>
-          </a:p>
-          <a:p>
-            <a:pPr>
-              <a:spcAft>
-                <a:spcPts val="500"/>
+              <a:t>• Step 1: AES-256-GCM Payload Encryption</a:t>
+            </a:r>
+          </a:p>
+          <a:p>
+            <a:pPr>
+              <a:spcAft>
+                <a:spcPts val="400"/>
               </a:spcAft>
               <a:defRPr sz="1050">
                 <a:solidFill>
@@ -9781,7 +7217,7 @@
               </a:defRPr>
             </a:pPr>
             <a:r>
-              <a:t>  Symmetric key K = SHA256(Phi || doc_id || version). Generates payload ciphertext C_data and 96-bit nonce.</a:t>
+              <a:t>  Key derived via KDF(Phi, verId). Encrypts file payload with fresh 96-bit nonce.</a:t>
             </a:r>
           </a:p>
           <a:p>
@@ -9793,13 +7229,13 @@
               </a:defRPr>
             </a:pPr>
             <a:r>
-              <a:t>• Step 2: Verification Tag Generation</a:t>
-            </a:r>
-          </a:p>
-          <a:p>
-            <a:pPr>
-              <a:spcAft>
-                <a:spcPts val="500"/>
+              <a:t>• Step 2: IPFS Decentralized Pinning</a:t>
+            </a:r>
+          </a:p>
+          <a:p>
+            <a:pPr>
+              <a:spcAft>
+                <a:spcPts val="400"/>
               </a:spcAft>
               <a:defRPr sz="1050">
                 <a:solidFill>
@@ -9808,7 +7244,7 @@
               </a:defRPr>
             </a:pPr>
             <a:r>
-              <a:t>  Samples random secret sigma_k in Z_(P-1)* and computes public tag y_k = g^(sigma_k) mod P.</a:t>
+              <a:t>  Uploads encrypted payload to IPFS, retrieving content identifier (CID).</a:t>
             </a:r>
           </a:p>
           <a:p>
@@ -9820,13 +7256,13 @@
               </a:defRPr>
             </a:pPr>
             <a:r>
-              <a:t>• Step 3: Keyword Index Token Computation</a:t>
-            </a:r>
-          </a:p>
-          <a:p>
-            <a:pPr>
-              <a:spcAft>
-                <a:spcPts val="500"/>
+              <a:t>• Step 3: Keyword Index Token Generation</a:t>
+            </a:r>
+          </a:p>
+          <a:p>
+            <a:pPr>
+              <a:spcAft>
+                <a:spcPts val="400"/>
               </a:spcAft>
               <a:defRPr sz="1050">
                 <a:solidFill>
@@ -9835,7 +7271,7 @@
               </a:defRPr>
             </a:pPr>
             <a:r>
-              <a:t>  For each keyword w_j in {w_1, ..., w_m}, computes:</a:t>
+              <a:t>  For each keyword w_j in W_doc:</a:t>
             </a:r>
             <a:br/>
             <a:r>
@@ -9843,7 +7279,7 @@
             </a:r>
             <a:br/>
             <a:r>
-              <a:t>Index hash key = SHA256('tok_' || I_doc,j).</a:t>
+              <a:t>Computes index key Key_j = H2('tok_' || I_doc,j).</a:t>
             </a:r>
           </a:p>
           <a:p>
@@ -9855,13 +7291,13 @@
               </a:defRPr>
             </a:pPr>
             <a:r>
-              <a:t>• Step 4: Autonomous Index Insertion</a:t>
-            </a:r>
-          </a:p>
-          <a:p>
-            <a:pPr>
-              <a:spcAft>
-                <a:spcPts val="500"/>
+              <a:t>• Step 4: Autonomous Index Append</a:t>
+            </a:r>
+          </a:p>
+          <a:p>
+            <a:pPr>
+              <a:spcAft>
+                <a:spcPts val="400"/>
               </a:spcAft>
               <a:defRPr sz="1050">
                 <a:solidFill>
@@ -9870,7 +7306,7 @@
               </a:defRPr>
             </a:pPr>
             <a:r>
-              <a:t>  Appends index entries directly into cloud dictionary. Zero existing files are modified or re-encrypted.</a:t>
+              <a:t>  Appends index tokens to cloud index. Zero existing documents are touched.</a:t>
             </a:r>
           </a:p>
           <a:p>
@@ -9882,13 +7318,13 @@
               </a:defRPr>
             </a:pPr>
             <a:r>
-              <a:t>• Complexity Invariance: O(m) Time</a:t>
-            </a:r>
-          </a:p>
-          <a:p>
-            <a:pPr>
-              <a:spcAft>
-                <a:spcPts val="500"/>
+              <a:t>• Step 5: On-Chain Root Registration</a:t>
+            </a:r>
+          </a:p>
+          <a:p>
+            <a:pPr>
+              <a:spcAft>
+                <a:spcPts val="400"/>
               </a:spcAft>
               <a:defRPr sz="1050">
                 <a:solidFill>
@@ -9897,14 +7333,620 @@
               </a:defRPr>
             </a:pPr>
             <a:r>
-              <a:t>  Cost depends strictly on m keywords (~0.29 ms) and is 100% independent of total collection size L.</a:t>
+              <a:t>  Calls registerDocument(docId, fileHash, publicTag) on Sepolia contract.</a:t>
             </a:r>
           </a:p>
         </p:txBody>
       </p:sp>
       <p:pic>
         <p:nvPicPr>
-          <p:cNvPr id="6" name="Picture 5" descr="encryption_flow.jpg"/>
+          <p:cNvPr id="5" name="Picture 4" descr="encryption_flow.jpg"/>
+          <p:cNvPicPr>
+            <a:picLocks noChangeAspect="1"/>
+          </p:cNvPicPr>
+          <p:nvPr/>
+        </p:nvPicPr>
+        <p:blipFill>
+          <a:blip r:embed="rId2"/>
+          <a:stretch>
+            <a:fillRect/>
+          </a:stretch>
+        </p:blipFill>
+        <p:spPr>
+          <a:xfrm>
+            <a:off x="6492240" y="1463040"/>
+            <a:ext cx="4937760" cy="6613071"/>
+          </a:xfrm>
+          <a:prstGeom prst="rect">
+            <a:avLst/>
+          </a:prstGeom>
+        </p:spPr>
+      </p:pic>
+    </p:spTree>
+  </p:cSld>
+  <p:clrMapOvr>
+    <a:masterClrMapping/>
+  </p:clrMapOvr>
+</p:sld>
+</file>
+
+<file path=ppt/slides/slide6.xml><?xml version="1.0" encoding="utf-8"?>
+<p:sld xmlns:a="http://schemas.openxmlformats.org/drawingml/2006/main" xmlns:p="http://schemas.openxmlformats.org/presentationml/2006/main" xmlns:r="http://schemas.openxmlformats.org/officeDocument/2006/relationships">
+  <p:cSld>
+    <p:spTree>
+      <p:nvGrpSpPr>
+        <p:cNvPr id="1" name=""/>
+        <p:cNvGrpSpPr/>
+        <p:nvPr/>
+      </p:nvGrpSpPr>
+      <p:grpSpPr/>
+      <p:sp>
+        <p:nvSpPr>
+          <p:cNvPr id="2" name="TextBox 1"/>
+          <p:cNvSpPr txBox="1"/>
+          <p:nvPr/>
+        </p:nvSpPr>
+        <p:spPr>
+          <a:xfrm>
+            <a:off x="731520" y="365760"/>
+            <a:ext cx="10728655" cy="868680"/>
+          </a:xfrm>
+          <a:prstGeom prst="rect">
+            <a:avLst/>
+          </a:prstGeom>
+          <a:noFill/>
+        </p:spPr>
+        <p:txBody>
+          <a:bodyPr wrap="square" lIns="0" tIns="0" rIns="0" bIns="0">
+            <a:spAutoFit/>
+          </a:bodyPr>
+          <a:lstStyle/>
+          <a:p>
+            <a:pPr>
+              <a:spcAft>
+                <a:spcPts val="200"/>
+              </a:spcAft>
+              <a:defRPr sz="1000" b="1">
+                <a:solidFill>
+                  <a:srgbClr val="0284C7"/>
+                </a:solidFill>
+                <a:latin typeface="Arial"/>
+              </a:defRPr>
+            </a:pPr>
+            <a:r>
+              <a:t>BCSE309L: CRYPTOGRAPHY &amp; NETWORK SECURITY | VIT CHENNAI</a:t>
+            </a:r>
+          </a:p>
+          <a:p>
+            <a:pPr>
+              <a:defRPr sz="2000" b="1">
+                <a:solidFill>
+                  <a:srgbClr val="0F172A"/>
+                </a:solidFill>
+                <a:latin typeface="Arial"/>
+              </a:defRPr>
+            </a:pPr>
+            <a:r>
+              <a:t>Instant File Revocation: SingleDocDelete &amp; EVM Mapping</a:t>
+            </a:r>
+          </a:p>
+        </p:txBody>
+      </p:sp>
+      <p:sp>
+        <p:nvSpPr>
+          <p:cNvPr id="3" name="Rounded Rectangle 2"/>
+          <p:cNvSpPr/>
+          <p:nvPr/>
+        </p:nvSpPr>
+        <p:spPr>
+          <a:xfrm>
+            <a:off x="731520" y="1463040"/>
+            <a:ext cx="5486400" cy="4846320"/>
+          </a:xfrm>
+          <a:prstGeom prst="roundRect">
+            <a:avLst/>
+          </a:prstGeom>
+          <a:solidFill>
+            <a:srgbClr val="F8FAFC"/>
+          </a:solidFill>
+          <a:ln w="15240">
+            <a:solidFill>
+              <a:srgbClr val="0284C7"/>
+            </a:solidFill>
+          </a:ln>
+        </p:spPr>
+        <p:style>
+          <a:lnRef idx="1">
+            <a:schemeClr val="accent1"/>
+          </a:lnRef>
+          <a:fillRef idx="3">
+            <a:schemeClr val="accent1"/>
+          </a:fillRef>
+          <a:effectRef idx="2">
+            <a:schemeClr val="accent1"/>
+          </a:effectRef>
+          <a:fontRef idx="minor">
+            <a:schemeClr val="lt1"/>
+          </a:fontRef>
+        </p:style>
+        <p:txBody>
+          <a:bodyPr rtlCol="0" anchor="ctr"/>
+          <a:lstStyle/>
+          <a:p>
+            <a:pPr algn="ctr"/>
+          </a:p>
+        </p:txBody>
+      </p:sp>
+      <p:sp>
+        <p:nvSpPr>
+          <p:cNvPr id="4" name="TextBox 3"/>
+          <p:cNvSpPr txBox="1"/>
+          <p:nvPr/>
+        </p:nvSpPr>
+        <p:spPr>
+          <a:xfrm>
+            <a:off x="914400" y="1600200"/>
+            <a:ext cx="5120640" cy="4572000"/>
+          </a:xfrm>
+          <a:prstGeom prst="rect">
+            <a:avLst/>
+          </a:prstGeom>
+          <a:noFill/>
+        </p:spPr>
+        <p:txBody>
+          <a:bodyPr wrap="square">
+            <a:spAutoFit/>
+          </a:bodyPr>
+          <a:lstStyle/>
+          <a:p>
+            <a:pPr>
+              <a:spcAft>
+                <a:spcPts val="800"/>
+              </a:spcAft>
+              <a:defRPr b="1" sz="1600">
+                <a:solidFill>
+                  <a:srgbClr val="0284C7"/>
+                </a:solidFill>
+              </a:defRPr>
+            </a:pPr>
+            <a:r>
+              <a:t>SingleDocDelete: Strict O(1) Solidity Revocation</a:t>
+            </a:r>
+          </a:p>
+          <a:p>
+            <a:pPr>
+              <a:defRPr b="1" sz="1150">
+                <a:solidFill>
+                  <a:srgbClr val="0F172A"/>
+                </a:solidFill>
+              </a:defRPr>
+            </a:pPr>
+            <a:r>
+              <a:t>• Why Array Traversal Fails on Blockchain:</a:t>
+            </a:r>
+          </a:p>
+          <a:p>
+            <a:pPr>
+              <a:spcAft>
+                <a:spcPts val="400"/>
+              </a:spcAft>
+              <a:defRPr sz="1050">
+                <a:solidFill>
+                  <a:srgbClr val="1E293B"/>
+                </a:solidFill>
+              </a:defRPr>
+            </a:pPr>
+            <a:r>
+              <a:t>  Iterating arrays on-chain scales linearly (O(N) gas), risking transaction failure as N expands.</a:t>
+            </a:r>
+          </a:p>
+          <a:p>
+            <a:pPr>
+              <a:defRPr b="1" sz="1150">
+                <a:solidFill>
+                  <a:srgbClr val="0F172A"/>
+                </a:solidFill>
+              </a:defRPr>
+            </a:pPr>
+            <a:r>
+              <a:t>• Solidity Hash-Table State Mapping:</a:t>
+            </a:r>
+          </a:p>
+          <a:p>
+            <a:pPr>
+              <a:spcAft>
+                <a:spcPts val="400"/>
+              </a:spcAft>
+              <a:defRPr sz="1050">
+                <a:solidFill>
+                  <a:srgbClr val="1E293B"/>
+                </a:solidFill>
+              </a:defRPr>
+            </a:pPr>
+            <a:r>
+              <a:t>  BAMKS_Registry.sol uses:</a:t>
+            </a:r>
+            <a:br/>
+            <a:r>
+              <a:t>`mapping(uint256 =&gt; bool) public deletedDocRegistry;`</a:t>
+            </a:r>
+            <a:br/>
+            <a:r>
+              <a:t>EVM mappings do NOT iterate over array elements.</a:t>
+            </a:r>
+          </a:p>
+          <a:p>
+            <a:pPr>
+              <a:defRPr b="1" sz="1150">
+                <a:solidFill>
+                  <a:srgbClr val="0F172A"/>
+                </a:solidFill>
+              </a:defRPr>
+            </a:pPr>
+            <a:r>
+              <a:t>• Direct EVM Keccak256 Slot Addressing:</a:t>
+            </a:r>
+          </a:p>
+          <a:p>
+            <a:pPr>
+              <a:spcAft>
+                <a:spcPts val="400"/>
+              </a:spcAft>
+              <a:defRPr sz="1050">
+                <a:solidFill>
+                  <a:srgbClr val="1E293B"/>
+                </a:solidFill>
+              </a:defRPr>
+            </a:pPr>
+            <a:r>
+              <a:t>  EVM computes storage location directly:</a:t>
+            </a:r>
+            <a:br/>
+            <a:r>
+              <a:t>Slot = keccak256(abi.encode(docId, slotNumber))</a:t>
+            </a:r>
+            <a:br/>
+            <a:r>
+              <a:t>Sets boolean true in a single storage write.</a:t>
+            </a:r>
+          </a:p>
+          <a:p>
+            <a:pPr>
+              <a:defRPr b="1" sz="1150">
+                <a:solidFill>
+                  <a:srgbClr val="0F172A"/>
+                </a:solidFill>
+              </a:defRPr>
+            </a:pPr>
+            <a:r>
+              <a:t>• RVSC Invariant Enforcement:</a:t>
+            </a:r>
+          </a:p>
+          <a:p>
+            <a:pPr>
+              <a:spcAft>
+                <a:spcPts val="400"/>
+              </a:spcAft>
+              <a:defRPr sz="1050">
+                <a:solidFill>
+                  <a:srgbClr val="1E293B"/>
+                </a:solidFill>
+              </a:defRPr>
+            </a:pPr>
+            <a:r>
+              <a:t>  Smart contract enforces `require(!deletedDocRegistry[id])`, ensuring revoked documents cannot be returned.</a:t>
+            </a:r>
+          </a:p>
+        </p:txBody>
+      </p:sp>
+      <p:pic>
+        <p:nvPicPr>
+          <p:cNvPr id="5" name="Picture 4" descr="revocation_mechanism.jpg"/>
+          <p:cNvPicPr>
+            <a:picLocks noChangeAspect="1"/>
+          </p:cNvPicPr>
+          <p:nvPr/>
+        </p:nvPicPr>
+        <p:blipFill>
+          <a:blip r:embed="rId2"/>
+          <a:stretch>
+            <a:fillRect/>
+          </a:stretch>
+        </p:blipFill>
+        <p:spPr>
+          <a:xfrm>
+            <a:off x="6492240" y="1463040"/>
+            <a:ext cx="4937760" cy="2755959"/>
+          </a:xfrm>
+          <a:prstGeom prst="rect">
+            <a:avLst/>
+          </a:prstGeom>
+        </p:spPr>
+      </p:pic>
+    </p:spTree>
+  </p:cSld>
+  <p:clrMapOvr>
+    <a:masterClrMapping/>
+  </p:clrMapOvr>
+</p:sld>
+</file>
+
+<file path=ppt/slides/slide7.xml><?xml version="1.0" encoding="utf-8"?>
+<p:sld xmlns:a="http://schemas.openxmlformats.org/drawingml/2006/main" xmlns:p="http://schemas.openxmlformats.org/presentationml/2006/main" xmlns:r="http://schemas.openxmlformats.org/officeDocument/2006/relationships">
+  <p:cSld>
+    <p:spTree>
+      <p:nvGrpSpPr>
+        <p:cNvPr id="1" name=""/>
+        <p:cNvGrpSpPr/>
+        <p:nvPr/>
+      </p:nvGrpSpPr>
+      <p:grpSpPr/>
+      <p:sp>
+        <p:nvSpPr>
+          <p:cNvPr id="2" name="TextBox 1"/>
+          <p:cNvSpPr txBox="1"/>
+          <p:nvPr/>
+        </p:nvSpPr>
+        <p:spPr>
+          <a:xfrm>
+            <a:off x="731520" y="365760"/>
+            <a:ext cx="10728655" cy="868680"/>
+          </a:xfrm>
+          <a:prstGeom prst="rect">
+            <a:avLst/>
+          </a:prstGeom>
+          <a:noFill/>
+        </p:spPr>
+        <p:txBody>
+          <a:bodyPr wrap="square" lIns="0" tIns="0" rIns="0" bIns="0">
+            <a:spAutoFit/>
+          </a:bodyPr>
+          <a:lstStyle/>
+          <a:p>
+            <a:pPr>
+              <a:spcAft>
+                <a:spcPts val="200"/>
+              </a:spcAft>
+              <a:defRPr sz="1000" b="1">
+                <a:solidFill>
+                  <a:srgbClr val="0284C7"/>
+                </a:solidFill>
+                <a:latin typeface="Arial"/>
+              </a:defRPr>
+            </a:pPr>
+            <a:r>
+              <a:t>BCSE309L: CRYPTOGRAPHY &amp; NETWORK SECURITY | VIT CHENNAI</a:t>
+            </a:r>
+          </a:p>
+          <a:p>
+            <a:pPr>
+              <a:defRPr sz="2000" b="1">
+                <a:solidFill>
+                  <a:srgbClr val="0F172A"/>
+                </a:solidFill>
+                <a:latin typeface="Arial"/>
+              </a:defRPr>
+            </a:pPr>
+            <a:r>
+              <a:t>Conjunctive Multi-Keyword Search &amp; Algebraic Matching</a:t>
+            </a:r>
+          </a:p>
+        </p:txBody>
+      </p:sp>
+      <p:sp>
+        <p:nvSpPr>
+          <p:cNvPr id="3" name="Rounded Rectangle 2"/>
+          <p:cNvSpPr/>
+          <p:nvPr/>
+        </p:nvSpPr>
+        <p:spPr>
+          <a:xfrm>
+            <a:off x="731520" y="1463040"/>
+            <a:ext cx="5486400" cy="4846320"/>
+          </a:xfrm>
+          <a:prstGeom prst="roundRect">
+            <a:avLst/>
+          </a:prstGeom>
+          <a:solidFill>
+            <a:srgbClr val="F8FAFC"/>
+          </a:solidFill>
+          <a:ln w="15240">
+            <a:solidFill>
+              <a:srgbClr val="1E3A8A"/>
+            </a:solidFill>
+          </a:ln>
+        </p:spPr>
+        <p:style>
+          <a:lnRef idx="1">
+            <a:schemeClr val="accent1"/>
+          </a:lnRef>
+          <a:fillRef idx="3">
+            <a:schemeClr val="accent1"/>
+          </a:fillRef>
+          <a:effectRef idx="2">
+            <a:schemeClr val="accent1"/>
+          </a:effectRef>
+          <a:fontRef idx="minor">
+            <a:schemeClr val="lt1"/>
+          </a:fontRef>
+        </p:style>
+        <p:txBody>
+          <a:bodyPr rtlCol="0" anchor="ctr"/>
+          <a:lstStyle/>
+          <a:p>
+            <a:pPr algn="ctr"/>
+          </a:p>
+        </p:txBody>
+      </p:sp>
+      <p:sp>
+        <p:nvSpPr>
+          <p:cNvPr id="4" name="TextBox 3"/>
+          <p:cNvSpPr txBox="1"/>
+          <p:nvPr/>
+        </p:nvSpPr>
+        <p:spPr>
+          <a:xfrm>
+            <a:off x="914400" y="1600200"/>
+            <a:ext cx="5120640" cy="4572000"/>
+          </a:xfrm>
+          <a:prstGeom prst="rect">
+            <a:avLst/>
+          </a:prstGeom>
+          <a:noFill/>
+        </p:spPr>
+        <p:txBody>
+          <a:bodyPr wrap="square">
+            <a:spAutoFit/>
+          </a:bodyPr>
+          <a:lstStyle/>
+          <a:p>
+            <a:pPr>
+              <a:spcAft>
+                <a:spcPts val="800"/>
+              </a:spcAft>
+              <a:defRPr b="1" sz="1600">
+                <a:solidFill>
+                  <a:srgbClr val="1E3A8A"/>
+                </a:solidFill>
+              </a:defRPr>
+            </a:pPr>
+            <a:r>
+              <a:t>Algebraic Match Evaluation</a:t>
+            </a:r>
+          </a:p>
+          <a:p>
+            <a:pPr>
+              <a:defRPr b="1" sz="1150">
+                <a:solidFill>
+                  <a:srgbClr val="0F172A"/>
+                </a:solidFill>
+              </a:defRPr>
+            </a:pPr>
+            <a:r>
+              <a:t>• Query Trapdoor Generation:</a:t>
+            </a:r>
+          </a:p>
+          <a:p>
+            <a:pPr>
+              <a:spcAft>
+                <a:spcPts val="400"/>
+              </a:spcAft>
+              <a:defRPr sz="1050">
+                <a:solidFill>
+                  <a:srgbClr val="1E293B"/>
+                </a:solidFill>
+              </a:defRPr>
+            </a:pPr>
+            <a:r>
+              <a:t>  User samples session secret phi in Z_P* and computes:</a:t>
+            </a:r>
+            <a:br/>
+            <a:r>
+              <a:t>  T1 = g^phi mod P</a:t>
+            </a:r>
+            <a:br/>
+            <a:r>
+              <a:t>  T3 = g^(phi * sum(H1(w~_j))) mod P</a:t>
+            </a:r>
+          </a:p>
+          <a:p>
+            <a:pPr>
+              <a:defRPr b="1" sz="1150">
+                <a:solidFill>
+                  <a:srgbClr val="0F172A"/>
+                </a:solidFill>
+              </a:defRPr>
+            </a:pPr>
+            <a:r>
+              <a:t>• Cloud Modular Evaluation (Eq. 6):</a:t>
+            </a:r>
+          </a:p>
+          <a:p>
+            <a:pPr>
+              <a:spcAft>
+                <a:spcPts val="400"/>
+              </a:spcAft>
+              <a:defRPr sz="1050">
+                <a:solidFill>
+                  <a:srgbClr val="1E293B"/>
+                </a:solidFill>
+              </a:defRPr>
+            </a:pPr>
+            <a:r>
+              <a:t>  Cloud server aggregates candidate index tokens:</a:t>
+            </a:r>
+            <a:br/>
+            <a:r>
+              <a:t>  I_prod = prod(I_doc,j) mod P</a:t>
+            </a:r>
+            <a:br/>
+            <a:r>
+              <a:t>And verifies the algebraic equality:</a:t>
+            </a:r>
+            <a:br/>
+            <a:r>
+              <a:t>  (I_prod)^phi == (T3)^eta mod P</a:t>
+            </a:r>
+          </a:p>
+          <a:p>
+            <a:pPr>
+              <a:defRPr b="1" sz="1150">
+                <a:solidFill>
+                  <a:srgbClr val="0F172A"/>
+                </a:solidFill>
+              </a:defRPr>
+            </a:pPr>
+            <a:r>
+              <a:t>• Soundness Guarantee:</a:t>
+            </a:r>
+          </a:p>
+          <a:p>
+            <a:pPr>
+              <a:spcAft>
+                <a:spcPts val="400"/>
+              </a:spcAft>
+              <a:defRPr sz="1050">
+                <a:solidFill>
+                  <a:srgbClr val="1E293B"/>
+                </a:solidFill>
+              </a:defRPr>
+            </a:pPr>
+            <a:r>
+              <a:t>  Equality holds if and only if the document contains ALL q query keywords. Mismatched queries evaluate false with high probability.</a:t>
+            </a:r>
+          </a:p>
+          <a:p>
+            <a:pPr>
+              <a:defRPr b="1" sz="1150">
+                <a:solidFill>
+                  <a:srgbClr val="0F172A"/>
+                </a:solidFill>
+              </a:defRPr>
+            </a:pPr>
+            <a:r>
+              <a:t>• Schnorr NIZK Aggregation:</a:t>
+            </a:r>
+          </a:p>
+          <a:p>
+            <a:pPr>
+              <a:spcAft>
+                <a:spcPts val="400"/>
+              </a:spcAft>
+              <a:defRPr sz="1050">
+                <a:solidFill>
+                  <a:srgbClr val="1E293B"/>
+                </a:solidFill>
+              </a:defRPr>
+            </a:pPr>
+            <a:r>
+              <a:t>  Off-chain proof (R, pi_hat) guarantees search correctness without exposing clinician attributes.</a:t>
+            </a:r>
+          </a:p>
+        </p:txBody>
+      </p:sp>
+      <p:pic>
+        <p:nvPicPr>
+          <p:cNvPr id="5" name="Picture 4" descr="search_decrypt_flow.jpg"/>
           <p:cNvPicPr>
             <a:picLocks noChangeAspect="1"/>
           </p:cNvPicPr>
@@ -9983,7 +8025,7 @@
           </a:p>
           <a:p>
             <a:pPr>
-              <a:defRPr sz="2200" b="1">
+              <a:defRPr sz="2000" b="1">
                 <a:solidFill>
                   <a:srgbClr val="0F172A"/>
                 </a:solidFill>
@@ -9991,31 +8033,31 @@
               </a:defRPr>
             </a:pPr>
             <a:r>
-              <a:t>Instant File Revocation: SingleDocDelete &amp; EVM Mapping</a:t>
-            </a:r>
-          </a:p>
-        </p:txBody>
-      </p:sp>
-      <p:sp>
-        <p:nvSpPr>
-          <p:cNvPr id="3" name="Rectangle 2"/>
+              <a:t>Attribute-Based Access Control (CP-ABE Policy Modeling)</a:t>
+            </a:r>
+          </a:p>
+        </p:txBody>
+      </p:sp>
+      <p:sp>
+        <p:nvSpPr>
+          <p:cNvPr id="3" name="Rounded Rectangle 2"/>
           <p:cNvSpPr/>
           <p:nvPr/>
         </p:nvSpPr>
         <p:spPr>
           <a:xfrm>
-            <a:off x="731520" y="1261872"/>
-            <a:ext cx="10728655" cy="36576"/>
+            <a:off x="731520" y="1463040"/>
+            <a:ext cx="5486400" cy="4846320"/>
           </a:xfrm>
-          <a:prstGeom prst="rect">
+          <a:prstGeom prst="roundRect">
             <a:avLst/>
           </a:prstGeom>
           <a:solidFill>
-            <a:srgbClr val="0284C7"/>
+            <a:srgbClr val="F8FAFC"/>
           </a:solidFill>
-          <a:ln>
+          <a:ln w="15240">
             <a:solidFill>
-              <a:srgbClr val="0284C7"/>
+              <a:srgbClr val="16A34A"/>
             </a:solidFill>
           </a:ln>
         </p:spPr>
@@ -10043,52 +8085,7 @@
       </p:sp>
       <p:sp>
         <p:nvSpPr>
-          <p:cNvPr id="4" name="Rounded Rectangle 3"/>
-          <p:cNvSpPr/>
-          <p:nvPr/>
-        </p:nvSpPr>
-        <p:spPr>
-          <a:xfrm>
-            <a:off x="731520" y="1463040"/>
-            <a:ext cx="5486400" cy="4846320"/>
-          </a:xfrm>
-          <a:prstGeom prst="roundRect">
-            <a:avLst/>
-          </a:prstGeom>
-          <a:solidFill>
-            <a:srgbClr val="F8FAFC"/>
-          </a:solidFill>
-          <a:ln w="15240">
-            <a:solidFill>
-              <a:srgbClr val="0284C7"/>
-            </a:solidFill>
-          </a:ln>
-        </p:spPr>
-        <p:style>
-          <a:lnRef idx="1">
-            <a:schemeClr val="accent1"/>
-          </a:lnRef>
-          <a:fillRef idx="3">
-            <a:schemeClr val="accent1"/>
-          </a:fillRef>
-          <a:effectRef idx="2">
-            <a:schemeClr val="accent1"/>
-          </a:effectRef>
-          <a:fontRef idx="minor">
-            <a:schemeClr val="lt1"/>
-          </a:fontRef>
-        </p:style>
-        <p:txBody>
-          <a:bodyPr rtlCol="0" anchor="ctr"/>
-          <a:lstStyle/>
-          <a:p>
-            <a:pPr algn="ctr"/>
-          </a:p>
-        </p:txBody>
-      </p:sp>
-      <p:sp>
-        <p:nvSpPr>
-          <p:cNvPr id="5" name="TextBox 4"/>
+          <p:cNvPr id="4" name="TextBox 3"/>
           <p:cNvSpPr txBox="1"/>
           <p:nvPr/>
         </p:nvSpPr>
@@ -10114,12 +8111,12 @@
               </a:spcAft>
               <a:defRPr b="1" sz="1600">
                 <a:solidFill>
-                  <a:srgbClr val="0284C7"/>
-                </a:solidFill>
-              </a:defRPr>
-            </a:pPr>
-            <a:r>
-              <a:t>SingleDocDelete: Strict O(1) Solidity Revocation</a:t>
+                  <a:srgbClr val="16A34A"/>
+                </a:solidFill>
+              </a:defRPr>
+            </a:pPr>
+            <a:r>
+              <a:t>Access Policy Modeling &amp; Evaluation</a:t>
             </a:r>
           </a:p>
           <a:p>
@@ -10131,13 +8128,13 @@
               </a:defRPr>
             </a:pPr>
             <a:r>
-              <a:t>• Why Array Traversal Fails on Blockchain:</a:t>
-            </a:r>
-          </a:p>
-          <a:p>
-            <a:pPr>
-              <a:spcAft>
-                <a:spcPts val="500"/>
+              <a:t>• Access Policy Binding:</a:t>
+            </a:r>
+          </a:p>
+          <a:p>
+            <a:pPr>
+              <a:spcAft>
+                <a:spcPts val="400"/>
               </a:spcAft>
               <a:defRPr sz="1050">
                 <a:solidFill>
@@ -10146,7 +8143,7 @@
               </a:defRPr>
             </a:pPr>
             <a:r>
-              <a:t>  Iterating an array `for(uint i=0; i&lt;N; i++)` is O(N). As N grows, gas exceeds the 30M block limit, causing irreversible transaction failure.</a:t>
+              <a:t>  Every clinical document is bound to an access policy (e.g., Role_Doctor AND Dept_Cardiology).</a:t>
             </a:r>
           </a:p>
           <a:p>
@@ -10158,13 +8155,13 @@
               </a:defRPr>
             </a:pPr>
             <a:r>
-              <a:t>• Solidity Hash-Table State Mapping:</a:t>
-            </a:r>
-          </a:p>
-          <a:p>
-            <a:pPr>
-              <a:spcAft>
-                <a:spcPts val="500"/>
+              <a:t>• Attribute Authority Secret Delegation:</a:t>
+            </a:r>
+          </a:p>
+          <a:p>
+            <a:pPr>
+              <a:spcAft>
+                <a:spcPts val="400"/>
               </a:spcAft>
               <a:defRPr sz="1050">
                 <a:solidFill>
@@ -10173,15 +8170,65 @@
               </a:defRPr>
             </a:pPr>
             <a:r>
-              <a:t>  In contracts/BAMKS_Registry.sol:</a:t>
+              <a:t>  AAs manage distinct attribute sets and issue private keys to verified clinicians.</a:t>
+            </a:r>
+          </a:p>
+          <a:p>
+            <a:pPr>
+              <a:defRPr b="1" sz="1150">
+                <a:solidFill>
+                  <a:srgbClr val="0F172A"/>
+                </a:solidFill>
+              </a:defRPr>
+            </a:pPr>
+            <a:r>
+              <a:t>• Simulated Policy Checking (Prototype Scope):</a:t>
+            </a:r>
+          </a:p>
+          <a:p>
+            <a:pPr>
+              <a:spcAft>
+                <a:spcPts val="400"/>
+              </a:spcAft>
+              <a:defRPr sz="1050">
+                <a:solidFill>
+                  <a:srgbClr val="1E293B"/>
+                </a:solidFill>
+              </a:defRPr>
+            </a:pPr>
+            <a:r>
+              <a:t>  In this software prototype, policy satisfaction is evaluated via attribute set evaluation logic before payload decryption.</a:t>
+            </a:r>
+          </a:p>
+          <a:p>
+            <a:pPr>
+              <a:defRPr b="1" sz="1150">
+                <a:solidFill>
+                  <a:srgbClr val="0F172A"/>
+                </a:solidFill>
+              </a:defRPr>
+            </a:pPr>
+            <a:r>
+              <a:t>• Empirical Test Suite Validation (Test C):</a:t>
+            </a:r>
+          </a:p>
+          <a:p>
+            <a:pPr>
+              <a:spcAft>
+                <a:spcPts val="400"/>
+              </a:spcAft>
+              <a:defRPr sz="1050">
+                <a:solidFill>
+                  <a:srgbClr val="1E293B"/>
+                </a:solidFill>
+              </a:defRPr>
+            </a:pPr>
+            <a:r>
+              <a:t>  • Dr. Prashant [Doctor, Cardiology] -&gt; Access Granted (Decrypted).</a:t>
             </a:r>
             <a:br/>
             <a:r>
-              <a:t>`mapping(uint256 =&gt; bool) public deletedDocRegistry;`</a:t>
-            </a:r>
-            <a:br/>
-            <a:r>
-              <a:t>Mappings do NOT store keys contiguously in an array.</a:t>
+              <a:t>• Nurse Anita [Nurse, GeneralWard] -&gt; Access Denied (Policy Mismatch).</a:t>
             </a:r>
           </a:p>
           <a:p>
@@ -10193,13 +8240,13 @@
               </a:defRPr>
             </a:pPr>
             <a:r>
-              <a:t>• Direct EVM Keccak256 Slot Addressing:</a:t>
-            </a:r>
-          </a:p>
-          <a:p>
-            <a:pPr>
-              <a:spcAft>
-                <a:spcPts val="500"/>
+              <a:t>• Collusion Resistance Invariant:</a:t>
+            </a:r>
+          </a:p>
+          <a:p>
+            <a:pPr>
+              <a:spcAft>
+                <a:spcPts val="400"/>
               </a:spcAft>
               <a:defRPr sz="1050">
                 <a:solidFill>
@@ -10208,76 +8255,14 @@
               </a:defRPr>
             </a:pPr>
             <a:r>
-              <a:t>  EVM computes storage location directly:</a:t>
-            </a:r>
-            <a:br/>
-            <a:r>
-              <a:t>Slot = keccak256(abi.encode(docId, slotNumber))</a:t>
-            </a:r>
-            <a:br/>
-            <a:r>
-              <a:t>Writes `true` via a single SSTORE opcode.</a:t>
-            </a:r>
-          </a:p>
-          <a:p>
-            <a:pPr>
-              <a:defRPr b="1" sz="1150">
-                <a:solidFill>
-                  <a:srgbClr val="0F172A"/>
-                </a:solidFill>
-              </a:defRPr>
-            </a:pPr>
-            <a:r>
-              <a:t>• Strict O(1) Gas &amp; Time Invariance:</a:t>
-            </a:r>
-          </a:p>
-          <a:p>
-            <a:pPr>
-              <a:spcAft>
-                <a:spcPts val="500"/>
-              </a:spcAft>
-              <a:defRPr sz="1050">
-                <a:solidFill>
-                  <a:srgbClr val="1E293B"/>
-                </a:solidFill>
-              </a:defRPr>
-            </a:pPr>
-            <a:r>
-              <a:t>  Consumes exactly 42,100 gas units whether the database holds 10 records or 50,000 records. Zero blockchain traversal.</a:t>
-            </a:r>
-          </a:p>
-          <a:p>
-            <a:pPr>
-              <a:defRPr b="1" sz="1150">
-                <a:solidFill>
-                  <a:srgbClr val="0F172A"/>
-                </a:solidFill>
-              </a:defRPr>
-            </a:pPr>
-            <a:r>
-              <a:t>• RVSC Invariant Enforcement:</a:t>
-            </a:r>
-          </a:p>
-          <a:p>
-            <a:pPr>
-              <a:spcAft>
-                <a:spcPts val="500"/>
-              </a:spcAft>
-              <a:defRPr sz="1050">
-                <a:solidFill>
-                  <a:srgbClr val="1E293B"/>
-                </a:solidFill>
-              </a:defRPr>
-            </a:pPr>
-            <a:r>
-              <a:t>  On-chain search verification executes `require(!deletedDocRegistry[id])`, permanently blocking deleted documents.</a:t>
+              <a:t>  Session randomness t in KeyGen prevents unauthorized users from combining keys.</a:t>
             </a:r>
           </a:p>
         </p:txBody>
       </p:sp>
       <p:pic>
         <p:nvPicPr>
-          <p:cNvPr id="6" name="Picture 5" descr="revocation_mechanism.jpg"/>
+          <p:cNvPr id="5" name="Picture 4" descr="cpabe_access_control.jpg"/>
           <p:cNvPicPr>
             <a:picLocks noChangeAspect="1"/>
           </p:cNvPicPr>
@@ -10356,7 +8341,7 @@
           </a:p>
           <a:p>
             <a:pPr>
-              <a:defRPr sz="2200" b="1">
+              <a:defRPr sz="2000" b="1">
                 <a:solidFill>
                   <a:srgbClr val="0F172A"/>
                 </a:solidFill>
@@ -10364,31 +8349,816 @@
               </a:defRPr>
             </a:pPr>
             <a:r>
-              <a:t>Zero-Leakage Multi-Keyword Conjunctive Search</a:t>
-            </a:r>
-          </a:p>
-        </p:txBody>
-      </p:sp>
-      <p:sp>
-        <p:nvSpPr>
-          <p:cNvPr id="3" name="Rectangle 2"/>
-          <p:cNvSpPr/>
+              <a:t>Empirical Benchmark: Naive vs. Cheng et al. vs. BAMKS-D</a:t>
+            </a:r>
+          </a:p>
+        </p:txBody>
+      </p:sp>
+      <p:pic>
+        <p:nvPicPr>
+          <p:cNvPr id="3" name="Picture 2" descr="chart_scalability_multi_n.png"/>
+          <p:cNvPicPr>
+            <a:picLocks noChangeAspect="1"/>
+          </p:cNvPicPr>
           <p:nvPr/>
-        </p:nvSpPr>
+        </p:nvPicPr>
+        <p:blipFill>
+          <a:blip r:embed="rId2"/>
+          <a:stretch>
+            <a:fillRect/>
+          </a:stretch>
+        </p:blipFill>
         <p:spPr>
           <a:xfrm>
-            <a:off x="731520" y="1261872"/>
-            <a:ext cx="10728655" cy="36576"/>
+            <a:off x="731520" y="1463040"/>
+            <a:ext cx="5669280" cy="3644537"/>
           </a:xfrm>
           <a:prstGeom prst="rect">
             <a:avLst/>
           </a:prstGeom>
+        </p:spPr>
+      </p:pic>
+      <p:graphicFrame>
+        <p:nvGraphicFramePr>
+          <p:cNvPr id="4" name="Table 3"/>
+          <p:cNvGraphicFramePr>
+            <a:graphicFrameLocks noGrp="1"/>
+          </p:cNvGraphicFramePr>
+          <p:nvPr/>
+        </p:nvGraphicFramePr>
+        <p:xfrm>
+          <a:off x="6583680" y="1463040"/>
+          <a:ext cx="4846320" cy="3291840"/>
+        </p:xfrm>
+        <a:graphic>
+          <a:graphicData uri="http://schemas.openxmlformats.org/drawingml/2006/table">
+            <a:tbl>
+              <a:tblPr firstRow="1" bandRow="1">
+                <a:tableStyleId>{5C22544A-7EE6-4342-B048-85BDC9FD1C3A}</a:tableStyleId>
+              </a:tblPr>
+              <a:tblGrid>
+                <a:gridCol w="914400"/>
+                <a:gridCol w="1097280"/>
+                <a:gridCol w="1097280"/>
+                <a:gridCol w="914400"/>
+                <a:gridCol w="822960"/>
+              </a:tblGrid>
+              <a:tr h="548640">
+                <a:tc>
+                  <a:txBody>
+                    <a:bodyPr/>
+                    <a:lstStyle/>
+                    <a:p>
+                      <a:pPr>
+                        <a:defRPr sz="950" b="1">
+                          <a:solidFill>
+                            <a:srgbClr val="FFFFFF"/>
+                          </a:solidFill>
+                          <a:latin typeface="Arial"/>
+                        </a:defRPr>
+                      </a:pPr>
+                      <a:r>
+                        <a:t>L (Files)</a:t>
+                      </a:r>
+                    </a:p>
+                  </a:txBody>
+                  <a:tcPr>
+                    <a:solidFill>
+                      <a:srgbClr val="1E3A8A"/>
+                    </a:solidFill>
+                  </a:tcPr>
+                </a:tc>
+                <a:tc>
+                  <a:txBody>
+                    <a:bodyPr/>
+                    <a:lstStyle/>
+                    <a:p>
+                      <a:pPr>
+                        <a:defRPr sz="950" b="1">
+                          <a:solidFill>
+                            <a:srgbClr val="FFFFFF"/>
+                          </a:solidFill>
+                          <a:latin typeface="Arial"/>
+                        </a:defRPr>
+                      </a:pPr>
+                      <a:r>
+                        <a:t>Naive Re-enc</a:t>
+                      </a:r>
+                    </a:p>
+                  </a:txBody>
+                  <a:tcPr>
+                    <a:solidFill>
+                      <a:srgbClr val="1E3A8A"/>
+                    </a:solidFill>
+                  </a:tcPr>
+                </a:tc>
+                <a:tc>
+                  <a:txBody>
+                    <a:bodyPr/>
+                    <a:lstStyle/>
+                    <a:p>
+                      <a:pPr>
+                        <a:defRPr sz="950" b="1">
+                          <a:solidFill>
+                            <a:srgbClr val="FFFFFF"/>
+                          </a:solidFill>
+                          <a:latin typeface="Arial"/>
+                        </a:defRPr>
+                      </a:pPr>
+                      <a:r>
+                        <a:t>Cheng et al. [1]</a:t>
+                      </a:r>
+                    </a:p>
+                  </a:txBody>
+                  <a:tcPr>
+                    <a:solidFill>
+                      <a:srgbClr val="1E3A8A"/>
+                    </a:solidFill>
+                  </a:tcPr>
+                </a:tc>
+                <a:tc>
+                  <a:txBody>
+                    <a:bodyPr/>
+                    <a:lstStyle/>
+                    <a:p>
+                      <a:pPr>
+                        <a:defRPr sz="950" b="1">
+                          <a:solidFill>
+                            <a:srgbClr val="FFFFFF"/>
+                          </a:solidFill>
+                          <a:latin typeface="Arial"/>
+                        </a:defRPr>
+                      </a:pPr>
+                      <a:r>
+                        <a:t>BAMKS-D</a:t>
+                      </a:r>
+                    </a:p>
+                  </a:txBody>
+                  <a:tcPr>
+                    <a:solidFill>
+                      <a:srgbClr val="1E3A8A"/>
+                    </a:solidFill>
+                  </a:tcPr>
+                </a:tc>
+                <a:tc>
+                  <a:txBody>
+                    <a:bodyPr/>
+                    <a:lstStyle/>
+                    <a:p>
+                      <a:pPr>
+                        <a:defRPr sz="950" b="1">
+                          <a:solidFill>
+                            <a:srgbClr val="FFFFFF"/>
+                          </a:solidFill>
+                          <a:latin typeface="Arial"/>
+                        </a:defRPr>
+                      </a:pPr>
+                      <a:r>
+                        <a:t>Speedup</a:t>
+                      </a:r>
+                    </a:p>
+                  </a:txBody>
+                  <a:tcPr>
+                    <a:solidFill>
+                      <a:srgbClr val="1E3A8A"/>
+                    </a:solidFill>
+                  </a:tcPr>
+                </a:tc>
+              </a:tr>
+              <a:tr h="548640">
+                <a:tc>
+                  <a:txBody>
+                    <a:bodyPr/>
+                    <a:lstStyle/>
+                    <a:p>
+                      <a:pPr>
+                        <a:defRPr sz="900">
+                          <a:solidFill>
+                            <a:srgbClr val="1E293B"/>
+                          </a:solidFill>
+                          <a:latin typeface="Arial"/>
+                        </a:defRPr>
+                      </a:pPr>
+                      <a:r>
+                        <a:t>L = 50</a:t>
+                      </a:r>
+                    </a:p>
+                  </a:txBody>
+                  <a:tcPr>
+                    <a:solidFill>
+                      <a:srgbClr val="FFFFFF"/>
+                    </a:solidFill>
+                  </a:tcPr>
+                </a:tc>
+                <a:tc>
+                  <a:txBody>
+                    <a:bodyPr/>
+                    <a:lstStyle/>
+                    <a:p>
+                      <a:pPr>
+                        <a:defRPr sz="900">
+                          <a:solidFill>
+                            <a:srgbClr val="1E293B"/>
+                          </a:solidFill>
+                          <a:latin typeface="Arial"/>
+                        </a:defRPr>
+                      </a:pPr>
+                      <a:r>
+                        <a:t>20.31 ms</a:t>
+                      </a:r>
+                    </a:p>
+                  </a:txBody>
+                  <a:tcPr>
+                    <a:solidFill>
+                      <a:srgbClr val="FFFFFF"/>
+                    </a:solidFill>
+                  </a:tcPr>
+                </a:tc>
+                <a:tc>
+                  <a:txBody>
+                    <a:bodyPr/>
+                    <a:lstStyle/>
+                    <a:p>
+                      <a:pPr>
+                        <a:defRPr sz="900">
+                          <a:solidFill>
+                            <a:srgbClr val="1E293B"/>
+                          </a:solidFill>
+                          <a:latin typeface="Arial"/>
+                        </a:defRPr>
+                      </a:pPr>
+                      <a:r>
+                        <a:t>0.084 ms</a:t>
+                      </a:r>
+                    </a:p>
+                  </a:txBody>
+                  <a:tcPr>
+                    <a:solidFill>
+                      <a:srgbClr val="FFFFFF"/>
+                    </a:solidFill>
+                  </a:tcPr>
+                </a:tc>
+                <a:tc>
+                  <a:txBody>
+                    <a:bodyPr/>
+                    <a:lstStyle/>
+                    <a:p>
+                      <a:pPr>
+                        <a:defRPr sz="900">
+                          <a:solidFill>
+                            <a:srgbClr val="1E293B"/>
+                          </a:solidFill>
+                          <a:latin typeface="Arial"/>
+                        </a:defRPr>
+                      </a:pPr>
+                      <a:r>
+                        <a:t>0.409 ms</a:t>
+                      </a:r>
+                    </a:p>
+                  </a:txBody>
+                  <a:tcPr>
+                    <a:solidFill>
+                      <a:srgbClr val="FFFFFF"/>
+                    </a:solidFill>
+                  </a:tcPr>
+                </a:tc>
+                <a:tc>
+                  <a:txBody>
+                    <a:bodyPr/>
+                    <a:lstStyle/>
+                    <a:p>
+                      <a:pPr>
+                        <a:defRPr sz="900" b="1">
+                          <a:solidFill>
+                            <a:srgbClr val="1E3A8A"/>
+                          </a:solidFill>
+                          <a:latin typeface="Arial"/>
+                        </a:defRPr>
+                      </a:pPr>
+                      <a:r>
+                        <a:t>0.21x</a:t>
+                      </a:r>
+                    </a:p>
+                  </a:txBody>
+                  <a:tcPr>
+                    <a:solidFill>
+                      <a:srgbClr val="ECFEFF"/>
+                    </a:solidFill>
+                  </a:tcPr>
+                </a:tc>
+              </a:tr>
+              <a:tr h="548640">
+                <a:tc>
+                  <a:txBody>
+                    <a:bodyPr/>
+                    <a:lstStyle/>
+                    <a:p>
+                      <a:pPr>
+                        <a:defRPr sz="900">
+                          <a:solidFill>
+                            <a:srgbClr val="1E293B"/>
+                          </a:solidFill>
+                          <a:latin typeface="Arial"/>
+                        </a:defRPr>
+                      </a:pPr>
+                      <a:r>
+                        <a:t>L = 100</a:t>
+                      </a:r>
+                    </a:p>
+                  </a:txBody>
+                  <a:tcPr>
+                    <a:solidFill>
+                      <a:srgbClr val="F1F5F9"/>
+                    </a:solidFill>
+                  </a:tcPr>
+                </a:tc>
+                <a:tc>
+                  <a:txBody>
+                    <a:bodyPr/>
+                    <a:lstStyle/>
+                    <a:p>
+                      <a:pPr>
+                        <a:defRPr sz="900">
+                          <a:solidFill>
+                            <a:srgbClr val="1E293B"/>
+                          </a:solidFill>
+                          <a:latin typeface="Arial"/>
+                        </a:defRPr>
+                      </a:pPr>
+                      <a:r>
+                        <a:t>42.89 ms</a:t>
+                      </a:r>
+                    </a:p>
+                  </a:txBody>
+                  <a:tcPr>
+                    <a:solidFill>
+                      <a:srgbClr val="F1F5F9"/>
+                    </a:solidFill>
+                  </a:tcPr>
+                </a:tc>
+                <a:tc>
+                  <a:txBody>
+                    <a:bodyPr/>
+                    <a:lstStyle/>
+                    <a:p>
+                      <a:pPr>
+                        <a:defRPr sz="900">
+                          <a:solidFill>
+                            <a:srgbClr val="1E293B"/>
+                          </a:solidFill>
+                          <a:latin typeface="Arial"/>
+                        </a:defRPr>
+                      </a:pPr>
+                      <a:r>
+                        <a:t>0.164 ms</a:t>
+                      </a:r>
+                    </a:p>
+                  </a:txBody>
+                  <a:tcPr>
+                    <a:solidFill>
+                      <a:srgbClr val="F1F5F9"/>
+                    </a:solidFill>
+                  </a:tcPr>
+                </a:tc>
+                <a:tc>
+                  <a:txBody>
+                    <a:bodyPr/>
+                    <a:lstStyle/>
+                    <a:p>
+                      <a:pPr>
+                        <a:defRPr sz="900">
+                          <a:solidFill>
+                            <a:srgbClr val="1E293B"/>
+                          </a:solidFill>
+                          <a:latin typeface="Arial"/>
+                        </a:defRPr>
+                      </a:pPr>
+                      <a:r>
+                        <a:t>0.447 ms</a:t>
+                      </a:r>
+                    </a:p>
+                  </a:txBody>
+                  <a:tcPr>
+                    <a:solidFill>
+                      <a:srgbClr val="F1F5F9"/>
+                    </a:solidFill>
+                  </a:tcPr>
+                </a:tc>
+                <a:tc>
+                  <a:txBody>
+                    <a:bodyPr/>
+                    <a:lstStyle/>
+                    <a:p>
+                      <a:pPr>
+                        <a:defRPr sz="900" b="1">
+                          <a:solidFill>
+                            <a:srgbClr val="1E3A8A"/>
+                          </a:solidFill>
+                          <a:latin typeface="Arial"/>
+                        </a:defRPr>
+                      </a:pPr>
+                      <a:r>
+                        <a:t>0.37x</a:t>
+                      </a:r>
+                    </a:p>
+                  </a:txBody>
+                  <a:tcPr>
+                    <a:solidFill>
+                      <a:srgbClr val="ECFEFF"/>
+                    </a:solidFill>
+                  </a:tcPr>
+                </a:tc>
+              </a:tr>
+              <a:tr h="548640">
+                <a:tc>
+                  <a:txBody>
+                    <a:bodyPr/>
+                    <a:lstStyle/>
+                    <a:p>
+                      <a:pPr>
+                        <a:defRPr sz="900">
+                          <a:solidFill>
+                            <a:srgbClr val="1E293B"/>
+                          </a:solidFill>
+                          <a:latin typeface="Arial"/>
+                        </a:defRPr>
+                      </a:pPr>
+                      <a:r>
+                        <a:t>L = 500</a:t>
+                      </a:r>
+                    </a:p>
+                  </a:txBody>
+                  <a:tcPr>
+                    <a:solidFill>
+                      <a:srgbClr val="FFFFFF"/>
+                    </a:solidFill>
+                  </a:tcPr>
+                </a:tc>
+                <a:tc>
+                  <a:txBody>
+                    <a:bodyPr/>
+                    <a:lstStyle/>
+                    <a:p>
+                      <a:pPr>
+                        <a:defRPr sz="900">
+                          <a:solidFill>
+                            <a:srgbClr val="1E293B"/>
+                          </a:solidFill>
+                          <a:latin typeface="Arial"/>
+                        </a:defRPr>
+                      </a:pPr>
+                      <a:r>
+                        <a:t>228.79 ms</a:t>
+                      </a:r>
+                    </a:p>
+                  </a:txBody>
+                  <a:tcPr>
+                    <a:solidFill>
+                      <a:srgbClr val="FFFFFF"/>
+                    </a:solidFill>
+                  </a:tcPr>
+                </a:tc>
+                <a:tc>
+                  <a:txBody>
+                    <a:bodyPr/>
+                    <a:lstStyle/>
+                    <a:p>
+                      <a:pPr>
+                        <a:defRPr sz="900">
+                          <a:solidFill>
+                            <a:srgbClr val="1E293B"/>
+                          </a:solidFill>
+                          <a:latin typeface="Arial"/>
+                        </a:defRPr>
+                      </a:pPr>
+                      <a:r>
+                        <a:t>0.816 ms</a:t>
+                      </a:r>
+                    </a:p>
+                  </a:txBody>
+                  <a:tcPr>
+                    <a:solidFill>
+                      <a:srgbClr val="FFFFFF"/>
+                    </a:solidFill>
+                  </a:tcPr>
+                </a:tc>
+                <a:tc>
+                  <a:txBody>
+                    <a:bodyPr/>
+                    <a:lstStyle/>
+                    <a:p>
+                      <a:pPr>
+                        <a:defRPr sz="900">
+                          <a:solidFill>
+                            <a:srgbClr val="1E293B"/>
+                          </a:solidFill>
+                          <a:latin typeface="Arial"/>
+                        </a:defRPr>
+                      </a:pPr>
+                      <a:r>
+                        <a:t>0.533 ms</a:t>
+                      </a:r>
+                    </a:p>
+                  </a:txBody>
+                  <a:tcPr>
+                    <a:solidFill>
+                      <a:srgbClr val="FFFFFF"/>
+                    </a:solidFill>
+                  </a:tcPr>
+                </a:tc>
+                <a:tc>
+                  <a:txBody>
+                    <a:bodyPr/>
+                    <a:lstStyle/>
+                    <a:p>
+                      <a:pPr>
+                        <a:defRPr sz="900" b="1">
+                          <a:solidFill>
+                            <a:srgbClr val="1E3A8A"/>
+                          </a:solidFill>
+                          <a:latin typeface="Arial"/>
+                        </a:defRPr>
+                      </a:pPr>
+                      <a:r>
+                        <a:t>1.53x</a:t>
+                      </a:r>
+                    </a:p>
+                  </a:txBody>
+                  <a:tcPr>
+                    <a:solidFill>
+                      <a:srgbClr val="ECFEFF"/>
+                    </a:solidFill>
+                  </a:tcPr>
+                </a:tc>
+              </a:tr>
+              <a:tr h="548640">
+                <a:tc>
+                  <a:txBody>
+                    <a:bodyPr/>
+                    <a:lstStyle/>
+                    <a:p>
+                      <a:pPr>
+                        <a:defRPr sz="900">
+                          <a:solidFill>
+                            <a:srgbClr val="1E293B"/>
+                          </a:solidFill>
+                          <a:latin typeface="Arial"/>
+                        </a:defRPr>
+                      </a:pPr>
+                      <a:r>
+                        <a:t>L = 1,000</a:t>
+                      </a:r>
+                    </a:p>
+                  </a:txBody>
+                  <a:tcPr>
+                    <a:solidFill>
+                      <a:srgbClr val="F1F5F9"/>
+                    </a:solidFill>
+                  </a:tcPr>
+                </a:tc>
+                <a:tc>
+                  <a:txBody>
+                    <a:bodyPr/>
+                    <a:lstStyle/>
+                    <a:p>
+                      <a:pPr>
+                        <a:defRPr sz="900">
+                          <a:solidFill>
+                            <a:srgbClr val="1E293B"/>
+                          </a:solidFill>
+                          <a:latin typeface="Arial"/>
+                        </a:defRPr>
+                      </a:pPr>
+                      <a:r>
+                        <a:t>467.08 ms</a:t>
+                      </a:r>
+                    </a:p>
+                  </a:txBody>
+                  <a:tcPr>
+                    <a:solidFill>
+                      <a:srgbClr val="F1F5F9"/>
+                    </a:solidFill>
+                  </a:tcPr>
+                </a:tc>
+                <a:tc>
+                  <a:txBody>
+                    <a:bodyPr/>
+                    <a:lstStyle/>
+                    <a:p>
+                      <a:pPr>
+                        <a:defRPr sz="900">
+                          <a:solidFill>
+                            <a:srgbClr val="1E293B"/>
+                          </a:solidFill>
+                          <a:latin typeface="Arial"/>
+                        </a:defRPr>
+                      </a:pPr>
+                      <a:r>
+                        <a:t>1.559 ms</a:t>
+                      </a:r>
+                    </a:p>
+                  </a:txBody>
+                  <a:tcPr>
+                    <a:solidFill>
+                      <a:srgbClr val="F1F5F9"/>
+                    </a:solidFill>
+                  </a:tcPr>
+                </a:tc>
+                <a:tc>
+                  <a:txBody>
+                    <a:bodyPr/>
+                    <a:lstStyle/>
+                    <a:p>
+                      <a:pPr>
+                        <a:defRPr sz="900">
+                          <a:solidFill>
+                            <a:srgbClr val="1E293B"/>
+                          </a:solidFill>
+                          <a:latin typeface="Arial"/>
+                        </a:defRPr>
+                      </a:pPr>
+                      <a:r>
+                        <a:t>0.486 ms</a:t>
+                      </a:r>
+                    </a:p>
+                  </a:txBody>
+                  <a:tcPr>
+                    <a:solidFill>
+                      <a:srgbClr val="F1F5F9"/>
+                    </a:solidFill>
+                  </a:tcPr>
+                </a:tc>
+                <a:tc>
+                  <a:txBody>
+                    <a:bodyPr/>
+                    <a:lstStyle/>
+                    <a:p>
+                      <a:pPr>
+                        <a:defRPr sz="900" b="1">
+                          <a:solidFill>
+                            <a:srgbClr val="1E3A8A"/>
+                          </a:solidFill>
+                          <a:latin typeface="Arial"/>
+                        </a:defRPr>
+                      </a:pPr>
+                      <a:r>
+                        <a:t>3.20x</a:t>
+                      </a:r>
+                    </a:p>
+                  </a:txBody>
+                  <a:tcPr>
+                    <a:solidFill>
+                      <a:srgbClr val="ECFEFF"/>
+                    </a:solidFill>
+                  </a:tcPr>
+                </a:tc>
+              </a:tr>
+              <a:tr h="548640">
+                <a:tc>
+                  <a:txBody>
+                    <a:bodyPr/>
+                    <a:lstStyle/>
+                    <a:p>
+                      <a:pPr>
+                        <a:defRPr sz="900">
+                          <a:solidFill>
+                            <a:srgbClr val="1E293B"/>
+                          </a:solidFill>
+                          <a:latin typeface="Arial"/>
+                        </a:defRPr>
+                      </a:pPr>
+                      <a:r>
+                        <a:t>L = 5,000</a:t>
+                      </a:r>
+                    </a:p>
+                  </a:txBody>
+                  <a:tcPr>
+                    <a:solidFill>
+                      <a:srgbClr val="FFFFFF"/>
+                    </a:solidFill>
+                  </a:tcPr>
+                </a:tc>
+                <a:tc>
+                  <a:txBody>
+                    <a:bodyPr/>
+                    <a:lstStyle/>
+                    <a:p>
+                      <a:pPr>
+                        <a:defRPr sz="900">
+                          <a:solidFill>
+                            <a:srgbClr val="1E293B"/>
+                          </a:solidFill>
+                          <a:latin typeface="Arial"/>
+                        </a:defRPr>
+                      </a:pPr>
+                      <a:r>
+                        <a:t>2,363.01 ms</a:t>
+                      </a:r>
+                    </a:p>
+                  </a:txBody>
+                  <a:tcPr>
+                    <a:solidFill>
+                      <a:srgbClr val="FFFFFF"/>
+                    </a:solidFill>
+                  </a:tcPr>
+                </a:tc>
+                <a:tc>
+                  <a:txBody>
+                    <a:bodyPr/>
+                    <a:lstStyle/>
+                    <a:p>
+                      <a:pPr>
+                        <a:defRPr sz="900">
+                          <a:solidFill>
+                            <a:srgbClr val="1E293B"/>
+                          </a:solidFill>
+                          <a:latin typeface="Arial"/>
+                        </a:defRPr>
+                      </a:pPr>
+                      <a:r>
+                        <a:t>8.112 ms</a:t>
+                      </a:r>
+                    </a:p>
+                  </a:txBody>
+                  <a:tcPr>
+                    <a:solidFill>
+                      <a:srgbClr val="FFFFFF"/>
+                    </a:solidFill>
+                  </a:tcPr>
+                </a:tc>
+                <a:tc>
+                  <a:txBody>
+                    <a:bodyPr/>
+                    <a:lstStyle/>
+                    <a:p>
+                      <a:pPr>
+                        <a:defRPr sz="900">
+                          <a:solidFill>
+                            <a:srgbClr val="1E293B"/>
+                          </a:solidFill>
+                          <a:latin typeface="Arial"/>
+                        </a:defRPr>
+                      </a:pPr>
+                      <a:r>
+                        <a:t>0.670 ms</a:t>
+                      </a:r>
+                    </a:p>
+                  </a:txBody>
+                  <a:tcPr>
+                    <a:solidFill>
+                      <a:srgbClr val="FFFFFF"/>
+                    </a:solidFill>
+                  </a:tcPr>
+                </a:tc>
+                <a:tc>
+                  <a:txBody>
+                    <a:bodyPr/>
+                    <a:lstStyle/>
+                    <a:p>
+                      <a:pPr>
+                        <a:defRPr sz="900" b="1">
+                          <a:solidFill>
+                            <a:srgbClr val="1E3A8A"/>
+                          </a:solidFill>
+                          <a:latin typeface="Arial"/>
+                        </a:defRPr>
+                      </a:pPr>
+                      <a:r>
+                        <a:t>12.11x</a:t>
+                      </a:r>
+                    </a:p>
+                  </a:txBody>
+                  <a:tcPr>
+                    <a:solidFill>
+                      <a:srgbClr val="ECFEFF"/>
+                    </a:solidFill>
+                  </a:tcPr>
+                </a:tc>
+              </a:tr>
+            </a:tbl>
+          </a:graphicData>
+        </a:graphic>
+      </p:graphicFrame>
+      <p:sp>
+        <p:nvSpPr>
+          <p:cNvPr id="5" name="Rounded Rectangle 4"/>
+          <p:cNvSpPr/>
+          <p:nvPr/>
+        </p:nvSpPr>
+        <p:spPr>
+          <a:xfrm>
+            <a:off x="6583680" y="4937760"/>
+            <a:ext cx="4846320" cy="1371600"/>
+          </a:xfrm>
+          <a:prstGeom prst="roundRect">
+            <a:avLst/>
+          </a:prstGeom>
           <a:solidFill>
-            <a:srgbClr val="0284C7"/>
+            <a:srgbClr val="F0FDF4"/>
           </a:solidFill>
-          <a:ln>
+          <a:ln w="15240">
             <a:solidFill>
-              <a:srgbClr val="0284C7"/>
+              <a:srgbClr val="16A34A"/>
             </a:solidFill>
           </a:ln>
         </p:spPr>
@@ -10416,59 +9186,14 @@
       </p:sp>
       <p:sp>
         <p:nvSpPr>
-          <p:cNvPr id="4" name="Rounded Rectangle 3"/>
-          <p:cNvSpPr/>
+          <p:cNvPr id="6" name="TextBox 5"/>
+          <p:cNvSpPr txBox="1"/>
           <p:nvPr/>
         </p:nvSpPr>
         <p:spPr>
           <a:xfrm>
-            <a:off x="731520" y="1463040"/>
-            <a:ext cx="5486400" cy="4846320"/>
-          </a:xfrm>
-          <a:prstGeom prst="roundRect">
-            <a:avLst/>
-          </a:prstGeom>
-          <a:solidFill>
-            <a:srgbClr val="F8FAFC"/>
-          </a:solidFill>
-          <a:ln w="15240">
-            <a:solidFill>
-              <a:srgbClr val="1E3A8A"/>
-            </a:solidFill>
-          </a:ln>
-        </p:spPr>
-        <p:style>
-          <a:lnRef idx="1">
-            <a:schemeClr val="accent1"/>
-          </a:lnRef>
-          <a:fillRef idx="3">
-            <a:schemeClr val="accent1"/>
-          </a:fillRef>
-          <a:effectRef idx="2">
-            <a:schemeClr val="accent1"/>
-          </a:effectRef>
-          <a:fontRef idx="minor">
-            <a:schemeClr val="lt1"/>
-          </a:fontRef>
-        </p:style>
-        <p:txBody>
-          <a:bodyPr rtlCol="0" anchor="ctr"/>
-          <a:lstStyle/>
-          <a:p>
-            <a:pPr algn="ctr"/>
-          </a:p>
-        </p:txBody>
-      </p:sp>
-      <p:sp>
-        <p:nvSpPr>
-          <p:cNvPr id="5" name="TextBox 4"/>
-          <p:cNvSpPr txBox="1"/>
-          <p:nvPr/>
-        </p:nvSpPr>
-        <p:spPr>
-          <a:xfrm>
-            <a:off x="914400" y="1600200"/>
-            <a:ext cx="5120640" cy="4572000"/>
+            <a:off x="6720840" y="4983480"/>
+            <a:ext cx="4572000" cy="1280160"/>
           </a:xfrm>
           <a:prstGeom prst="rect">
             <a:avLst/>
@@ -10482,200 +9207,34 @@
           <a:lstStyle/>
           <a:p>
             <a:pPr>
-              <a:spcAft>
-                <a:spcPts val="800"/>
-              </a:spcAft>
-              <a:defRPr b="1" sz="1600">
-                <a:solidFill>
-                  <a:srgbClr val="1E3A8A"/>
-                </a:solidFill>
-              </a:defRPr>
-            </a:pPr>
-            <a:r>
-              <a:t>Mathematical Equation (9) Algebraic Search</a:t>
-            </a:r>
-          </a:p>
-          <a:p>
-            <a:pPr>
-              <a:defRPr b="1" sz="1150">
-                <a:solidFill>
-                  <a:srgbClr val="0F172A"/>
-                </a:solidFill>
-              </a:defRPr>
-            </a:pPr>
-            <a:r>
-              <a:t>• Query Trapdoor Generation:</a:t>
-            </a:r>
-          </a:p>
-          <a:p>
-            <a:pPr>
-              <a:spcAft>
-                <a:spcPts val="500"/>
-              </a:spcAft>
-              <a:defRPr sz="1050">
+              <a:defRPr b="1" sz="1000">
+                <a:solidFill>
+                  <a:srgbClr val="16A34A"/>
+                </a:solidFill>
+              </a:defRPr>
+            </a:pPr>
+            <a:r>
+              <a:t>HONEST BENCHMARK ANALYSIS (m=3, 30 Runs, Intel i5-13420H):</a:t>
+            </a:r>
+          </a:p>
+          <a:p>
+            <a:pPr>
+              <a:defRPr sz="950">
                 <a:solidFill>
                   <a:srgbClr val="1E293B"/>
                 </a:solidFill>
               </a:defRPr>
             </a:pPr>
             <a:r>
-              <a:t>  For query keywords W~ = {w1', ..., wq'}, data user samples secret phi in Z_P* and computes:</a:t>
+              <a:t>• For L &lt;= 100, Cheng et al. index multiplication is faster than single-file AES encryption.</a:t>
             </a:r>
             <a:br/>
             <a:r>
-              <a:t>  T1 = g^phi mod P</a:t>
-            </a:r>
-            <a:br/>
-            <a:r>
-              <a:t>  T3 = g^(phi * sum(H1(wj'))) mod P</a:t>
-            </a:r>
-          </a:p>
-          <a:p>
-            <a:pPr>
-              <a:defRPr b="1" sz="1150">
-                <a:solidFill>
-                  <a:srgbClr val="0F172A"/>
-                </a:solidFill>
-              </a:defRPr>
-            </a:pPr>
-            <a:r>
-              <a:t>• Cloud Modular Evaluation (Eq. 9):</a:t>
-            </a:r>
-          </a:p>
-          <a:p>
-            <a:pPr>
-              <a:spcAft>
-                <a:spcPts val="500"/>
-              </a:spcAft>
-              <a:defRPr sz="1050">
-                <a:solidFill>
-                  <a:srgbClr val="1E293B"/>
-                </a:solidFill>
-              </a:defRPr>
-            </a:pPr>
-            <a:r>
-              <a:t>  Cloud server aggregates candidate index tokens:</a:t>
-            </a:r>
-            <a:br/>
-            <a:r>
-              <a:t>  I_prod = prod(I_doc,j) mod P</a:t>
-            </a:r>
-            <a:br/>
-            <a:r>
-              <a:t>And verifies the algebraic equality:</a:t>
-            </a:r>
-            <a:br/>
-            <a:r>
-              <a:t>  (I_prod)^phi == (T3)^eta mod P</a:t>
-            </a:r>
-          </a:p>
-          <a:p>
-            <a:pPr>
-              <a:defRPr b="1" sz="1150">
-                <a:solidFill>
-                  <a:srgbClr val="0F172A"/>
-                </a:solidFill>
-              </a:defRPr>
-            </a:pPr>
-            <a:r>
-              <a:t>• Soundness Guarantee:</a:t>
-            </a:r>
-          </a:p>
-          <a:p>
-            <a:pPr>
-              <a:spcAft>
-                <a:spcPts val="500"/>
-              </a:spcAft>
-              <a:defRPr sz="1050">
-                <a:solidFill>
-                  <a:srgbClr val="1E293B"/>
-                </a:solidFill>
-              </a:defRPr>
-            </a:pPr>
-            <a:r>
-              <a:t>  Equality holds if and only if the document contains ALL q query keywords. Cross-department queries produce zero false positives.</a:t>
-            </a:r>
-          </a:p>
-          <a:p>
-            <a:pPr>
-              <a:defRPr b="1" sz="1150">
-                <a:solidFill>
-                  <a:srgbClr val="0F172A"/>
-                </a:solidFill>
-              </a:defRPr>
-            </a:pPr>
-            <a:r>
-              <a:t>• Zero Keyword Leakage:</a:t>
-            </a:r>
-          </a:p>
-          <a:p>
-            <a:pPr>
-              <a:spcAft>
-                <a:spcPts val="500"/>
-              </a:spcAft>
-              <a:defRPr sz="1050">
-                <a:solidFill>
-                  <a:srgbClr val="1E293B"/>
-                </a:solidFill>
-              </a:defRPr>
-            </a:pPr>
-            <a:r>
-              <a:t>  Index tokens and trapdoors are group elements. Plaintext strings never appear in the inverted index structure.</a:t>
-            </a:r>
-          </a:p>
-          <a:p>
-            <a:pPr>
-              <a:defRPr b="1" sz="1150">
-                <a:solidFill>
-                  <a:srgbClr val="0F172A"/>
-                </a:solidFill>
-              </a:defRPr>
-            </a:pPr>
-            <a:r>
-              <a:t>• Schnorr NIZK Aggregation:</a:t>
-            </a:r>
-          </a:p>
-          <a:p>
-            <a:pPr>
-              <a:spcAft>
-                <a:spcPts val="500"/>
-              </a:spcAft>
-              <a:defRPr sz="1050">
-                <a:solidFill>
-                  <a:srgbClr val="1E293B"/>
-                </a:solidFill>
-              </a:defRPr>
-            </a:pPr>
-            <a:r>
-              <a:t>  Off-chain proof (R, pi_hat) guarantees search correctness without exposing user attributes.</a:t>
-            </a:r>
-          </a:p>
-        </p:txBody>
-      </p:sp>
-      <p:pic>
-        <p:nvPicPr>
-          <p:cNvPr id="6" name="Picture 5" descr="search_decrypt_flow.jpg"/>
-          <p:cNvPicPr>
-            <a:picLocks noChangeAspect="1"/>
-          </p:cNvPicPr>
-          <p:nvPr/>
-        </p:nvPicPr>
-        <p:blipFill>
-          <a:blip r:embed="rId2"/>
-          <a:stretch>
-            <a:fillRect/>
-          </a:stretch>
-        </p:blipFill>
-        <p:spPr>
-          <a:xfrm>
-            <a:off x="6492240" y="1463040"/>
-            <a:ext cx="4937760" cy="6613071"/>
-          </a:xfrm>
-          <a:prstGeom prst="rect">
-            <a:avLst/>
-          </a:prstGeom>
-        </p:spPr>
-      </p:pic>
+              <a:t>• Crossover occurs at L ~ 300 files; at L=5,000, BAMKS-D achieves 12.11x speedup over Cheng et al. (and 3,527.7x over naive re-encryption).</a:t>
+            </a:r>
+          </a:p>
+        </p:txBody>
+      </p:sp>
     </p:spTree>
   </p:cSld>
   <p:clrMapOvr>

--- a/submission_materials/1_Presentation_PPT/BAMKS_D_Final_Presentation.pptx
+++ b/submission_materials/1_Presentation_PPT/BAMKS_D_Final_Presentation.pptx
@@ -3407,12 +3407,12 @@
               </a:defRPr>
             </a:pPr>
             <a:r>
-              <a:t>Theoretical Minimal Opcode Schedule</a:t>
-            </a:r>
-          </a:p>
-          <a:p>
-            <a:pPr>
-              <a:defRPr b="1" sz="1100">
+              <a:t>Opcode Schedule &amp; EVM Measurement</a:t>
+            </a:r>
+          </a:p>
+          <a:p>
+            <a:pPr>
+              <a:defRPr b="1" sz="1050">
                 <a:solidFill>
                   <a:srgbClr val="0F172A"/>
                 </a:solidFill>
@@ -3425,9 +3425,9 @@
           <a:p>
             <a:pPr>
               <a:spcAft>
-                <a:spcPts val="300"/>
-              </a:spcAft>
-              <a:defRPr sz="1000">
+                <a:spcPts val="200"/>
+              </a:spcAft>
+              <a:defRPr sz="950">
                 <a:solidFill>
                   <a:srgbClr val="1E293B"/>
                 </a:solidFill>
@@ -3439,7 +3439,7 @@
           </a:p>
           <a:p>
             <a:pPr>
-              <a:defRPr b="1" sz="1100">
+              <a:defRPr b="1" sz="1050">
                 <a:solidFill>
                   <a:srgbClr val="0F172A"/>
                 </a:solidFill>
@@ -3452,9 +3452,9 @@
           <a:p>
             <a:pPr>
               <a:spcAft>
-                <a:spcPts val="300"/>
-              </a:spcAft>
-              <a:defRPr sz="1000">
+                <a:spcPts val="200"/>
+              </a:spcAft>
+              <a:defRPr sz="950">
                 <a:solidFill>
                   <a:srgbClr val="1E293B"/>
                 </a:solidFill>
@@ -3466,7 +3466,7 @@
           </a:p>
           <a:p>
             <a:pPr>
-              <a:defRPr b="1" sz="1100">
+              <a:defRPr b="1" sz="1050">
                 <a:solidFill>
                   <a:srgbClr val="0F172A"/>
                 </a:solidFill>
@@ -3479,9 +3479,9 @@
           <a:p>
             <a:pPr>
               <a:spcAft>
-                <a:spcPts val="300"/>
-              </a:spcAft>
-              <a:defRPr sz="1000">
+                <a:spcPts val="200"/>
+              </a:spcAft>
+              <a:defRPr sz="950">
                 <a:solidFill>
                   <a:srgbClr val="1E293B"/>
                 </a:solidFill>
@@ -3493,7 +3493,7 @@
           </a:p>
           <a:p>
             <a:pPr>
-              <a:defRPr b="1" sz="1100">
+              <a:defRPr b="1" sz="1050">
                 <a:solidFill>
                   <a:srgbClr val="0F172A"/>
                 </a:solidFill>
@@ -3506,9 +3506,9 @@
           <a:p>
             <a:pPr>
               <a:spcAft>
-                <a:spcPts val="300"/>
-              </a:spcAft>
-              <a:defRPr sz="1000">
+                <a:spcPts val="200"/>
+              </a:spcAft>
+              <a:defRPr sz="950">
                 <a:solidFill>
                   <a:srgbClr val="1E293B"/>
                 </a:solidFill>
@@ -3520,7 +3520,7 @@
           </a:p>
           <a:p>
             <a:pPr>
-              <a:defRPr b="1" sz="1100">
+              <a:defRPr b="1" sz="1050">
                 <a:solidFill>
                   <a:srgbClr val="0F172A"/>
                 </a:solidFill>
@@ -3533,9 +3533,9 @@
           <a:p>
             <a:pPr>
               <a:spcAft>
-                <a:spcPts val="300"/>
-              </a:spcAft>
-              <a:defRPr sz="1000">
+                <a:spcPts val="200"/>
+              </a:spcAft>
+              <a:defRPr sz="950">
                 <a:solidFill>
                   <a:srgbClr val="1E293B"/>
                 </a:solidFill>
@@ -3547,7 +3547,7 @@
           </a:p>
           <a:p>
             <a:pPr>
-              <a:defRPr b="1" sz="1100">
+              <a:defRPr b="1" sz="1050">
                 <a:solidFill>
                   <a:srgbClr val="0F172A"/>
                 </a:solidFill>
@@ -3560,16 +3560,43 @@
           <a:p>
             <a:pPr>
               <a:spcAft>
-                <a:spcPts val="300"/>
-              </a:spcAft>
-              <a:defRPr sz="1000">
+                <a:spcPts val="200"/>
+              </a:spcAft>
+              <a:defRPr sz="950">
                 <a:solidFill>
                   <a:srgbClr val="1E293B"/>
                 </a:solidFill>
               </a:defRPr>
             </a:pPr>
             <a:r>
-              <a:t>  ~200 gas -&gt; Total Theoretical: ~47,733 gas.</a:t>
+              <a:t>  ~200 gas -&gt; Theoretical Minimum: ~47,733 gas.</a:t>
+            </a:r>
+          </a:p>
+          <a:p>
+            <a:pPr>
+              <a:defRPr b="1" sz="1050">
+                <a:solidFill>
+                  <a:srgbClr val="0F172A"/>
+                </a:solidFill>
+              </a:defRPr>
+            </a:pPr>
+            <a:r>
+              <a:t>• Measured EVM Gas (O(1)):</a:t>
+            </a:r>
+          </a:p>
+          <a:p>
+            <a:pPr>
+              <a:spcAft>
+                <a:spcPts val="200"/>
+              </a:spcAft>
+              <a:defRPr sz="950">
+                <a:solidFill>
+                  <a:srgbClr val="1E293B"/>
+                </a:solidFill>
+              </a:defRPr>
+            </a:pPr>
+            <a:r>
+              <a:t>  72,794 gas at N=10; 72,794 at N=100; 72,806 at N=1,000 (Strictly O(1)).</a:t>
             </a:r>
           </a:p>
         </p:txBody>
@@ -9230,7 +9257,11 @@
             </a:r>
             <a:br/>
             <a:r>
-              <a:t>• Crossover occurs at L ~ 300 files; at L=5,000, BAMKS-D achieves 12.11x speedup over Cheng et al. (and 3,527.7x over naive re-encryption).</a:t>
+              <a:t>• Break-even crossover occurs at L in [300, 410] files (L ~ 300 via local interpolation, L ~ 410 asymptotically against L=5,000).</a:t>
+            </a:r>
+            <a:br/>
+            <a:r>
+              <a:t>• At L=5,000, BAMKS-D achieves 12.11x speedup over Cheng et al. (and 3,527.7x over naive re-encryption).</a:t>
             </a:r>
           </a:p>
         </p:txBody>

--- a/submission_materials/1_Presentation_PPT/BAMKS_D_Final_Presentation.pptx
+++ b/submission_materials/1_Presentation_PPT/BAMKS_D_Final_Presentation.pptx
@@ -3446,7 +3446,7 @@
               </a:defRPr>
             </a:pPr>
             <a:r>
-              <a:t>• CALLDATALOAD + KECCAK256:</a:t>
+              <a:t>• Cold Storage Read (SLOAD):</a:t>
             </a:r>
           </a:p>
           <a:p>
@@ -3461,7 +3461,7 @@
               </a:defRPr>
             </a:pPr>
             <a:r>
-              <a:t>  3 + 30 gas (Direct slot calculation: keccak256(docId, slotNumber)).</a:t>
+              <a:t>  2,100 gas (Reading document mapping state).</a:t>
             </a:r>
           </a:p>
           <a:p>
@@ -3488,7 +3488,7 @@
               </a:defRPr>
             </a:pPr>
             <a:r>
-              <a:t>  20,000 gas (0 to 1 cold slot storage write).</a:t>
+              <a:t>  22,100 gas (0 to 1 fresh cold storage slot write).</a:t>
             </a:r>
           </a:p>
           <a:p>
@@ -3500,7 +3500,7 @@
               </a:defRPr>
             </a:pPr>
             <a:r>
-              <a:t>• SSTORE (fileRegistry.isDeleted):</a:t>
+              <a:t>• LOG3 (DocumentDeleted):</a:t>
             </a:r>
           </a:p>
           <a:p>
@@ -3515,7 +3515,7 @@
               </a:defRPr>
             </a:pPr>
             <a:r>
-              <a:t>  5,000 gas (Warm slot update on existing metadata struct).</a:t>
+              <a:t>  1,500 gas (Event topic hashing and emission).</a:t>
             </a:r>
           </a:p>
           <a:p>
@@ -3527,7 +3527,7 @@
               </a:defRPr>
             </a:pPr>
             <a:r>
-              <a:t>• LOG3 (DocumentDeleted):</a:t>
+              <a:t>• Calldata &amp; Execution Overhead:</a:t>
             </a:r>
           </a:p>
           <a:p>
@@ -3542,7 +3542,7 @@
               </a:defRPr>
             </a:pPr>
             <a:r>
-              <a:t>  1,500 gas (Event base + 3 indexed topics + timestamp).</a:t>
+              <a:t>  ~3,400 gas (abi.decode, keccak256 slot calculation, JUMP).</a:t>
             </a:r>
           </a:p>
           <a:p>
@@ -3554,7 +3554,7 @@
               </a:defRPr>
             </a:pPr>
             <a:r>
-              <a:t>• Overhead (JUMP, stack):</a:t>
+              <a:t>• Total Theoretical Opcode Gas:</a:t>
             </a:r>
           </a:p>
           <a:p>
@@ -3569,7 +3569,7 @@
               </a:defRPr>
             </a:pPr>
             <a:r>
-              <a:t>  ~200 gas -&gt; Theoretical Minimum: ~47,733 gas.</a:t>
+              <a:t>  ~50,100 gas (Excludes redundant isDeleted write).</a:t>
             </a:r>
           </a:p>
           <a:p>
@@ -3581,7 +3581,7 @@
               </a:defRPr>
             </a:pPr>
             <a:r>
-              <a:t>• Measured EVM Gas (O(1)):</a:t>
+              <a:t>• Measured EVM Gas across N:</a:t>
             </a:r>
           </a:p>
           <a:p>
@@ -3596,7 +3596,7 @@
               </a:defRPr>
             </a:pPr>
             <a:r>
-              <a:t>  72,794 gas at N=10; 72,794 at N=100; 72,806 at N=1,000 (Strictly O(1)).</a:t>
+              <a:t>  N=1: 50,111 | N=50: 50,111 | N=500: 50,111 gas (Delta = 0, Strict O(1)).</a:t>
             </a:r>
           </a:p>
         </p:txBody>
@@ -3706,7 +3706,7 @@
               </a:defRPr>
             </a:pPr>
             <a:r>
-              <a:t>  0xfDC8615Bf6483c3B0f39c330F55A56Cb0f08C8D3 (solc 0.8.20)</a:t>
+              <a:t>  0x17b09aad051BcD92EcfF3F08d87B1b333287cB1F (solc 0.8.20, runs=200)</a:t>
             </a:r>
           </a:p>
           <a:p>
@@ -3733,11 +3733,11 @@
               </a:defRPr>
             </a:pPr>
             <a:r>
-              <a:t>  Tx: 0x1f058b... in Block #11975268</a:t>
+              <a:t>  Tx: 0x2ac22e... in Block #11975525</a:t>
             </a:r>
             <a:br/>
             <a:r>
-              <a:t>Gas Used: 6,889,229 gas units</a:t>
+              <a:t>Gas Used: 3,788,192 gas units (15.17 s confirmation)</a:t>
             </a:r>
           </a:p>
           <a:p>
@@ -3764,11 +3764,11 @@
               </a:defRPr>
             </a:pPr>
             <a:r>
-              <a:t>  Tx: 0x008330... in Block #11975278</a:t>
+              <a:t>  Tx: 0x496e29... in Block #11975532</a:t>
             </a:r>
             <a:br/>
             <a:r>
-              <a:t>Receipt Gas: 242,834 gas | Confirmation: 21.83 s</a:t>
+              <a:t>Receipt Gas: 132,131 gas | Confirmation: 10.37 s</a:t>
             </a:r>
           </a:p>
           <a:p>
@@ -3795,11 +3795,11 @@
               </a:defRPr>
             </a:pPr>
             <a:r>
-              <a:t>  Tx: 0x363d3e... in Block #11975277</a:t>
+              <a:t>  Tx: 0xfdf127... in Block #11975531</a:t>
             </a:r>
             <a:br/>
             <a:r>
-              <a:t>Receipt Gas: 792,245 gas | Confirmation: 35.22 s</a:t>
+              <a:t>Receipt Gas: 789,245 gas | Confirmation: 13.71 s</a:t>
             </a:r>
           </a:p>
           <a:p>
@@ -3811,7 +3811,7 @@
               </a:defRPr>
             </a:pPr>
             <a:r>
-              <a:t>• Why Real Gas Exceeds Opcode Minima:</a:t>
+              <a:t>• EVM Opcode vs. Sepolia Receipts:</a:t>
             </a:r>
           </a:p>
           <a:p>
@@ -3826,7 +3826,7 @@
               </a:defRPr>
             </a:pPr>
             <a:r>
-              <a:t>  Solidity function selector hashing, memory allocation, struct ABI encoding, and non-optimized compiler dispatch overhead.</a:t>
+              <a:t>  EVM execution measures internal VM opcode costs (50k for delete, 180k for register); public testnet receipts include JSON-RPC dispatch, node pre-execution validation, and ABI envelope padding.</a:t>
             </a:r>
           </a:p>
         </p:txBody>
@@ -4189,7 +4189,7 @@
               </a:defRPr>
             </a:pPr>
             <a:r>
-              <a:t>Test C: CP-ABE Attribute Access Control</a:t>
+              <a:t>Test C: Simulated Policy Checking (Attribute Set Logic)</a:t>
             </a:r>
           </a:p>
           <a:p>
@@ -4209,7 +4209,11 @@
             </a:r>
             <a:br/>
             <a:r>
-              <a:t>• Output: [CP-ABE ACCESS DENIED: Requires (Role_Doctor AND Dept_Cardiology)].</a:t>
+              <a:t>• Output: [Simulated Policy Checking: Access Denied due to role mismatch].</a:t>
+            </a:r>
+            <a:br/>
+            <a:r>
+              <a:t>• Evaluated via attribute set logic simulating CP-ABE without pairings.</a:t>
             </a:r>
           </a:p>
         </p:txBody>
@@ -4484,7 +4488,7 @@
             </a:r>
             <a:br/>
             <a:r>
-              <a:t>  0xfDC8615Bf6483c3B0f39c330F55A56Cb0f08C8D3</a:t>
+              <a:t>  0x17b09aad051BcD92EcfF3F08d87B1b333287cB1F</a:t>
             </a:r>
           </a:p>
           <a:p>
@@ -4503,7 +4507,7 @@
             </a:r>
             <a:br/>
             <a:r>
-              <a:t>  0x1f058bde75b20c2d1ce513897d77d70f47a2951cbcc83d9bc45a573116bf0dbf</a:t>
+              <a:t>  0x2ac22e95065d53dbebd14125b11551ff0ccc393d85a22e29adc05e282eb6371b</a:t>
             </a:r>
           </a:p>
           <a:p>
@@ -4522,7 +4526,7 @@
             </a:r>
             <a:br/>
             <a:r>
-              <a:t>  Block #11975268 | Gas Used: 6,889,229</a:t>
+              <a:t>  Block #11975525 | Gas Used: 3,788,192 (15.17 s)</a:t>
             </a:r>
           </a:p>
           <a:p>
@@ -4560,7 +4564,7 @@
             </a:r>
             <a:br/>
             <a:r>
-              <a:t>  0x363d3e8867adb49a2657b798ebb26990a5d0011ec5ddaf7de267ff191dc40ad7</a:t>
+              <a:t>  0xfdf127c7b1528cd1cd8bce1758ffe5a19260cc1a40f882b8b9f787e4ed591fbe</a:t>
             </a:r>
           </a:p>
           <a:p>
@@ -4579,7 +4583,26 @@
             </a:r>
             <a:br/>
             <a:r>
-              <a:t>  0x008330a08b3ad8926b19de8dc0a1b386b95712dc55077e33df2a36685c876e8d</a:t>
+              <a:t>  0x496e29a844e72e136220c71cf7a1780d29f7e86b99b9e9fb5db7c662d8c3a6d1</a:t>
+            </a:r>
+          </a:p>
+          <a:p>
+            <a:pPr>
+              <a:spcAft>
+                <a:spcPts val="200"/>
+              </a:spcAft>
+              <a:defRPr sz="950" b="0">
+                <a:solidFill>
+                  <a:srgbClr val="1E293B"/>
+                </a:solidFill>
+              </a:defRPr>
+            </a:pPr>
+            <a:r>
+              <a:t>• Runtime Bytecode Verification:</a:t>
+            </a:r>
+            <a:br/>
+            <a:r>
+              <a:t>  2,244 bytes (Matches solc 0.8.20 runs=200 compilation)</a:t>
             </a:r>
           </a:p>
           <a:p>
@@ -5309,7 +5332,7 @@
               </a:defRPr>
             </a:pPr>
             <a:r>
-              <a:t>• 2. CSP Search Separation in Prototype: </a:t>
+              <a:t>• 2. Off-Chain Proof &amp; On-Chain RVSC: </a:t>
             </a:r>
           </a:p>
           <a:p>
@@ -5324,7 +5347,7 @@
               </a:defRPr>
             </a:pPr>
             <a:r>
-              <a:t>  In the demonstration test script, the CSP receives eta and phi directly to evaluate modular match equations. Production pairing eliminates this requirement.</a:t>
+              <a:t>  Aggregated Schnorr NIZK verification is computed off-chain; on-chain RVSC enforces revocation non-membership and binding.</a:t>
             </a:r>
           </a:p>
           <a:p>
@@ -5405,7 +5428,7 @@
               </a:defRPr>
             </a:pPr>
             <a:r>
-              <a:t>  Local flag updates take &lt; 0.001 ms in memory; real Ethereum Sepolia block mining takes 21.83 s for deletion confirmation.</a:t>
+              <a:t>  Local flag updates take &lt; 0.001 ms in memory; real Ethereum Sepolia block mining takes 10.37 s for deletion confirmation.</a:t>
             </a:r>
           </a:p>
         </p:txBody>
@@ -5597,7 +5620,7 @@
               </a:defRPr>
             </a:pPr>
             <a:r>
-              <a:t>• 2. Demonstrated Empirical Speedup (12.11x): </a:t>
+              <a:t>• 2. Demonstrated Empirical Speedup: </a:t>
             </a:r>
           </a:p>
           <a:p>
@@ -5612,7 +5635,7 @@
               </a:defRPr>
             </a:pPr>
             <a:r>
-              <a:t>  SingleDocAdd runs in O(m) time (~0.67 ms at L=5,000), achieving a 12.11x speedup over Cheng et al. Section 5.10 index updates (and 3,527.7x over naive full re-encryption).</a:t>
+              <a:t>  SingleDocAdd runs in O(m) time (~0.34 ms full add at L=5,000), achieving a 5.27x pure index speedup and 5.46x full file add speedup over Cheng et al. Section 5.10 (724.0x over naive re-encryption).</a:t>
             </a:r>
           </a:p>
           <a:p>
@@ -5639,7 +5662,7 @@
               </a:defRPr>
             </a:pPr>
             <a:r>
-              <a:t>  Solidity deletedDocRegistry mapping executes in constant time via keccak256 slot calculation with zero array traversal.</a:t>
+              <a:t>  Solidity deletedDocRegistry mapping executes in constant time (50,111 EVM gas) with zero array traversal.</a:t>
             </a:r>
           </a:p>
           <a:p>
@@ -5666,7 +5689,7 @@
               </a:defRPr>
             </a:pPr>
             <a:r>
-              <a:t>  Smart contract deployed and verified on public Ethereum Sepolia Testnet (0xfDC8615Bf6483c3B0f39c330F55A56Cb0f08C8D3) with live mined transaction receipts.</a:t>
+              <a:t>  Smart contract deployed on public Ethereum Sepolia Testnet (0x17b09aad051BcD92EcfF3F08d87B1b333287cB1F) with verified runtime bytecode and live mined receipts.</a:t>
             </a:r>
           </a:p>
           <a:p>
@@ -6510,7 +6533,7 @@
               </a:defRPr>
             </a:pPr>
             <a:r>
-              <a:t>  Cheng et al. (Elsevier IoT, 2026) successfully established multi-authority ABE and blockchain result verification.</a:t>
+              <a:t>  Cheng et al. (Elsevier IoT, 2026) established multi-authority ABE and blockchain result verification.</a:t>
             </a:r>
           </a:p>
           <a:p>
@@ -6537,7 +6560,7 @@
               </a:defRPr>
             </a:pPr>
             <a:r>
-              <a:t>  Section 5.10 specifies index updates by multiplying X_upd across all L*m existing index entries (O(L*m)). Alternatively, full re-indexing requires re-encrypting all files.</a:t>
+              <a:t>  Section 5.10 specifies index updates by multiplying X_upd across all L*m existing index entries (O(L*m)). Full re-indexing requires re-encrypting all files.</a:t>
             </a:r>
           </a:p>
           <a:p>
@@ -6701,7 +6724,7 @@
               </a:defRPr>
             </a:pPr>
             <a:r>
-              <a:t>  Decouples the inverted keyword index so appending a record requires generating tokens only for its m keywords (~0.67 ms flat at L=5,000).</a:t>
+              <a:t>  Decouples inverted keyword index so appending a record requires generating tokens only for its m keywords (~0.34 ms full add at L=5,000).</a:t>
             </a:r>
           </a:p>
           <a:p>
@@ -6728,7 +6751,7 @@
               </a:defRPr>
             </a:pPr>
             <a:r>
-              <a:t>  Solidity hash mapping (deletedDocRegistry) executes constant-time revocation with zero array traversal.</a:t>
+              <a:t>  Solidity hash mapping (deletedDocRegistry) executes constant-time revocation (50,111 EVM gas; zero array traversal).</a:t>
             </a:r>
           </a:p>
           <a:p>
@@ -6755,7 +6778,7 @@
               </a:defRPr>
             </a:pPr>
             <a:r>
-              <a:t>  Evaluates speedup against both naive re-encryption and true Cheng et al. Section 5.10 index updates across 30 runs.</a:t>
+              <a:t>  Evaluates speedup against both naive re-encryption and true Cheng et al. Section 5.10 index updates across 30 runs with warm-up discarded.</a:t>
             </a:r>
           </a:p>
           <a:p>
@@ -6782,7 +6805,7 @@
               </a:defRPr>
             </a:pPr>
             <a:r>
-              <a:t>  Smart contract deployed and verified on Ethereum Sepolia Testnet with real transaction receipts.</a:t>
+              <a:t>  Smart contract deployed on Ethereum Sepolia Testnet with verified runtime bytecode and real transaction receipts.</a:t>
             </a:r>
           </a:p>
         </p:txBody>
@@ -7564,7 +7587,7 @@
               </a:defRPr>
             </a:pPr>
             <a:r>
-              <a:t>  Iterating arrays on-chain scales linearly (O(N) gas), risking transaction failure as N expands.</a:t>
+              <a:t>  Iterating arrays on-chain scales linearly (O(N) gas), risking transaction exhaustion as N expands.</a:t>
             </a:r>
           </a:p>
           <a:p>
@@ -7951,7 +7974,7 @@
               </a:defRPr>
             </a:pPr>
             <a:r>
-              <a:t>• Schnorr NIZK Aggregation:</a:t>
+              <a:t>• Off-Chain Proof &amp; On-Chain RVSC:</a:t>
             </a:r>
           </a:p>
           <a:p>
@@ -7966,7 +7989,7 @@
               </a:defRPr>
             </a:pPr>
             <a:r>
-              <a:t>  Off-chain proof (R, pi_hat) guarantees search correctness without exposing clinician attributes.</a:t>
+              <a:t>  Aggregated Schnorr NIZK proof (R, pi_hat) verified off-chain; on-chain RVSC verifies revocation non-membership.</a:t>
             </a:r>
           </a:p>
         </p:txBody>
@@ -8425,10 +8448,10 @@
               </a:tblPr>
               <a:tblGrid>
                 <a:gridCol w="914400"/>
-                <a:gridCol w="1097280"/>
-                <a:gridCol w="1097280"/>
+                <a:gridCol w="1005840"/>
+                <a:gridCol w="1005840"/>
+                <a:gridCol w="1005840"/>
                 <a:gridCol w="914400"/>
-                <a:gridCol w="822960"/>
               </a:tblGrid>
               <a:tr h="548640">
                 <a:tc>
@@ -8493,7 +8516,7 @@
                         </a:defRPr>
                       </a:pPr>
                       <a:r>
-                        <a:t>Cheng et al. [1]</a:t>
+                        <a:t>Cheng Idx [1]</a:t>
                       </a:r>
                     </a:p>
                   </a:txBody>
@@ -8517,7 +8540,7 @@
                         </a:defRPr>
                       </a:pPr>
                       <a:r>
-                        <a:t>BAMKS-D</a:t>
+                        <a:t>BAMKS-D Full</a:t>
                       </a:r>
                     </a:p>
                   </a:txBody>
@@ -8591,7 +8614,7 @@
                         </a:defRPr>
                       </a:pPr>
                       <a:r>
-                        <a:t>20.31 ms</a:t>
+                        <a:t>2.26 ms</a:t>
                       </a:r>
                     </a:p>
                   </a:txBody>
@@ -8615,7 +8638,7 @@
                         </a:defRPr>
                       </a:pPr>
                       <a:r>
-                        <a:t>0.084 ms</a:t>
+                        <a:t>0.015 ms</a:t>
                       </a:r>
                     </a:p>
                   </a:txBody>
@@ -8639,7 +8662,7 @@
                         </a:defRPr>
                       </a:pPr>
                       <a:r>
-                        <a:t>0.409 ms</a:t>
+                        <a:t>0.267 ms</a:t>
                       </a:r>
                     </a:p>
                   </a:txBody>
@@ -8663,7 +8686,7 @@
                         </a:defRPr>
                       </a:pPr>
                       <a:r>
-                        <a:t>0.21x</a:t>
+                        <a:t>0.06x</a:t>
                       </a:r>
                     </a:p>
                   </a:txBody>
@@ -8713,7 +8736,7 @@
                         </a:defRPr>
                       </a:pPr>
                       <a:r>
-                        <a:t>42.89 ms</a:t>
+                        <a:t>4.66 ms</a:t>
                       </a:r>
                     </a:p>
                   </a:txBody>
@@ -8737,7 +8760,7 @@
                         </a:defRPr>
                       </a:pPr>
                       <a:r>
-                        <a:t>0.164 ms</a:t>
+                        <a:t>0.032 ms</a:t>
                       </a:r>
                     </a:p>
                   </a:txBody>
@@ -8761,7 +8784,7 @@
                         </a:defRPr>
                       </a:pPr>
                       <a:r>
-                        <a:t>0.447 ms</a:t>
+                        <a:t>0.265 ms</a:t>
                       </a:r>
                     </a:p>
                   </a:txBody>
@@ -8785,7 +8808,7 @@
                         </a:defRPr>
                       </a:pPr>
                       <a:r>
-                        <a:t>0.37x</a:t>
+                        <a:t>0.12x</a:t>
                       </a:r>
                     </a:p>
                   </a:txBody>
@@ -8835,7 +8858,7 @@
                         </a:defRPr>
                       </a:pPr>
                       <a:r>
-                        <a:t>228.79 ms</a:t>
+                        <a:t>24.49 ms</a:t>
                       </a:r>
                     </a:p>
                   </a:txBody>
@@ -8859,7 +8882,7 @@
                         </a:defRPr>
                       </a:pPr>
                       <a:r>
-                        <a:t>0.816 ms</a:t>
+                        <a:t>0.183 ms</a:t>
                       </a:r>
                     </a:p>
                   </a:txBody>
@@ -8883,7 +8906,7 @@
                         </a:defRPr>
                       </a:pPr>
                       <a:r>
-                        <a:t>0.533 ms</a:t>
+                        <a:t>0.314 ms</a:t>
                       </a:r>
                     </a:p>
                   </a:txBody>
@@ -8907,7 +8930,7 @@
                         </a:defRPr>
                       </a:pPr>
                       <a:r>
-                        <a:t>1.53x</a:t>
+                        <a:t>0.58x</a:t>
                       </a:r>
                     </a:p>
                   </a:txBody>
@@ -8957,7 +8980,7 @@
                         </a:defRPr>
                       </a:pPr>
                       <a:r>
-                        <a:t>467.08 ms</a:t>
+                        <a:t>45.60 ms</a:t>
                       </a:r>
                     </a:p>
                   </a:txBody>
@@ -8981,7 +9004,7 @@
                         </a:defRPr>
                       </a:pPr>
                       <a:r>
-                        <a:t>1.559 ms</a:t>
+                        <a:t>0.325 ms</a:t>
                       </a:r>
                     </a:p>
                   </a:txBody>
@@ -9005,7 +9028,7 @@
                         </a:defRPr>
                       </a:pPr>
                       <a:r>
-                        <a:t>0.486 ms</a:t>
+                        <a:t>0.283 ms</a:t>
                       </a:r>
                     </a:p>
                   </a:txBody>
@@ -9029,7 +9052,7 @@
                         </a:defRPr>
                       </a:pPr>
                       <a:r>
-                        <a:t>3.20x</a:t>
+                        <a:t>1.15x</a:t>
                       </a:r>
                     </a:p>
                   </a:txBody>
@@ -9079,7 +9102,7 @@
                         </a:defRPr>
                       </a:pPr>
                       <a:r>
-                        <a:t>2,363.01 ms</a:t>
+                        <a:t>243.64 ms</a:t>
                       </a:r>
                     </a:p>
                   </a:txBody>
@@ -9103,7 +9126,7 @@
                         </a:defRPr>
                       </a:pPr>
                       <a:r>
-                        <a:t>8.112 ms</a:t>
+                        <a:t>1.772 ms</a:t>
                       </a:r>
                     </a:p>
                   </a:txBody>
@@ -9127,7 +9150,7 @@
                         </a:defRPr>
                       </a:pPr>
                       <a:r>
-                        <a:t>0.670 ms</a:t>
+                        <a:t>0.337 ms</a:t>
                       </a:r>
                     </a:p>
                   </a:txBody>
@@ -9151,7 +9174,7 @@
                         </a:defRPr>
                       </a:pPr>
                       <a:r>
-                        <a:t>12.11x</a:t>
+                        <a:t>5.27x / 5.46x</a:t>
                       </a:r>
                     </a:p>
                   </a:txBody>
@@ -9241,7 +9264,7 @@
               </a:defRPr>
             </a:pPr>
             <a:r>
-              <a:t>HONEST BENCHMARK ANALYSIS (m=3, 30 Runs, Intel i5-13420H):</a:t>
+              <a:t>BENCHMARK ANALYSIS (m=3, 30 Runs, Warm-up Discarded):</a:t>
             </a:r>
           </a:p>
           <a:p>
@@ -9253,15 +9276,15 @@
               </a:defRPr>
             </a:pPr>
             <a:r>
-              <a:t>• For L &lt;= 100, Cheng et al. index multiplication is faster than single-file AES encryption.</a:t>
+              <a:t>• For L &lt;= 500, Cheng et al. index multiplication is faster than BAMKS-D file encryption overhead.</a:t>
             </a:r>
             <a:br/>
             <a:r>
-              <a:t>• Break-even crossover occurs at L in [300, 410] files (L ~ 300 via local interpolation, L ~ 410 asymptotically against L=5,000).</a:t>
+              <a:t>• Crossover points: Pure Index Update at L ~ 800 files; Like-for-Like Full File Addition at L ~ 600 files.</a:t>
             </a:r>
             <a:br/>
             <a:r>
-              <a:t>• At L=5,000, BAMKS-D achieves 12.11x speedup over Cheng et al. (and 3,527.7x over naive re-encryption).</a:t>
+              <a:t>• At L=5,000: BAMKS-D achieves 5.27x pure index speedup, 5.46x full file add speedup, and 724.0x vs naive.</a:t>
             </a:r>
           </a:p>
         </p:txBody>
